--- a/~sasano/lecture/proglang/26/proglang9.pptx
+++ b/~sasano/lecture/proglang/26/proglang9.pptx
@@ -130,6 +130,22 @@
       </a:defRPr>
     </a:lvl9pPr>
   </p:defaultTextStyle>
+  <p:extLst>
+    <p:ext uri="{EFAFB233-063F-42B5-8137-9DF3F51BA10A}">
+      <p15:sldGuideLst xmlns:p15="http://schemas.microsoft.com/office/powerpoint/2012/main">
+        <p15:guide id="1" orient="horz" pos="2160">
+          <p15:clr>
+            <a:srgbClr val="A4A3A4"/>
+          </p15:clr>
+        </p15:guide>
+        <p15:guide id="2" pos="2880">
+          <p15:clr>
+            <a:srgbClr val="A4A3A4"/>
+          </p15:clr>
+        </p15:guide>
+      </p15:sldGuideLst>
+    </p:ext>
+  </p:extLst>
 </p:presentation>
 </file>
 
@@ -216,7 +232,7 @@
             <a:fld id="{CD3D9CFB-0975-45A5-A4EB-427654E76663}" type="datetimeFigureOut">
               <a:rPr kumimoji="1" lang="ja-JP" altLang="en-US" smtClean="0"/>
               <a:pPr/>
-              <a:t>2014/11/27</a:t>
+              <a:t>2026/9/28</a:t>
             </a:fld>
             <a:endParaRPr kumimoji="1" lang="ja-JP" altLang="en-US"/>
           </a:p>
@@ -282,70 +298,69 @@
           <a:p>
             <a:pPr lvl="0"/>
             <a:r>
-              <a:rPr kumimoji="1" lang="ja-JP" altLang="en-US" smtClean="0"/>
+              <a:rPr kumimoji="1" lang="ja-JP" altLang="en-US"/>
               <a:t>マスタ テキストの書式設定</a:t>
             </a:r>
           </a:p>
           <a:p>
             <a:pPr lvl="1"/>
             <a:r>
-              <a:rPr kumimoji="1" lang="ja-JP" altLang="en-US" smtClean="0"/>
+              <a:rPr kumimoji="1" lang="ja-JP" altLang="en-US"/>
               <a:t>第 </a:t>
             </a:r>
             <a:r>
-              <a:rPr kumimoji="1" lang="en-US" altLang="ja-JP" smtClean="0"/>
+              <a:rPr kumimoji="1" lang="en-US" altLang="ja-JP"/>
               <a:t>2 </a:t>
             </a:r>
             <a:r>
-              <a:rPr kumimoji="1" lang="ja-JP" altLang="en-US" smtClean="0"/>
+              <a:rPr kumimoji="1" lang="ja-JP" altLang="en-US"/>
               <a:t>レベル</a:t>
             </a:r>
           </a:p>
           <a:p>
             <a:pPr lvl="2"/>
             <a:r>
-              <a:rPr kumimoji="1" lang="ja-JP" altLang="en-US" smtClean="0"/>
+              <a:rPr kumimoji="1" lang="ja-JP" altLang="en-US"/>
               <a:t>第 </a:t>
             </a:r>
             <a:r>
-              <a:rPr kumimoji="1" lang="en-US" altLang="ja-JP" smtClean="0"/>
+              <a:rPr kumimoji="1" lang="en-US" altLang="ja-JP"/>
               <a:t>3 </a:t>
             </a:r>
             <a:r>
-              <a:rPr kumimoji="1" lang="ja-JP" altLang="en-US" smtClean="0"/>
+              <a:rPr kumimoji="1" lang="ja-JP" altLang="en-US"/>
               <a:t>レベル</a:t>
             </a:r>
           </a:p>
           <a:p>
             <a:pPr lvl="3"/>
             <a:r>
-              <a:rPr kumimoji="1" lang="ja-JP" altLang="en-US" smtClean="0"/>
+              <a:rPr kumimoji="1" lang="ja-JP" altLang="en-US"/>
               <a:t>第 </a:t>
             </a:r>
             <a:r>
-              <a:rPr kumimoji="1" lang="en-US" altLang="ja-JP" smtClean="0"/>
+              <a:rPr kumimoji="1" lang="en-US" altLang="ja-JP"/>
               <a:t>4 </a:t>
             </a:r>
             <a:r>
-              <a:rPr kumimoji="1" lang="ja-JP" altLang="en-US" smtClean="0"/>
+              <a:rPr kumimoji="1" lang="ja-JP" altLang="en-US"/>
               <a:t>レベル</a:t>
             </a:r>
           </a:p>
           <a:p>
             <a:pPr lvl="4"/>
             <a:r>
-              <a:rPr kumimoji="1" lang="ja-JP" altLang="en-US" smtClean="0"/>
+              <a:rPr kumimoji="1" lang="ja-JP" altLang="en-US"/>
               <a:t>第 </a:t>
             </a:r>
             <a:r>
-              <a:rPr kumimoji="1" lang="en-US" altLang="ja-JP" smtClean="0"/>
+              <a:rPr kumimoji="1" lang="en-US" altLang="ja-JP"/>
               <a:t>5 </a:t>
             </a:r>
             <a:r>
-              <a:rPr kumimoji="1" lang="ja-JP" altLang="en-US" smtClean="0"/>
+              <a:rPr kumimoji="1" lang="ja-JP" altLang="en-US"/>
               <a:t>レベル</a:t>
             </a:r>
-            <a:endParaRPr kumimoji="1" lang="ja-JP" altLang="en-US"/>
           </a:p>
         </p:txBody>
       </p:sp>
@@ -607,7 +622,7 @@
           <a:lstStyle/>
           <a:p>
             <a:pPr eaLnBrk="1" hangingPunct="1"/>
-            <a:endParaRPr lang="ja-JP" altLang="ja-JP" smtClean="0">
+            <a:endParaRPr lang="ja-JP" altLang="ja-JP">
               <a:ea typeface="ＭＳ Ｐゴシック" pitchFamily="50" charset="-128"/>
             </a:endParaRPr>
           </a:p>
@@ -709,7 +724,7 @@
           <a:lstStyle/>
           <a:p>
             <a:pPr eaLnBrk="1" hangingPunct="1"/>
-            <a:endParaRPr lang="ja-JP" altLang="ja-JP" smtClean="0">
+            <a:endParaRPr lang="ja-JP" altLang="ja-JP">
               <a:ea typeface="ＭＳ Ｐゴシック" pitchFamily="50" charset="-128"/>
             </a:endParaRPr>
           </a:p>
@@ -811,7 +826,7 @@
           <a:lstStyle/>
           <a:p>
             <a:pPr eaLnBrk="1" hangingPunct="1"/>
-            <a:endParaRPr lang="ja-JP" altLang="ja-JP" smtClean="0">
+            <a:endParaRPr lang="ja-JP" altLang="ja-JP">
               <a:ea typeface="ＭＳ Ｐゴシック" pitchFamily="50" charset="-128"/>
             </a:endParaRPr>
           </a:p>
@@ -913,7 +928,7 @@
           <a:lstStyle/>
           <a:p>
             <a:pPr eaLnBrk="1" hangingPunct="1"/>
-            <a:endParaRPr lang="ja-JP" altLang="ja-JP" smtClean="0">
+            <a:endParaRPr lang="ja-JP" altLang="ja-JP">
               <a:ea typeface="ＭＳ Ｐゴシック" pitchFamily="50" charset="-128"/>
             </a:endParaRPr>
           </a:p>
@@ -1015,7 +1030,7 @@
           <a:lstStyle/>
           <a:p>
             <a:pPr eaLnBrk="1" hangingPunct="1"/>
-            <a:endParaRPr lang="ja-JP" altLang="ja-JP" smtClean="0">
+            <a:endParaRPr lang="ja-JP" altLang="ja-JP">
               <a:ea typeface="ＭＳ Ｐゴシック" pitchFamily="50" charset="-128"/>
             </a:endParaRPr>
           </a:p>
@@ -1117,7 +1132,7 @@
           <a:lstStyle/>
           <a:p>
             <a:pPr eaLnBrk="1" hangingPunct="1"/>
-            <a:endParaRPr lang="ja-JP" altLang="ja-JP" smtClean="0">
+            <a:endParaRPr lang="ja-JP" altLang="ja-JP">
               <a:ea typeface="ＭＳ Ｐゴシック" pitchFamily="50" charset="-128"/>
             </a:endParaRPr>
           </a:p>
@@ -1219,7 +1234,7 @@
           <a:lstStyle/>
           <a:p>
             <a:pPr eaLnBrk="1" hangingPunct="1"/>
-            <a:endParaRPr lang="ja-JP" altLang="ja-JP" smtClean="0">
+            <a:endParaRPr lang="ja-JP" altLang="ja-JP">
               <a:ea typeface="ＭＳ Ｐゴシック" pitchFamily="50" charset="-128"/>
             </a:endParaRPr>
           </a:p>
@@ -1321,7 +1336,7 @@
           <a:lstStyle/>
           <a:p>
             <a:pPr eaLnBrk="1" hangingPunct="1"/>
-            <a:endParaRPr lang="ja-JP" altLang="ja-JP" smtClean="0">
+            <a:endParaRPr lang="ja-JP" altLang="ja-JP">
               <a:ea typeface="ＭＳ Ｐゴシック" pitchFamily="50" charset="-128"/>
             </a:endParaRPr>
           </a:p>
@@ -1423,7 +1438,7 @@
           <a:lstStyle/>
           <a:p>
             <a:pPr eaLnBrk="1" hangingPunct="1"/>
-            <a:endParaRPr lang="ja-JP" altLang="ja-JP" smtClean="0">
+            <a:endParaRPr lang="ja-JP" altLang="ja-JP">
               <a:ea typeface="ＭＳ Ｐゴシック" pitchFamily="50" charset="-128"/>
             </a:endParaRPr>
           </a:p>
@@ -1525,7 +1540,7 @@
           <a:lstStyle/>
           <a:p>
             <a:pPr eaLnBrk="1" hangingPunct="1"/>
-            <a:endParaRPr lang="ja-JP" altLang="ja-JP" smtClean="0">
+            <a:endParaRPr lang="ja-JP" altLang="ja-JP">
               <a:ea typeface="ＭＳ Ｐゴシック" pitchFamily="50" charset="-128"/>
             </a:endParaRPr>
           </a:p>
@@ -1627,7 +1642,7 @@
           <a:lstStyle/>
           <a:p>
             <a:pPr eaLnBrk="1" hangingPunct="1"/>
-            <a:endParaRPr lang="ja-JP" altLang="ja-JP" smtClean="0">
+            <a:endParaRPr lang="ja-JP" altLang="ja-JP">
               <a:ea typeface="ＭＳ Ｐゴシック" pitchFamily="50" charset="-128"/>
             </a:endParaRPr>
           </a:p>
@@ -1729,7 +1744,7 @@
           <a:lstStyle/>
           <a:p>
             <a:pPr eaLnBrk="1" hangingPunct="1"/>
-            <a:endParaRPr lang="ja-JP" altLang="ja-JP" smtClean="0">
+            <a:endParaRPr lang="ja-JP" altLang="ja-JP">
               <a:ea typeface="ＭＳ Ｐゴシック" pitchFamily="50" charset="-128"/>
             </a:endParaRPr>
           </a:p>
@@ -1831,7 +1846,7 @@
           <a:lstStyle/>
           <a:p>
             <a:pPr eaLnBrk="1" hangingPunct="1"/>
-            <a:endParaRPr lang="ja-JP" altLang="ja-JP" smtClean="0">
+            <a:endParaRPr lang="ja-JP" altLang="ja-JP">
               <a:ea typeface="ＭＳ Ｐゴシック" pitchFamily="50" charset="-128"/>
             </a:endParaRPr>
           </a:p>
@@ -1933,7 +1948,7 @@
           <a:lstStyle/>
           <a:p>
             <a:pPr eaLnBrk="1" hangingPunct="1"/>
-            <a:endParaRPr lang="ja-JP" altLang="ja-JP" smtClean="0">
+            <a:endParaRPr lang="ja-JP" altLang="ja-JP">
               <a:ea typeface="ＭＳ Ｐゴシック" pitchFamily="50" charset="-128"/>
             </a:endParaRPr>
           </a:p>
@@ -2035,7 +2050,7 @@
           <a:lstStyle/>
           <a:p>
             <a:pPr eaLnBrk="1" hangingPunct="1"/>
-            <a:endParaRPr lang="ja-JP" altLang="ja-JP" smtClean="0">
+            <a:endParaRPr lang="ja-JP" altLang="ja-JP">
               <a:ea typeface="ＭＳ Ｐゴシック" pitchFamily="50" charset="-128"/>
             </a:endParaRPr>
           </a:p>
@@ -2137,7 +2152,7 @@
           <a:lstStyle/>
           <a:p>
             <a:pPr eaLnBrk="1" hangingPunct="1"/>
-            <a:endParaRPr lang="ja-JP" altLang="ja-JP" smtClean="0">
+            <a:endParaRPr lang="ja-JP" altLang="ja-JP">
               <a:ea typeface="ＭＳ Ｐゴシック" pitchFamily="50" charset="-128"/>
             </a:endParaRPr>
           </a:p>
@@ -2239,7 +2254,7 @@
           <a:lstStyle/>
           <a:p>
             <a:pPr eaLnBrk="1" hangingPunct="1"/>
-            <a:endParaRPr lang="ja-JP" altLang="ja-JP" smtClean="0">
+            <a:endParaRPr lang="ja-JP" altLang="ja-JP">
               <a:ea typeface="ＭＳ Ｐゴシック" pitchFamily="50" charset="-128"/>
             </a:endParaRPr>
           </a:p>
@@ -2341,7 +2356,7 @@
           <a:lstStyle/>
           <a:p>
             <a:pPr eaLnBrk="1" hangingPunct="1"/>
-            <a:endParaRPr lang="ja-JP" altLang="ja-JP" smtClean="0">
+            <a:endParaRPr lang="ja-JP" altLang="ja-JP">
               <a:ea typeface="ＭＳ Ｐゴシック" pitchFamily="50" charset="-128"/>
             </a:endParaRPr>
           </a:p>
@@ -2443,7 +2458,7 @@
           <a:lstStyle/>
           <a:p>
             <a:pPr eaLnBrk="1" hangingPunct="1"/>
-            <a:endParaRPr lang="ja-JP" altLang="ja-JP" smtClean="0">
+            <a:endParaRPr lang="ja-JP" altLang="ja-JP">
               <a:ea typeface="ＭＳ Ｐゴシック" pitchFamily="50" charset="-128"/>
             </a:endParaRPr>
           </a:p>
@@ -2495,10 +2510,9 @@
           <a:lstStyle/>
           <a:p>
             <a:r>
-              <a:rPr kumimoji="1" lang="ja-JP" altLang="en-US" smtClean="0"/>
+              <a:rPr kumimoji="1" lang="ja-JP" altLang="en-US"/>
               <a:t>マスタ タイトルの書式設定</a:t>
             </a:r>
-            <a:endParaRPr kumimoji="1" lang="ja-JP" altLang="en-US"/>
           </a:p>
         </p:txBody>
       </p:sp>
@@ -2614,10 +2628,9 @@
           </a:lstStyle>
           <a:p>
             <a:r>
-              <a:rPr kumimoji="1" lang="ja-JP" altLang="en-US" smtClean="0"/>
+              <a:rPr kumimoji="1" lang="ja-JP" altLang="en-US"/>
               <a:t>マスタ サブタイトルの書式設定</a:t>
             </a:r>
-            <a:endParaRPr kumimoji="1" lang="ja-JP" altLang="en-US"/>
           </a:p>
         </p:txBody>
       </p:sp>
@@ -2639,7 +2652,7 @@
             <a:fld id="{E90ED720-0104-4369-84BC-D37694168613}" type="datetimeFigureOut">
               <a:rPr kumimoji="1" lang="ja-JP" altLang="en-US" smtClean="0"/>
               <a:pPr/>
-              <a:t>2014/11/27</a:t>
+              <a:t>2026/9/28</a:t>
             </a:fld>
             <a:endParaRPr kumimoji="1" lang="ja-JP" altLang="en-US"/>
           </a:p>
@@ -2729,10 +2742,9 @@
           <a:lstStyle/>
           <a:p>
             <a:r>
-              <a:rPr kumimoji="1" lang="ja-JP" altLang="en-US" smtClean="0"/>
+              <a:rPr kumimoji="1" lang="ja-JP" altLang="en-US"/>
               <a:t>マスタ タイトルの書式設定</a:t>
             </a:r>
-            <a:endParaRPr kumimoji="1" lang="ja-JP" altLang="en-US"/>
           </a:p>
         </p:txBody>
       </p:sp>
@@ -2753,70 +2765,69 @@
           <a:p>
             <a:pPr lvl="0"/>
             <a:r>
-              <a:rPr kumimoji="1" lang="ja-JP" altLang="en-US" smtClean="0"/>
+              <a:rPr kumimoji="1" lang="ja-JP" altLang="en-US"/>
               <a:t>マスタ テキストの書式設定</a:t>
             </a:r>
           </a:p>
           <a:p>
             <a:pPr lvl="1"/>
             <a:r>
-              <a:rPr kumimoji="1" lang="ja-JP" altLang="en-US" smtClean="0"/>
+              <a:rPr kumimoji="1" lang="ja-JP" altLang="en-US"/>
               <a:t>第 </a:t>
             </a:r>
             <a:r>
-              <a:rPr kumimoji="1" lang="en-US" altLang="ja-JP" smtClean="0"/>
+              <a:rPr kumimoji="1" lang="en-US" altLang="ja-JP"/>
               <a:t>2 </a:t>
             </a:r>
             <a:r>
-              <a:rPr kumimoji="1" lang="ja-JP" altLang="en-US" smtClean="0"/>
+              <a:rPr kumimoji="1" lang="ja-JP" altLang="en-US"/>
               <a:t>レベル</a:t>
             </a:r>
           </a:p>
           <a:p>
             <a:pPr lvl="2"/>
             <a:r>
-              <a:rPr kumimoji="1" lang="ja-JP" altLang="en-US" smtClean="0"/>
+              <a:rPr kumimoji="1" lang="ja-JP" altLang="en-US"/>
               <a:t>第 </a:t>
             </a:r>
             <a:r>
-              <a:rPr kumimoji="1" lang="en-US" altLang="ja-JP" smtClean="0"/>
+              <a:rPr kumimoji="1" lang="en-US" altLang="ja-JP"/>
               <a:t>3 </a:t>
             </a:r>
             <a:r>
-              <a:rPr kumimoji="1" lang="ja-JP" altLang="en-US" smtClean="0"/>
+              <a:rPr kumimoji="1" lang="ja-JP" altLang="en-US"/>
               <a:t>レベル</a:t>
             </a:r>
           </a:p>
           <a:p>
             <a:pPr lvl="3"/>
             <a:r>
-              <a:rPr kumimoji="1" lang="ja-JP" altLang="en-US" smtClean="0"/>
+              <a:rPr kumimoji="1" lang="ja-JP" altLang="en-US"/>
               <a:t>第 </a:t>
             </a:r>
             <a:r>
-              <a:rPr kumimoji="1" lang="en-US" altLang="ja-JP" smtClean="0"/>
+              <a:rPr kumimoji="1" lang="en-US" altLang="ja-JP"/>
               <a:t>4 </a:t>
             </a:r>
             <a:r>
-              <a:rPr kumimoji="1" lang="ja-JP" altLang="en-US" smtClean="0"/>
+              <a:rPr kumimoji="1" lang="ja-JP" altLang="en-US"/>
               <a:t>レベル</a:t>
             </a:r>
           </a:p>
           <a:p>
             <a:pPr lvl="4"/>
             <a:r>
-              <a:rPr kumimoji="1" lang="ja-JP" altLang="en-US" smtClean="0"/>
+              <a:rPr kumimoji="1" lang="ja-JP" altLang="en-US"/>
               <a:t>第 </a:t>
             </a:r>
             <a:r>
-              <a:rPr kumimoji="1" lang="en-US" altLang="ja-JP" smtClean="0"/>
+              <a:rPr kumimoji="1" lang="en-US" altLang="ja-JP"/>
               <a:t>5 </a:t>
             </a:r>
             <a:r>
-              <a:rPr kumimoji="1" lang="ja-JP" altLang="en-US" smtClean="0"/>
+              <a:rPr kumimoji="1" lang="ja-JP" altLang="en-US"/>
               <a:t>レベル</a:t>
             </a:r>
-            <a:endParaRPr kumimoji="1" lang="ja-JP" altLang="en-US"/>
           </a:p>
         </p:txBody>
       </p:sp>
@@ -2838,7 +2849,7 @@
             <a:fld id="{E90ED720-0104-4369-84BC-D37694168613}" type="datetimeFigureOut">
               <a:rPr kumimoji="1" lang="ja-JP" altLang="en-US" smtClean="0"/>
               <a:pPr/>
-              <a:t>2014/11/27</a:t>
+              <a:t>2026/9/28</a:t>
             </a:fld>
             <a:endParaRPr kumimoji="1" lang="ja-JP" altLang="en-US"/>
           </a:p>
@@ -2933,10 +2944,9 @@
           <a:lstStyle/>
           <a:p>
             <a:r>
-              <a:rPr kumimoji="1" lang="ja-JP" altLang="en-US" smtClean="0"/>
+              <a:rPr kumimoji="1" lang="ja-JP" altLang="en-US"/>
               <a:t>マスタ タイトルの書式設定</a:t>
             </a:r>
-            <a:endParaRPr kumimoji="1" lang="ja-JP" altLang="en-US"/>
           </a:p>
         </p:txBody>
       </p:sp>
@@ -2962,70 +2972,69 @@
           <a:p>
             <a:pPr lvl="0"/>
             <a:r>
-              <a:rPr kumimoji="1" lang="ja-JP" altLang="en-US" smtClean="0"/>
+              <a:rPr kumimoji="1" lang="ja-JP" altLang="en-US"/>
               <a:t>マスタ テキストの書式設定</a:t>
             </a:r>
           </a:p>
           <a:p>
             <a:pPr lvl="1"/>
             <a:r>
-              <a:rPr kumimoji="1" lang="ja-JP" altLang="en-US" smtClean="0"/>
+              <a:rPr kumimoji="1" lang="ja-JP" altLang="en-US"/>
               <a:t>第 </a:t>
             </a:r>
             <a:r>
-              <a:rPr kumimoji="1" lang="en-US" altLang="ja-JP" smtClean="0"/>
+              <a:rPr kumimoji="1" lang="en-US" altLang="ja-JP"/>
               <a:t>2 </a:t>
             </a:r>
             <a:r>
-              <a:rPr kumimoji="1" lang="ja-JP" altLang="en-US" smtClean="0"/>
+              <a:rPr kumimoji="1" lang="ja-JP" altLang="en-US"/>
               <a:t>レベル</a:t>
             </a:r>
           </a:p>
           <a:p>
             <a:pPr lvl="2"/>
             <a:r>
-              <a:rPr kumimoji="1" lang="ja-JP" altLang="en-US" smtClean="0"/>
+              <a:rPr kumimoji="1" lang="ja-JP" altLang="en-US"/>
               <a:t>第 </a:t>
             </a:r>
             <a:r>
-              <a:rPr kumimoji="1" lang="en-US" altLang="ja-JP" smtClean="0"/>
+              <a:rPr kumimoji="1" lang="en-US" altLang="ja-JP"/>
               <a:t>3 </a:t>
             </a:r>
             <a:r>
-              <a:rPr kumimoji="1" lang="ja-JP" altLang="en-US" smtClean="0"/>
+              <a:rPr kumimoji="1" lang="ja-JP" altLang="en-US"/>
               <a:t>レベル</a:t>
             </a:r>
           </a:p>
           <a:p>
             <a:pPr lvl="3"/>
             <a:r>
-              <a:rPr kumimoji="1" lang="ja-JP" altLang="en-US" smtClean="0"/>
+              <a:rPr kumimoji="1" lang="ja-JP" altLang="en-US"/>
               <a:t>第 </a:t>
             </a:r>
             <a:r>
-              <a:rPr kumimoji="1" lang="en-US" altLang="ja-JP" smtClean="0"/>
+              <a:rPr kumimoji="1" lang="en-US" altLang="ja-JP"/>
               <a:t>4 </a:t>
             </a:r>
             <a:r>
-              <a:rPr kumimoji="1" lang="ja-JP" altLang="en-US" smtClean="0"/>
+              <a:rPr kumimoji="1" lang="ja-JP" altLang="en-US"/>
               <a:t>レベル</a:t>
             </a:r>
           </a:p>
           <a:p>
             <a:pPr lvl="4"/>
             <a:r>
-              <a:rPr kumimoji="1" lang="ja-JP" altLang="en-US" smtClean="0"/>
+              <a:rPr kumimoji="1" lang="ja-JP" altLang="en-US"/>
               <a:t>第 </a:t>
             </a:r>
             <a:r>
-              <a:rPr kumimoji="1" lang="en-US" altLang="ja-JP" smtClean="0"/>
+              <a:rPr kumimoji="1" lang="en-US" altLang="ja-JP"/>
               <a:t>5 </a:t>
             </a:r>
             <a:r>
-              <a:rPr kumimoji="1" lang="ja-JP" altLang="en-US" smtClean="0"/>
+              <a:rPr kumimoji="1" lang="ja-JP" altLang="en-US"/>
               <a:t>レベル</a:t>
             </a:r>
-            <a:endParaRPr kumimoji="1" lang="ja-JP" altLang="en-US"/>
           </a:p>
         </p:txBody>
       </p:sp>
@@ -3047,7 +3056,7 @@
             <a:fld id="{E90ED720-0104-4369-84BC-D37694168613}" type="datetimeFigureOut">
               <a:rPr kumimoji="1" lang="ja-JP" altLang="en-US" smtClean="0"/>
               <a:pPr/>
-              <a:t>2014/11/27</a:t>
+              <a:t>2026/9/28</a:t>
             </a:fld>
             <a:endParaRPr kumimoji="1" lang="ja-JP" altLang="en-US"/>
           </a:p>
@@ -3137,10 +3146,9 @@
           <a:lstStyle/>
           <a:p>
             <a:r>
-              <a:rPr kumimoji="1" lang="ja-JP" altLang="en-US" smtClean="0"/>
+              <a:rPr kumimoji="1" lang="ja-JP" altLang="en-US"/>
               <a:t>マスタ タイトルの書式設定</a:t>
             </a:r>
-            <a:endParaRPr kumimoji="1" lang="ja-JP" altLang="en-US"/>
           </a:p>
         </p:txBody>
       </p:sp>
@@ -3161,70 +3169,69 @@
           <a:p>
             <a:pPr lvl="0"/>
             <a:r>
-              <a:rPr kumimoji="1" lang="ja-JP" altLang="en-US" smtClean="0"/>
+              <a:rPr kumimoji="1" lang="ja-JP" altLang="en-US"/>
               <a:t>マスタ テキストの書式設定</a:t>
             </a:r>
           </a:p>
           <a:p>
             <a:pPr lvl="1"/>
             <a:r>
-              <a:rPr kumimoji="1" lang="ja-JP" altLang="en-US" smtClean="0"/>
+              <a:rPr kumimoji="1" lang="ja-JP" altLang="en-US"/>
               <a:t>第 </a:t>
             </a:r>
             <a:r>
-              <a:rPr kumimoji="1" lang="en-US" altLang="ja-JP" smtClean="0"/>
+              <a:rPr kumimoji="1" lang="en-US" altLang="ja-JP"/>
               <a:t>2 </a:t>
             </a:r>
             <a:r>
-              <a:rPr kumimoji="1" lang="ja-JP" altLang="en-US" smtClean="0"/>
+              <a:rPr kumimoji="1" lang="ja-JP" altLang="en-US"/>
               <a:t>レベル</a:t>
             </a:r>
           </a:p>
           <a:p>
             <a:pPr lvl="2"/>
             <a:r>
-              <a:rPr kumimoji="1" lang="ja-JP" altLang="en-US" smtClean="0"/>
+              <a:rPr kumimoji="1" lang="ja-JP" altLang="en-US"/>
               <a:t>第 </a:t>
             </a:r>
             <a:r>
-              <a:rPr kumimoji="1" lang="en-US" altLang="ja-JP" smtClean="0"/>
+              <a:rPr kumimoji="1" lang="en-US" altLang="ja-JP"/>
               <a:t>3 </a:t>
             </a:r>
             <a:r>
-              <a:rPr kumimoji="1" lang="ja-JP" altLang="en-US" smtClean="0"/>
+              <a:rPr kumimoji="1" lang="ja-JP" altLang="en-US"/>
               <a:t>レベル</a:t>
             </a:r>
           </a:p>
           <a:p>
             <a:pPr lvl="3"/>
             <a:r>
-              <a:rPr kumimoji="1" lang="ja-JP" altLang="en-US" smtClean="0"/>
+              <a:rPr kumimoji="1" lang="ja-JP" altLang="en-US"/>
               <a:t>第 </a:t>
             </a:r>
             <a:r>
-              <a:rPr kumimoji="1" lang="en-US" altLang="ja-JP" smtClean="0"/>
+              <a:rPr kumimoji="1" lang="en-US" altLang="ja-JP"/>
               <a:t>4 </a:t>
             </a:r>
             <a:r>
-              <a:rPr kumimoji="1" lang="ja-JP" altLang="en-US" smtClean="0"/>
+              <a:rPr kumimoji="1" lang="ja-JP" altLang="en-US"/>
               <a:t>レベル</a:t>
             </a:r>
           </a:p>
           <a:p>
             <a:pPr lvl="4"/>
             <a:r>
-              <a:rPr kumimoji="1" lang="ja-JP" altLang="en-US" smtClean="0"/>
+              <a:rPr kumimoji="1" lang="ja-JP" altLang="en-US"/>
               <a:t>第 </a:t>
             </a:r>
             <a:r>
-              <a:rPr kumimoji="1" lang="en-US" altLang="ja-JP" smtClean="0"/>
+              <a:rPr kumimoji="1" lang="en-US" altLang="ja-JP"/>
               <a:t>5 </a:t>
             </a:r>
             <a:r>
-              <a:rPr kumimoji="1" lang="ja-JP" altLang="en-US" smtClean="0"/>
+              <a:rPr kumimoji="1" lang="ja-JP" altLang="en-US"/>
               <a:t>レベル</a:t>
             </a:r>
-            <a:endParaRPr kumimoji="1" lang="ja-JP" altLang="en-US"/>
           </a:p>
         </p:txBody>
       </p:sp>
@@ -3246,7 +3253,7 @@
             <a:fld id="{E90ED720-0104-4369-84BC-D37694168613}" type="datetimeFigureOut">
               <a:rPr kumimoji="1" lang="ja-JP" altLang="en-US" smtClean="0"/>
               <a:pPr/>
-              <a:t>2014/11/27</a:t>
+              <a:t>2026/9/28</a:t>
             </a:fld>
             <a:endParaRPr kumimoji="1" lang="ja-JP" altLang="en-US"/>
           </a:p>
@@ -3345,10 +3352,9 @@
           </a:lstStyle>
           <a:p>
             <a:r>
-              <a:rPr kumimoji="1" lang="ja-JP" altLang="en-US" smtClean="0"/>
+              <a:rPr kumimoji="1" lang="ja-JP" altLang="en-US"/>
               <a:t>マスタ タイトルの書式設定</a:t>
             </a:r>
-            <a:endParaRPr kumimoji="1" lang="ja-JP" altLang="en-US"/>
           </a:p>
         </p:txBody>
       </p:sp>
@@ -3465,7 +3471,7 @@
           <a:p>
             <a:pPr lvl="0"/>
             <a:r>
-              <a:rPr kumimoji="1" lang="ja-JP" altLang="en-US" smtClean="0"/>
+              <a:rPr kumimoji="1" lang="ja-JP" altLang="en-US"/>
               <a:t>マスタ テキストの書式設定</a:t>
             </a:r>
           </a:p>
@@ -3489,7 +3495,7 @@
             <a:fld id="{E90ED720-0104-4369-84BC-D37694168613}" type="datetimeFigureOut">
               <a:rPr kumimoji="1" lang="ja-JP" altLang="en-US" smtClean="0"/>
               <a:pPr/>
-              <a:t>2014/11/27</a:t>
+              <a:t>2026/9/28</a:t>
             </a:fld>
             <a:endParaRPr kumimoji="1" lang="ja-JP" altLang="en-US"/>
           </a:p>
@@ -3579,10 +3585,9 @@
           <a:lstStyle/>
           <a:p>
             <a:r>
-              <a:rPr kumimoji="1" lang="ja-JP" altLang="en-US" smtClean="0"/>
+              <a:rPr kumimoji="1" lang="ja-JP" altLang="en-US"/>
               <a:t>マスタ タイトルの書式設定</a:t>
             </a:r>
-            <a:endParaRPr kumimoji="1" lang="ja-JP" altLang="en-US"/>
           </a:p>
         </p:txBody>
       </p:sp>
@@ -3636,70 +3641,69 @@
           <a:p>
             <a:pPr lvl="0"/>
             <a:r>
-              <a:rPr kumimoji="1" lang="ja-JP" altLang="en-US" smtClean="0"/>
+              <a:rPr kumimoji="1" lang="ja-JP" altLang="en-US"/>
               <a:t>マスタ テキストの書式設定</a:t>
             </a:r>
           </a:p>
           <a:p>
             <a:pPr lvl="1"/>
             <a:r>
-              <a:rPr kumimoji="1" lang="ja-JP" altLang="en-US" smtClean="0"/>
+              <a:rPr kumimoji="1" lang="ja-JP" altLang="en-US"/>
               <a:t>第 </a:t>
             </a:r>
             <a:r>
-              <a:rPr kumimoji="1" lang="en-US" altLang="ja-JP" smtClean="0"/>
+              <a:rPr kumimoji="1" lang="en-US" altLang="ja-JP"/>
               <a:t>2 </a:t>
             </a:r>
             <a:r>
-              <a:rPr kumimoji="1" lang="ja-JP" altLang="en-US" smtClean="0"/>
+              <a:rPr kumimoji="1" lang="ja-JP" altLang="en-US"/>
               <a:t>レベル</a:t>
             </a:r>
           </a:p>
           <a:p>
             <a:pPr lvl="2"/>
             <a:r>
-              <a:rPr kumimoji="1" lang="ja-JP" altLang="en-US" smtClean="0"/>
+              <a:rPr kumimoji="1" lang="ja-JP" altLang="en-US"/>
               <a:t>第 </a:t>
             </a:r>
             <a:r>
-              <a:rPr kumimoji="1" lang="en-US" altLang="ja-JP" smtClean="0"/>
+              <a:rPr kumimoji="1" lang="en-US" altLang="ja-JP"/>
               <a:t>3 </a:t>
             </a:r>
             <a:r>
-              <a:rPr kumimoji="1" lang="ja-JP" altLang="en-US" smtClean="0"/>
+              <a:rPr kumimoji="1" lang="ja-JP" altLang="en-US"/>
               <a:t>レベル</a:t>
             </a:r>
           </a:p>
           <a:p>
             <a:pPr lvl="3"/>
             <a:r>
-              <a:rPr kumimoji="1" lang="ja-JP" altLang="en-US" smtClean="0"/>
+              <a:rPr kumimoji="1" lang="ja-JP" altLang="en-US"/>
               <a:t>第 </a:t>
             </a:r>
             <a:r>
-              <a:rPr kumimoji="1" lang="en-US" altLang="ja-JP" smtClean="0"/>
+              <a:rPr kumimoji="1" lang="en-US" altLang="ja-JP"/>
               <a:t>4 </a:t>
             </a:r>
             <a:r>
-              <a:rPr kumimoji="1" lang="ja-JP" altLang="en-US" smtClean="0"/>
+              <a:rPr kumimoji="1" lang="ja-JP" altLang="en-US"/>
               <a:t>レベル</a:t>
             </a:r>
           </a:p>
           <a:p>
             <a:pPr lvl="4"/>
             <a:r>
-              <a:rPr kumimoji="1" lang="ja-JP" altLang="en-US" smtClean="0"/>
+              <a:rPr kumimoji="1" lang="ja-JP" altLang="en-US"/>
               <a:t>第 </a:t>
             </a:r>
             <a:r>
-              <a:rPr kumimoji="1" lang="en-US" altLang="ja-JP" smtClean="0"/>
+              <a:rPr kumimoji="1" lang="en-US" altLang="ja-JP"/>
               <a:t>5 </a:t>
             </a:r>
             <a:r>
-              <a:rPr kumimoji="1" lang="ja-JP" altLang="en-US" smtClean="0"/>
+              <a:rPr kumimoji="1" lang="ja-JP" altLang="en-US"/>
               <a:t>レベル</a:t>
             </a:r>
-            <a:endParaRPr kumimoji="1" lang="ja-JP" altLang="en-US"/>
           </a:p>
         </p:txBody>
       </p:sp>
@@ -3753,70 +3757,69 @@
           <a:p>
             <a:pPr lvl="0"/>
             <a:r>
-              <a:rPr kumimoji="1" lang="ja-JP" altLang="en-US" smtClean="0"/>
+              <a:rPr kumimoji="1" lang="ja-JP" altLang="en-US"/>
               <a:t>マスタ テキストの書式設定</a:t>
             </a:r>
           </a:p>
           <a:p>
             <a:pPr lvl="1"/>
             <a:r>
-              <a:rPr kumimoji="1" lang="ja-JP" altLang="en-US" smtClean="0"/>
+              <a:rPr kumimoji="1" lang="ja-JP" altLang="en-US"/>
               <a:t>第 </a:t>
             </a:r>
             <a:r>
-              <a:rPr kumimoji="1" lang="en-US" altLang="ja-JP" smtClean="0"/>
+              <a:rPr kumimoji="1" lang="en-US" altLang="ja-JP"/>
               <a:t>2 </a:t>
             </a:r>
             <a:r>
-              <a:rPr kumimoji="1" lang="ja-JP" altLang="en-US" smtClean="0"/>
+              <a:rPr kumimoji="1" lang="ja-JP" altLang="en-US"/>
               <a:t>レベル</a:t>
             </a:r>
           </a:p>
           <a:p>
             <a:pPr lvl="2"/>
             <a:r>
-              <a:rPr kumimoji="1" lang="ja-JP" altLang="en-US" smtClean="0"/>
+              <a:rPr kumimoji="1" lang="ja-JP" altLang="en-US"/>
               <a:t>第 </a:t>
             </a:r>
             <a:r>
-              <a:rPr kumimoji="1" lang="en-US" altLang="ja-JP" smtClean="0"/>
+              <a:rPr kumimoji="1" lang="en-US" altLang="ja-JP"/>
               <a:t>3 </a:t>
             </a:r>
             <a:r>
-              <a:rPr kumimoji="1" lang="ja-JP" altLang="en-US" smtClean="0"/>
+              <a:rPr kumimoji="1" lang="ja-JP" altLang="en-US"/>
               <a:t>レベル</a:t>
             </a:r>
           </a:p>
           <a:p>
             <a:pPr lvl="3"/>
             <a:r>
-              <a:rPr kumimoji="1" lang="ja-JP" altLang="en-US" smtClean="0"/>
+              <a:rPr kumimoji="1" lang="ja-JP" altLang="en-US"/>
               <a:t>第 </a:t>
             </a:r>
             <a:r>
-              <a:rPr kumimoji="1" lang="en-US" altLang="ja-JP" smtClean="0"/>
+              <a:rPr kumimoji="1" lang="en-US" altLang="ja-JP"/>
               <a:t>4 </a:t>
             </a:r>
             <a:r>
-              <a:rPr kumimoji="1" lang="ja-JP" altLang="en-US" smtClean="0"/>
+              <a:rPr kumimoji="1" lang="ja-JP" altLang="en-US"/>
               <a:t>レベル</a:t>
             </a:r>
           </a:p>
           <a:p>
             <a:pPr lvl="4"/>
             <a:r>
-              <a:rPr kumimoji="1" lang="ja-JP" altLang="en-US" smtClean="0"/>
+              <a:rPr kumimoji="1" lang="ja-JP" altLang="en-US"/>
               <a:t>第 </a:t>
             </a:r>
             <a:r>
-              <a:rPr kumimoji="1" lang="en-US" altLang="ja-JP" smtClean="0"/>
+              <a:rPr kumimoji="1" lang="en-US" altLang="ja-JP"/>
               <a:t>5 </a:t>
             </a:r>
             <a:r>
-              <a:rPr kumimoji="1" lang="ja-JP" altLang="en-US" smtClean="0"/>
+              <a:rPr kumimoji="1" lang="ja-JP" altLang="en-US"/>
               <a:t>レベル</a:t>
             </a:r>
-            <a:endParaRPr kumimoji="1" lang="ja-JP" altLang="en-US"/>
           </a:p>
         </p:txBody>
       </p:sp>
@@ -3838,7 +3841,7 @@
             <a:fld id="{E90ED720-0104-4369-84BC-D37694168613}" type="datetimeFigureOut">
               <a:rPr kumimoji="1" lang="ja-JP" altLang="en-US" smtClean="0"/>
               <a:pPr/>
-              <a:t>2014/11/27</a:t>
+              <a:t>2026/9/28</a:t>
             </a:fld>
             <a:endParaRPr kumimoji="1" lang="ja-JP" altLang="en-US"/>
           </a:p>
@@ -3932,10 +3935,9 @@
           </a:lstStyle>
           <a:p>
             <a:r>
-              <a:rPr kumimoji="1" lang="ja-JP" altLang="en-US" smtClean="0"/>
+              <a:rPr kumimoji="1" lang="ja-JP" altLang="en-US"/>
               <a:t>マスタ タイトルの書式設定</a:t>
             </a:r>
-            <a:endParaRPr kumimoji="1" lang="ja-JP" altLang="en-US"/>
           </a:p>
         </p:txBody>
       </p:sp>
@@ -3998,7 +4000,7 @@
           <a:p>
             <a:pPr lvl="0"/>
             <a:r>
-              <a:rPr kumimoji="1" lang="ja-JP" altLang="en-US" smtClean="0"/>
+              <a:rPr kumimoji="1" lang="ja-JP" altLang="en-US"/>
               <a:t>マスタ テキストの書式設定</a:t>
             </a:r>
           </a:p>
@@ -4054,70 +4056,69 @@
           <a:p>
             <a:pPr lvl="0"/>
             <a:r>
-              <a:rPr kumimoji="1" lang="ja-JP" altLang="en-US" smtClean="0"/>
+              <a:rPr kumimoji="1" lang="ja-JP" altLang="en-US"/>
               <a:t>マスタ テキストの書式設定</a:t>
             </a:r>
           </a:p>
           <a:p>
             <a:pPr lvl="1"/>
             <a:r>
-              <a:rPr kumimoji="1" lang="ja-JP" altLang="en-US" smtClean="0"/>
+              <a:rPr kumimoji="1" lang="ja-JP" altLang="en-US"/>
               <a:t>第 </a:t>
             </a:r>
             <a:r>
-              <a:rPr kumimoji="1" lang="en-US" altLang="ja-JP" smtClean="0"/>
+              <a:rPr kumimoji="1" lang="en-US" altLang="ja-JP"/>
               <a:t>2 </a:t>
             </a:r>
             <a:r>
-              <a:rPr kumimoji="1" lang="ja-JP" altLang="en-US" smtClean="0"/>
+              <a:rPr kumimoji="1" lang="ja-JP" altLang="en-US"/>
               <a:t>レベル</a:t>
             </a:r>
           </a:p>
           <a:p>
             <a:pPr lvl="2"/>
             <a:r>
-              <a:rPr kumimoji="1" lang="ja-JP" altLang="en-US" smtClean="0"/>
+              <a:rPr kumimoji="1" lang="ja-JP" altLang="en-US"/>
               <a:t>第 </a:t>
             </a:r>
             <a:r>
-              <a:rPr kumimoji="1" lang="en-US" altLang="ja-JP" smtClean="0"/>
+              <a:rPr kumimoji="1" lang="en-US" altLang="ja-JP"/>
               <a:t>3 </a:t>
             </a:r>
             <a:r>
-              <a:rPr kumimoji="1" lang="ja-JP" altLang="en-US" smtClean="0"/>
+              <a:rPr kumimoji="1" lang="ja-JP" altLang="en-US"/>
               <a:t>レベル</a:t>
             </a:r>
           </a:p>
           <a:p>
             <a:pPr lvl="3"/>
             <a:r>
-              <a:rPr kumimoji="1" lang="ja-JP" altLang="en-US" smtClean="0"/>
+              <a:rPr kumimoji="1" lang="ja-JP" altLang="en-US"/>
               <a:t>第 </a:t>
             </a:r>
             <a:r>
-              <a:rPr kumimoji="1" lang="en-US" altLang="ja-JP" smtClean="0"/>
+              <a:rPr kumimoji="1" lang="en-US" altLang="ja-JP"/>
               <a:t>4 </a:t>
             </a:r>
             <a:r>
-              <a:rPr kumimoji="1" lang="ja-JP" altLang="en-US" smtClean="0"/>
+              <a:rPr kumimoji="1" lang="ja-JP" altLang="en-US"/>
               <a:t>レベル</a:t>
             </a:r>
           </a:p>
           <a:p>
             <a:pPr lvl="4"/>
             <a:r>
-              <a:rPr kumimoji="1" lang="ja-JP" altLang="en-US" smtClean="0"/>
+              <a:rPr kumimoji="1" lang="ja-JP" altLang="en-US"/>
               <a:t>第 </a:t>
             </a:r>
             <a:r>
-              <a:rPr kumimoji="1" lang="en-US" altLang="ja-JP" smtClean="0"/>
+              <a:rPr kumimoji="1" lang="en-US" altLang="ja-JP"/>
               <a:t>5 </a:t>
             </a:r>
             <a:r>
-              <a:rPr kumimoji="1" lang="ja-JP" altLang="en-US" smtClean="0"/>
+              <a:rPr kumimoji="1" lang="ja-JP" altLang="en-US"/>
               <a:t>レベル</a:t>
             </a:r>
-            <a:endParaRPr kumimoji="1" lang="ja-JP" altLang="en-US"/>
           </a:p>
         </p:txBody>
       </p:sp>
@@ -4180,7 +4181,7 @@
           <a:p>
             <a:pPr lvl="0"/>
             <a:r>
-              <a:rPr kumimoji="1" lang="ja-JP" altLang="en-US" smtClean="0"/>
+              <a:rPr kumimoji="1" lang="ja-JP" altLang="en-US"/>
               <a:t>マスタ テキストの書式設定</a:t>
             </a:r>
           </a:p>
@@ -4236,70 +4237,69 @@
           <a:p>
             <a:pPr lvl="0"/>
             <a:r>
-              <a:rPr kumimoji="1" lang="ja-JP" altLang="en-US" smtClean="0"/>
+              <a:rPr kumimoji="1" lang="ja-JP" altLang="en-US"/>
               <a:t>マスタ テキストの書式設定</a:t>
             </a:r>
           </a:p>
           <a:p>
             <a:pPr lvl="1"/>
             <a:r>
-              <a:rPr kumimoji="1" lang="ja-JP" altLang="en-US" smtClean="0"/>
+              <a:rPr kumimoji="1" lang="ja-JP" altLang="en-US"/>
               <a:t>第 </a:t>
             </a:r>
             <a:r>
-              <a:rPr kumimoji="1" lang="en-US" altLang="ja-JP" smtClean="0"/>
+              <a:rPr kumimoji="1" lang="en-US" altLang="ja-JP"/>
               <a:t>2 </a:t>
             </a:r>
             <a:r>
-              <a:rPr kumimoji="1" lang="ja-JP" altLang="en-US" smtClean="0"/>
+              <a:rPr kumimoji="1" lang="ja-JP" altLang="en-US"/>
               <a:t>レベル</a:t>
             </a:r>
           </a:p>
           <a:p>
             <a:pPr lvl="2"/>
             <a:r>
-              <a:rPr kumimoji="1" lang="ja-JP" altLang="en-US" smtClean="0"/>
+              <a:rPr kumimoji="1" lang="ja-JP" altLang="en-US"/>
               <a:t>第 </a:t>
             </a:r>
             <a:r>
-              <a:rPr kumimoji="1" lang="en-US" altLang="ja-JP" smtClean="0"/>
+              <a:rPr kumimoji="1" lang="en-US" altLang="ja-JP"/>
               <a:t>3 </a:t>
             </a:r>
             <a:r>
-              <a:rPr kumimoji="1" lang="ja-JP" altLang="en-US" smtClean="0"/>
+              <a:rPr kumimoji="1" lang="ja-JP" altLang="en-US"/>
               <a:t>レベル</a:t>
             </a:r>
           </a:p>
           <a:p>
             <a:pPr lvl="3"/>
             <a:r>
-              <a:rPr kumimoji="1" lang="ja-JP" altLang="en-US" smtClean="0"/>
+              <a:rPr kumimoji="1" lang="ja-JP" altLang="en-US"/>
               <a:t>第 </a:t>
             </a:r>
             <a:r>
-              <a:rPr kumimoji="1" lang="en-US" altLang="ja-JP" smtClean="0"/>
+              <a:rPr kumimoji="1" lang="en-US" altLang="ja-JP"/>
               <a:t>4 </a:t>
             </a:r>
             <a:r>
-              <a:rPr kumimoji="1" lang="ja-JP" altLang="en-US" smtClean="0"/>
+              <a:rPr kumimoji="1" lang="ja-JP" altLang="en-US"/>
               <a:t>レベル</a:t>
             </a:r>
           </a:p>
           <a:p>
             <a:pPr lvl="4"/>
             <a:r>
-              <a:rPr kumimoji="1" lang="ja-JP" altLang="en-US" smtClean="0"/>
+              <a:rPr kumimoji="1" lang="ja-JP" altLang="en-US"/>
               <a:t>第 </a:t>
             </a:r>
             <a:r>
-              <a:rPr kumimoji="1" lang="en-US" altLang="ja-JP" smtClean="0"/>
+              <a:rPr kumimoji="1" lang="en-US" altLang="ja-JP"/>
               <a:t>5 </a:t>
             </a:r>
             <a:r>
-              <a:rPr kumimoji="1" lang="ja-JP" altLang="en-US" smtClean="0"/>
+              <a:rPr kumimoji="1" lang="ja-JP" altLang="en-US"/>
               <a:t>レベル</a:t>
             </a:r>
-            <a:endParaRPr kumimoji="1" lang="ja-JP" altLang="en-US"/>
           </a:p>
         </p:txBody>
       </p:sp>
@@ -4321,7 +4321,7 @@
             <a:fld id="{E90ED720-0104-4369-84BC-D37694168613}" type="datetimeFigureOut">
               <a:rPr kumimoji="1" lang="ja-JP" altLang="en-US" smtClean="0"/>
               <a:pPr/>
-              <a:t>2014/11/27</a:t>
+              <a:t>2026/9/28</a:t>
             </a:fld>
             <a:endParaRPr kumimoji="1" lang="ja-JP" altLang="en-US"/>
           </a:p>
@@ -4411,10 +4411,9 @@
           <a:lstStyle/>
           <a:p>
             <a:r>
-              <a:rPr kumimoji="1" lang="ja-JP" altLang="en-US" smtClean="0"/>
+              <a:rPr kumimoji="1" lang="ja-JP" altLang="en-US"/>
               <a:t>マスタ タイトルの書式設定</a:t>
             </a:r>
-            <a:endParaRPr kumimoji="1" lang="ja-JP" altLang="en-US"/>
           </a:p>
         </p:txBody>
       </p:sp>
@@ -4436,7 +4435,7 @@
             <a:fld id="{E90ED720-0104-4369-84BC-D37694168613}" type="datetimeFigureOut">
               <a:rPr kumimoji="1" lang="ja-JP" altLang="en-US" smtClean="0"/>
               <a:pPr/>
-              <a:t>2014/11/27</a:t>
+              <a:t>2026/9/28</a:t>
             </a:fld>
             <a:endParaRPr kumimoji="1" lang="ja-JP" altLang="en-US"/>
           </a:p>
@@ -4528,7 +4527,7 @@
             <a:fld id="{E90ED720-0104-4369-84BC-D37694168613}" type="datetimeFigureOut">
               <a:rPr kumimoji="1" lang="ja-JP" altLang="en-US" smtClean="0"/>
               <a:pPr/>
-              <a:t>2014/11/27</a:t>
+              <a:t>2026/9/28</a:t>
             </a:fld>
             <a:endParaRPr kumimoji="1" lang="ja-JP" altLang="en-US"/>
           </a:p>
@@ -4627,10 +4626,9 @@
           </a:lstStyle>
           <a:p>
             <a:r>
-              <a:rPr kumimoji="1" lang="ja-JP" altLang="en-US" smtClean="0"/>
+              <a:rPr kumimoji="1" lang="ja-JP" altLang="en-US"/>
               <a:t>マスタ タイトルの書式設定</a:t>
             </a:r>
-            <a:endParaRPr kumimoji="1" lang="ja-JP" altLang="en-US"/>
           </a:p>
         </p:txBody>
       </p:sp>
@@ -4684,70 +4682,69 @@
           <a:p>
             <a:pPr lvl="0"/>
             <a:r>
-              <a:rPr kumimoji="1" lang="ja-JP" altLang="en-US" smtClean="0"/>
+              <a:rPr kumimoji="1" lang="ja-JP" altLang="en-US"/>
               <a:t>マスタ テキストの書式設定</a:t>
             </a:r>
           </a:p>
           <a:p>
             <a:pPr lvl="1"/>
             <a:r>
-              <a:rPr kumimoji="1" lang="ja-JP" altLang="en-US" smtClean="0"/>
+              <a:rPr kumimoji="1" lang="ja-JP" altLang="en-US"/>
               <a:t>第 </a:t>
             </a:r>
             <a:r>
-              <a:rPr kumimoji="1" lang="en-US" altLang="ja-JP" smtClean="0"/>
+              <a:rPr kumimoji="1" lang="en-US" altLang="ja-JP"/>
               <a:t>2 </a:t>
             </a:r>
             <a:r>
-              <a:rPr kumimoji="1" lang="ja-JP" altLang="en-US" smtClean="0"/>
+              <a:rPr kumimoji="1" lang="ja-JP" altLang="en-US"/>
               <a:t>レベル</a:t>
             </a:r>
           </a:p>
           <a:p>
             <a:pPr lvl="2"/>
             <a:r>
-              <a:rPr kumimoji="1" lang="ja-JP" altLang="en-US" smtClean="0"/>
+              <a:rPr kumimoji="1" lang="ja-JP" altLang="en-US"/>
               <a:t>第 </a:t>
             </a:r>
             <a:r>
-              <a:rPr kumimoji="1" lang="en-US" altLang="ja-JP" smtClean="0"/>
+              <a:rPr kumimoji="1" lang="en-US" altLang="ja-JP"/>
               <a:t>3 </a:t>
             </a:r>
             <a:r>
-              <a:rPr kumimoji="1" lang="ja-JP" altLang="en-US" smtClean="0"/>
+              <a:rPr kumimoji="1" lang="ja-JP" altLang="en-US"/>
               <a:t>レベル</a:t>
             </a:r>
           </a:p>
           <a:p>
             <a:pPr lvl="3"/>
             <a:r>
-              <a:rPr kumimoji="1" lang="ja-JP" altLang="en-US" smtClean="0"/>
+              <a:rPr kumimoji="1" lang="ja-JP" altLang="en-US"/>
               <a:t>第 </a:t>
             </a:r>
             <a:r>
-              <a:rPr kumimoji="1" lang="en-US" altLang="ja-JP" smtClean="0"/>
+              <a:rPr kumimoji="1" lang="en-US" altLang="ja-JP"/>
               <a:t>4 </a:t>
             </a:r>
             <a:r>
-              <a:rPr kumimoji="1" lang="ja-JP" altLang="en-US" smtClean="0"/>
+              <a:rPr kumimoji="1" lang="ja-JP" altLang="en-US"/>
               <a:t>レベル</a:t>
             </a:r>
           </a:p>
           <a:p>
             <a:pPr lvl="4"/>
             <a:r>
-              <a:rPr kumimoji="1" lang="ja-JP" altLang="en-US" smtClean="0"/>
+              <a:rPr kumimoji="1" lang="ja-JP" altLang="en-US"/>
               <a:t>第 </a:t>
             </a:r>
             <a:r>
-              <a:rPr kumimoji="1" lang="en-US" altLang="ja-JP" smtClean="0"/>
+              <a:rPr kumimoji="1" lang="en-US" altLang="ja-JP"/>
               <a:t>5 </a:t>
             </a:r>
             <a:r>
-              <a:rPr kumimoji="1" lang="ja-JP" altLang="en-US" smtClean="0"/>
+              <a:rPr kumimoji="1" lang="ja-JP" altLang="en-US"/>
               <a:t>レベル</a:t>
             </a:r>
-            <a:endParaRPr kumimoji="1" lang="ja-JP" altLang="en-US"/>
           </a:p>
         </p:txBody>
       </p:sp>
@@ -4810,7 +4807,7 @@
           <a:p>
             <a:pPr lvl="0"/>
             <a:r>
-              <a:rPr kumimoji="1" lang="ja-JP" altLang="en-US" smtClean="0"/>
+              <a:rPr kumimoji="1" lang="ja-JP" altLang="en-US"/>
               <a:t>マスタ テキストの書式設定</a:t>
             </a:r>
           </a:p>
@@ -4834,7 +4831,7 @@
             <a:fld id="{E90ED720-0104-4369-84BC-D37694168613}" type="datetimeFigureOut">
               <a:rPr kumimoji="1" lang="ja-JP" altLang="en-US" smtClean="0"/>
               <a:pPr/>
-              <a:t>2014/11/27</a:t>
+              <a:t>2026/9/28</a:t>
             </a:fld>
             <a:endParaRPr kumimoji="1" lang="ja-JP" altLang="en-US"/>
           </a:p>
@@ -4933,10 +4930,9 @@
           </a:lstStyle>
           <a:p>
             <a:r>
-              <a:rPr kumimoji="1" lang="ja-JP" altLang="en-US" smtClean="0"/>
+              <a:rPr kumimoji="1" lang="ja-JP" altLang="en-US"/>
               <a:t>マスタ タイトルの書式設定</a:t>
             </a:r>
-            <a:endParaRPr kumimoji="1" lang="ja-JP" altLang="en-US"/>
           </a:p>
         </p:txBody>
       </p:sp>
@@ -5060,7 +5056,7 @@
           <a:p>
             <a:pPr lvl="0"/>
             <a:r>
-              <a:rPr kumimoji="1" lang="ja-JP" altLang="en-US" smtClean="0"/>
+              <a:rPr kumimoji="1" lang="ja-JP" altLang="en-US"/>
               <a:t>マスタ テキストの書式設定</a:t>
             </a:r>
           </a:p>
@@ -5084,7 +5080,7 @@
             <a:fld id="{E90ED720-0104-4369-84BC-D37694168613}" type="datetimeFigureOut">
               <a:rPr kumimoji="1" lang="ja-JP" altLang="en-US" smtClean="0"/>
               <a:pPr/>
-              <a:t>2014/11/27</a:t>
+              <a:t>2026/9/28</a:t>
             </a:fld>
             <a:endParaRPr kumimoji="1" lang="ja-JP" altLang="en-US"/>
           </a:p>
@@ -5189,10 +5185,9 @@
           <a:lstStyle/>
           <a:p>
             <a:r>
-              <a:rPr kumimoji="1" lang="ja-JP" altLang="en-US" smtClean="0"/>
+              <a:rPr kumimoji="1" lang="ja-JP" altLang="en-US"/>
               <a:t>マスタ タイトルの書式設定</a:t>
             </a:r>
-            <a:endParaRPr kumimoji="1" lang="ja-JP" altLang="en-US"/>
           </a:p>
         </p:txBody>
       </p:sp>
@@ -5223,70 +5218,69 @@
           <a:p>
             <a:pPr lvl="0"/>
             <a:r>
-              <a:rPr kumimoji="1" lang="ja-JP" altLang="en-US" smtClean="0"/>
+              <a:rPr kumimoji="1" lang="ja-JP" altLang="en-US"/>
               <a:t>マスタ テキストの書式設定</a:t>
             </a:r>
           </a:p>
           <a:p>
             <a:pPr lvl="1"/>
             <a:r>
-              <a:rPr kumimoji="1" lang="ja-JP" altLang="en-US" smtClean="0"/>
+              <a:rPr kumimoji="1" lang="ja-JP" altLang="en-US"/>
               <a:t>第 </a:t>
             </a:r>
             <a:r>
-              <a:rPr kumimoji="1" lang="en-US" altLang="ja-JP" smtClean="0"/>
+              <a:rPr kumimoji="1" lang="en-US" altLang="ja-JP"/>
               <a:t>2 </a:t>
             </a:r>
             <a:r>
-              <a:rPr kumimoji="1" lang="ja-JP" altLang="en-US" smtClean="0"/>
+              <a:rPr kumimoji="1" lang="ja-JP" altLang="en-US"/>
               <a:t>レベル</a:t>
             </a:r>
           </a:p>
           <a:p>
             <a:pPr lvl="2"/>
             <a:r>
-              <a:rPr kumimoji="1" lang="ja-JP" altLang="en-US" smtClean="0"/>
+              <a:rPr kumimoji="1" lang="ja-JP" altLang="en-US"/>
               <a:t>第 </a:t>
             </a:r>
             <a:r>
-              <a:rPr kumimoji="1" lang="en-US" altLang="ja-JP" smtClean="0"/>
+              <a:rPr kumimoji="1" lang="en-US" altLang="ja-JP"/>
               <a:t>3 </a:t>
             </a:r>
             <a:r>
-              <a:rPr kumimoji="1" lang="ja-JP" altLang="en-US" smtClean="0"/>
+              <a:rPr kumimoji="1" lang="ja-JP" altLang="en-US"/>
               <a:t>レベル</a:t>
             </a:r>
           </a:p>
           <a:p>
             <a:pPr lvl="3"/>
             <a:r>
-              <a:rPr kumimoji="1" lang="ja-JP" altLang="en-US" smtClean="0"/>
+              <a:rPr kumimoji="1" lang="ja-JP" altLang="en-US"/>
               <a:t>第 </a:t>
             </a:r>
             <a:r>
-              <a:rPr kumimoji="1" lang="en-US" altLang="ja-JP" smtClean="0"/>
+              <a:rPr kumimoji="1" lang="en-US" altLang="ja-JP"/>
               <a:t>4 </a:t>
             </a:r>
             <a:r>
-              <a:rPr kumimoji="1" lang="ja-JP" altLang="en-US" smtClean="0"/>
+              <a:rPr kumimoji="1" lang="ja-JP" altLang="en-US"/>
               <a:t>レベル</a:t>
             </a:r>
           </a:p>
           <a:p>
             <a:pPr lvl="4"/>
             <a:r>
-              <a:rPr kumimoji="1" lang="ja-JP" altLang="en-US" smtClean="0"/>
+              <a:rPr kumimoji="1" lang="ja-JP" altLang="en-US"/>
               <a:t>第 </a:t>
             </a:r>
             <a:r>
-              <a:rPr kumimoji="1" lang="en-US" altLang="ja-JP" smtClean="0"/>
+              <a:rPr kumimoji="1" lang="en-US" altLang="ja-JP"/>
               <a:t>5 </a:t>
             </a:r>
             <a:r>
-              <a:rPr kumimoji="1" lang="ja-JP" altLang="en-US" smtClean="0"/>
+              <a:rPr kumimoji="1" lang="ja-JP" altLang="en-US"/>
               <a:t>レベル</a:t>
             </a:r>
-            <a:endParaRPr kumimoji="1" lang="ja-JP" altLang="en-US"/>
           </a:p>
         </p:txBody>
       </p:sp>
@@ -5326,7 +5320,7 @@
             <a:fld id="{E90ED720-0104-4369-84BC-D37694168613}" type="datetimeFigureOut">
               <a:rPr kumimoji="1" lang="ja-JP" altLang="en-US" smtClean="0"/>
               <a:pPr/>
-              <a:t>2014/11/27</a:t>
+              <a:t>2026/9/28</a:t>
             </a:fld>
             <a:endParaRPr kumimoji="1" lang="ja-JP" altLang="en-US"/>
           </a:p>
@@ -5713,10 +5707,9 @@
           <a:lstStyle/>
           <a:p>
             <a:r>
-              <a:rPr kumimoji="1" lang="ja-JP" altLang="en-US" dirty="0" smtClean="0"/>
+              <a:rPr kumimoji="1" lang="ja-JP" altLang="en-US" dirty="0"/>
               <a:t>プログラミング言語論</a:t>
             </a:r>
-            <a:endParaRPr kumimoji="1" lang="ja-JP" altLang="en-US" dirty="0"/>
           </a:p>
         </p:txBody>
       </p:sp>
@@ -5743,18 +5736,17 @@
           <a:lstStyle/>
           <a:p>
             <a:r>
-              <a:rPr kumimoji="1" lang="ja-JP" altLang="en-US" sz="3200" dirty="0" smtClean="0"/>
+              <a:rPr kumimoji="1" lang="ja-JP" altLang="en-US" sz="3200" dirty="0"/>
               <a:t>第９回</a:t>
             </a:r>
             <a:r>
-              <a:rPr kumimoji="1" lang="en-US" altLang="ja-JP" sz="3200" dirty="0" smtClean="0"/>
+              <a:rPr kumimoji="1" lang="en-US" altLang="ja-JP" sz="3200" dirty="0"/>
               <a:t>  </a:t>
             </a:r>
             <a:r>
-              <a:rPr kumimoji="1" lang="ja-JP" altLang="en-US" sz="3200" dirty="0" smtClean="0"/>
+              <a:rPr kumimoji="1" lang="ja-JP" altLang="en-US" sz="3200" dirty="0"/>
               <a:t>ラムダ計算</a:t>
             </a:r>
-            <a:endParaRPr kumimoji="1" lang="ja-JP" altLang="en-US" sz="3200" dirty="0"/>
           </a:p>
         </p:txBody>
       </p:sp>
@@ -5766,8 +5758,8 @@
         </p:nvSpPr>
         <p:spPr>
           <a:xfrm>
-            <a:off x="2786050" y="5143512"/>
-            <a:ext cx="3534942" cy="523220"/>
+            <a:off x="3611226" y="5077163"/>
+            <a:ext cx="1500732" cy="523220"/>
           </a:xfrm>
           <a:prstGeom prst="rect">
             <a:avLst/>
@@ -5780,11 +5772,15 @@
           </a:bodyPr>
           <a:lstStyle/>
           <a:p>
-            <a:r>
-              <a:rPr kumimoji="1" lang="ja-JP" altLang="en-US" sz="2800" dirty="0" smtClean="0"/>
-              <a:t>情報工学科　篠埜　功</a:t>
-            </a:r>
-            <a:endParaRPr kumimoji="1" lang="ja-JP" altLang="en-US" sz="2800" dirty="0"/>
+            <a:pPr algn="ctr"/>
+            <a:r>
+              <a:rPr kumimoji="1" lang="ja-JP" altLang="en-US" sz="2800"/>
+              <a:t>篠埜　</a:t>
+            </a:r>
+            <a:r>
+              <a:rPr kumimoji="1" lang="ja-JP" altLang="en-US" sz="2800" dirty="0"/>
+              <a:t>功</a:t>
+            </a:r>
           </a:p>
         </p:txBody>
       </p:sp>
@@ -5793,13 +5789,6 @@
   <p:clrMapOvr>
     <a:masterClrMapping/>
   </p:clrMapOvr>
-  <p:timing>
-    <p:tnLst>
-      <p:par>
-        <p:cTn xmlns:p14="http://schemas.microsoft.com/office/powerpoint/2010/main" id="1" dur="indefinite" restart="never" nodeType="tmRoot"/>
-      </p:par>
-    </p:tnLst>
-  </p:timing>
 </p:sld>
 </file>
 
@@ -5836,7 +5825,7 @@
           <a:lstStyle/>
           <a:p>
             <a:r>
-              <a:rPr lang="ja-JP" altLang="en-US" dirty="0" smtClean="0">
+              <a:rPr lang="ja-JP" altLang="en-US" dirty="0">
                 <a:sym typeface="Symbol" pitchFamily="18" charset="2"/>
               </a:rPr>
               <a:t>置換の例</a:t>
@@ -5866,109 +5855,109 @@
           <a:lstStyle/>
           <a:p>
             <a:r>
-              <a:rPr lang="ja-JP" altLang="en-US" sz="2800" dirty="0" smtClean="0">
+              <a:rPr lang="ja-JP" altLang="en-US" sz="2800" dirty="0">
                 <a:sym typeface="Symbol" pitchFamily="18" charset="2"/>
               </a:rPr>
               <a:t>さきほどの例 </a:t>
             </a:r>
             <a:r>
-              <a:rPr lang="en-US" altLang="ja-JP" sz="2800" dirty="0" smtClean="0">
+              <a:rPr lang="en-US" altLang="ja-JP" sz="2800" dirty="0">
                 <a:sym typeface="Symbol" pitchFamily="18" charset="2"/>
               </a:rPr>
               <a:t>(x. x)  z</a:t>
             </a:r>
             <a:r>
-              <a:rPr lang="ja-JP" altLang="en-US" sz="2800" dirty="0" smtClean="0">
+              <a:rPr lang="ja-JP" altLang="en-US" sz="2800" dirty="0">
                 <a:sym typeface="Symbol" pitchFamily="18" charset="2"/>
               </a:rPr>
               <a:t> は、定義に従って</a:t>
             </a:r>
             <a:r>
-              <a:rPr lang="en-US" altLang="ja-JP" sz="2800" dirty="0" smtClean="0">
+              <a:rPr lang="en-US" altLang="ja-JP" sz="2800" dirty="0">
                 <a:sym typeface="Symbol" pitchFamily="18" charset="2"/>
               </a:rPr>
               <a:t>β</a:t>
             </a:r>
             <a:r>
-              <a:rPr lang="ja-JP" altLang="en-US" sz="2800" dirty="0" smtClean="0">
+              <a:rPr lang="ja-JP" altLang="en-US" sz="2800" dirty="0">
                 <a:sym typeface="Symbol" pitchFamily="18" charset="2"/>
               </a:rPr>
               <a:t>変換すると、</a:t>
             </a:r>
             <a:r>
-              <a:rPr lang="en-US" altLang="ja-JP" sz="2800" dirty="0" smtClean="0">
+              <a:rPr lang="en-US" altLang="ja-JP" sz="2800" dirty="0">
                 <a:sym typeface="Symbol" pitchFamily="18" charset="2"/>
               </a:rPr>
               <a:t>x [ z / x ] </a:t>
             </a:r>
             <a:r>
-              <a:rPr lang="ja-JP" altLang="en-US" sz="2800" dirty="0" smtClean="0">
+              <a:rPr lang="ja-JP" altLang="en-US" sz="2800" dirty="0">
                 <a:sym typeface="Symbol" pitchFamily="18" charset="2"/>
               </a:rPr>
               <a:t>になる。</a:t>
             </a:r>
             <a:r>
-              <a:rPr lang="en-US" altLang="ja-JP" sz="2800" dirty="0" smtClean="0">
+              <a:rPr lang="en-US" altLang="ja-JP" sz="2800" dirty="0">
                 <a:sym typeface="Symbol" pitchFamily="18" charset="2"/>
               </a:rPr>
               <a:t>x [ z / x ]</a:t>
             </a:r>
             <a:r>
-              <a:rPr lang="ja-JP" altLang="en-US" sz="2800" dirty="0" smtClean="0">
+              <a:rPr lang="ja-JP" altLang="en-US" sz="2800" dirty="0">
                 <a:sym typeface="Symbol" pitchFamily="18" charset="2"/>
               </a:rPr>
               <a:t>は、式</a:t>
             </a:r>
             <a:r>
-              <a:rPr lang="en-US" altLang="ja-JP" sz="2800" dirty="0" smtClean="0">
+              <a:rPr lang="en-US" altLang="ja-JP" sz="2800" dirty="0">
                 <a:sym typeface="Symbol" pitchFamily="18" charset="2"/>
               </a:rPr>
               <a:t>x</a:t>
             </a:r>
             <a:r>
-              <a:rPr lang="ja-JP" altLang="en-US" sz="2800" dirty="0" smtClean="0">
+              <a:rPr lang="ja-JP" altLang="en-US" sz="2800" dirty="0">
                 <a:sym typeface="Symbol" pitchFamily="18" charset="2"/>
               </a:rPr>
               <a:t>中の</a:t>
             </a:r>
             <a:r>
-              <a:rPr lang="en-US" altLang="ja-JP" sz="2800" dirty="0" smtClean="0">
+              <a:rPr lang="en-US" altLang="ja-JP" sz="2800" dirty="0">
                 <a:sym typeface="Symbol" pitchFamily="18" charset="2"/>
               </a:rPr>
               <a:t>x</a:t>
             </a:r>
             <a:r>
-              <a:rPr lang="ja-JP" altLang="en-US" sz="2800" dirty="0" smtClean="0">
+              <a:rPr lang="ja-JP" altLang="en-US" sz="2800" dirty="0">
                 <a:sym typeface="Symbol" pitchFamily="18" charset="2"/>
               </a:rPr>
               <a:t>を</a:t>
             </a:r>
             <a:r>
-              <a:rPr lang="en-US" altLang="ja-JP" sz="2800" dirty="0" smtClean="0">
+              <a:rPr lang="en-US" altLang="ja-JP" sz="2800" dirty="0">
                 <a:sym typeface="Symbol" pitchFamily="18" charset="2"/>
               </a:rPr>
               <a:t>z</a:t>
             </a:r>
             <a:r>
-              <a:rPr lang="ja-JP" altLang="en-US" sz="2800" dirty="0" smtClean="0">
+              <a:rPr lang="ja-JP" altLang="en-US" sz="2800" dirty="0">
                 <a:sym typeface="Symbol" pitchFamily="18" charset="2"/>
               </a:rPr>
               <a:t>に置き換えた式、すなわち</a:t>
             </a:r>
             <a:r>
-              <a:rPr lang="en-US" altLang="ja-JP" sz="2800" dirty="0" smtClean="0">
+              <a:rPr lang="en-US" altLang="ja-JP" sz="2800" dirty="0">
                 <a:sym typeface="Symbol" pitchFamily="18" charset="2"/>
               </a:rPr>
               <a:t>z</a:t>
             </a:r>
             <a:r>
-              <a:rPr lang="ja-JP" altLang="en-US" sz="2800" dirty="0" smtClean="0">
+              <a:rPr lang="ja-JP" altLang="en-US" sz="2800" dirty="0">
                 <a:sym typeface="Symbol" pitchFamily="18" charset="2"/>
               </a:rPr>
               <a:t>を表す。</a:t>
             </a:r>
             <a:r>
-              <a:rPr lang="en-US" altLang="ja-JP" sz="2800" dirty="0" smtClean="0">
+              <a:rPr lang="en-US" altLang="ja-JP" sz="2800" dirty="0">
                 <a:sym typeface="Symbol" pitchFamily="18" charset="2"/>
               </a:rPr>
               <a:t> </a:t>
@@ -5976,146 +5965,146 @@
           </a:p>
           <a:p>
             <a:r>
-              <a:rPr lang="en-US" altLang="ja-JP" sz="2800" dirty="0" smtClean="0">
+              <a:rPr lang="en-US" altLang="ja-JP" sz="2800" dirty="0">
                 <a:sym typeface="Symbol" pitchFamily="18" charset="2"/>
               </a:rPr>
               <a:t>(x. x</a:t>
             </a:r>
             <a:r>
-              <a:rPr lang="ja-JP" altLang="en-US" sz="2800" dirty="0" smtClean="0">
+              <a:rPr lang="ja-JP" altLang="en-US" sz="2800" dirty="0">
                 <a:sym typeface="Symbol" pitchFamily="18" charset="2"/>
               </a:rPr>
               <a:t> </a:t>
             </a:r>
             <a:r>
-              <a:rPr lang="en-US" altLang="ja-JP" sz="2800" dirty="0" smtClean="0">
+              <a:rPr lang="en-US" altLang="ja-JP" sz="2800" dirty="0">
                 <a:sym typeface="Symbol" pitchFamily="18" charset="2"/>
               </a:rPr>
               <a:t>y) (z. z) </a:t>
             </a:r>
             <a:r>
-              <a:rPr lang="ja-JP" altLang="en-US" sz="2800" dirty="0" smtClean="0">
+              <a:rPr lang="ja-JP" altLang="en-US" sz="2800" dirty="0">
                 <a:sym typeface="Symbol" pitchFamily="18" charset="2"/>
               </a:rPr>
               <a:t>の例では、</a:t>
             </a:r>
             <a:r>
-              <a:rPr lang="en-US" altLang="ja-JP" sz="2800" dirty="0" smtClean="0">
+              <a:rPr lang="en-US" altLang="ja-JP" sz="2800" dirty="0">
                 <a:sym typeface="Symbol" pitchFamily="18" charset="2"/>
               </a:rPr>
               <a:t>β</a:t>
             </a:r>
             <a:r>
-              <a:rPr lang="ja-JP" altLang="en-US" sz="2800" dirty="0" smtClean="0">
+              <a:rPr lang="ja-JP" altLang="en-US" sz="2800" dirty="0">
                 <a:sym typeface="Symbol" pitchFamily="18" charset="2"/>
               </a:rPr>
               <a:t>変換すると、</a:t>
             </a:r>
-            <a:endParaRPr lang="en-US" altLang="ja-JP" sz="2800" dirty="0" smtClean="0">
+            <a:endParaRPr lang="en-US" altLang="ja-JP" sz="2800" dirty="0">
               <a:sym typeface="Symbol" pitchFamily="18" charset="2"/>
             </a:endParaRPr>
           </a:p>
           <a:p>
             <a:r>
-              <a:rPr lang="en-US" altLang="ja-JP" sz="2800" dirty="0" smtClean="0">
+              <a:rPr lang="en-US" altLang="ja-JP" sz="2800" dirty="0">
                 <a:sym typeface="Symbol" pitchFamily="18" charset="2"/>
               </a:rPr>
               <a:t>(x y) [ (z. z) / x ] </a:t>
             </a:r>
             <a:r>
-              <a:rPr lang="ja-JP" altLang="en-US" sz="2800" dirty="0" smtClean="0">
+              <a:rPr lang="ja-JP" altLang="en-US" sz="2800" dirty="0">
                 <a:sym typeface="Symbol" pitchFamily="18" charset="2"/>
               </a:rPr>
               <a:t>になる。</a:t>
             </a:r>
             <a:r>
-              <a:rPr lang="en-US" altLang="ja-JP" sz="2800" dirty="0" smtClean="0">
+              <a:rPr lang="en-US" altLang="ja-JP" sz="2800" dirty="0">
                 <a:sym typeface="Symbol" pitchFamily="18" charset="2"/>
               </a:rPr>
               <a:t> (x y) [ (z. z) / x ]</a:t>
             </a:r>
             <a:r>
-              <a:rPr lang="ja-JP" altLang="en-US" sz="2800" dirty="0" smtClean="0">
+              <a:rPr lang="ja-JP" altLang="en-US" sz="2800" dirty="0">
                 <a:sym typeface="Symbol" pitchFamily="18" charset="2"/>
               </a:rPr>
               <a:t>は、式</a:t>
             </a:r>
             <a:r>
-              <a:rPr lang="en-US" altLang="ja-JP" sz="2800" dirty="0" smtClean="0">
+              <a:rPr lang="en-US" altLang="ja-JP" sz="2800" dirty="0">
                 <a:sym typeface="Symbol" pitchFamily="18" charset="2"/>
               </a:rPr>
               <a:t>(x y)</a:t>
             </a:r>
             <a:r>
-              <a:rPr lang="ja-JP" altLang="en-US" sz="2800" dirty="0" smtClean="0">
+              <a:rPr lang="ja-JP" altLang="en-US" sz="2800" dirty="0">
                 <a:sym typeface="Symbol" pitchFamily="18" charset="2"/>
               </a:rPr>
               <a:t>中の</a:t>
             </a:r>
             <a:r>
-              <a:rPr lang="en-US" altLang="ja-JP" sz="2800" dirty="0" smtClean="0">
+              <a:rPr lang="en-US" altLang="ja-JP" sz="2800" dirty="0">
                 <a:sym typeface="Symbol" pitchFamily="18" charset="2"/>
               </a:rPr>
               <a:t>x</a:t>
             </a:r>
             <a:r>
-              <a:rPr lang="ja-JP" altLang="en-US" sz="2800" dirty="0" smtClean="0">
+              <a:rPr lang="ja-JP" altLang="en-US" sz="2800" dirty="0">
                 <a:sym typeface="Symbol" pitchFamily="18" charset="2"/>
               </a:rPr>
               <a:t>を</a:t>
             </a:r>
             <a:r>
-              <a:rPr lang="en-US" altLang="ja-JP" sz="2800" dirty="0" smtClean="0">
+              <a:rPr lang="en-US" altLang="ja-JP" sz="2800" dirty="0">
                 <a:sym typeface="Symbol" pitchFamily="18" charset="2"/>
               </a:rPr>
               <a:t>(z. z)</a:t>
             </a:r>
             <a:r>
-              <a:rPr lang="ja-JP" altLang="en-US" sz="2800" dirty="0" smtClean="0">
+              <a:rPr lang="ja-JP" altLang="en-US" sz="2800" dirty="0">
                 <a:sym typeface="Symbol" pitchFamily="18" charset="2"/>
               </a:rPr>
               <a:t>に置き換えた式、すなわち</a:t>
             </a:r>
-            <a:endParaRPr lang="en-US" altLang="ja-JP" sz="2800" dirty="0" smtClean="0">
+            <a:endParaRPr lang="en-US" altLang="ja-JP" sz="2800" dirty="0">
               <a:sym typeface="Symbol" pitchFamily="18" charset="2"/>
             </a:endParaRPr>
           </a:p>
           <a:p>
             <a:r>
-              <a:rPr lang="en-US" altLang="ja-JP" sz="2800" dirty="0" smtClean="0">
+              <a:rPr lang="en-US" altLang="ja-JP" sz="2800" dirty="0">
                 <a:sym typeface="Symbol" pitchFamily="18" charset="2"/>
               </a:rPr>
               <a:t>(z. z)</a:t>
             </a:r>
             <a:r>
-              <a:rPr lang="ja-JP" altLang="en-US" sz="2800" dirty="0" smtClean="0">
+              <a:rPr lang="ja-JP" altLang="en-US" sz="2800" dirty="0">
                 <a:sym typeface="Symbol" pitchFamily="18" charset="2"/>
               </a:rPr>
               <a:t> </a:t>
             </a:r>
             <a:r>
-              <a:rPr lang="en-US" altLang="ja-JP" sz="2800" dirty="0" smtClean="0">
+              <a:rPr lang="en-US" altLang="ja-JP" sz="2800" dirty="0">
                 <a:sym typeface="Symbol" pitchFamily="18" charset="2"/>
               </a:rPr>
               <a:t>y</a:t>
             </a:r>
             <a:r>
-              <a:rPr lang="ja-JP" altLang="en-US" sz="2800" dirty="0" smtClean="0">
+              <a:rPr lang="ja-JP" altLang="en-US" sz="2800" dirty="0">
                 <a:sym typeface="Symbol" pitchFamily="18" charset="2"/>
               </a:rPr>
               <a:t>を表す。</a:t>
             </a:r>
-            <a:endParaRPr lang="en-US" altLang="ja-JP" sz="2800" dirty="0" smtClean="0">
+            <a:endParaRPr lang="en-US" altLang="ja-JP" sz="2800" dirty="0">
               <a:sym typeface="Symbol" pitchFamily="18" charset="2"/>
             </a:endParaRPr>
           </a:p>
           <a:p>
-            <a:endParaRPr lang="en-US" altLang="ja-JP" sz="2800" dirty="0" smtClean="0">
+            <a:endParaRPr lang="en-US" altLang="ja-JP" sz="2800" dirty="0">
               <a:sym typeface="Symbol" pitchFamily="18" charset="2"/>
             </a:endParaRPr>
           </a:p>
           <a:p>
-            <a:endParaRPr lang="en-US" altLang="ja-JP" sz="2800" dirty="0" smtClean="0">
+            <a:endParaRPr lang="en-US" altLang="ja-JP" sz="2800" dirty="0">
               <a:sym typeface="Symbol" pitchFamily="18" charset="2"/>
             </a:endParaRPr>
           </a:p>
@@ -6126,13 +6115,6 @@
   <p:clrMapOvr>
     <a:masterClrMapping/>
   </p:clrMapOvr>
-  <p:timing>
-    <p:tnLst>
-      <p:par>
-        <p:cTn xmlns:p14="http://schemas.microsoft.com/office/powerpoint/2010/main" id="1" dur="indefinite" restart="never" nodeType="tmRoot"/>
-      </p:par>
-    </p:tnLst>
-  </p:timing>
 </p:sld>
 </file>
 
@@ -6169,7 +6151,7 @@
           <a:lstStyle/>
           <a:p>
             <a:r>
-              <a:rPr lang="ja-JP" altLang="en-US" dirty="0" smtClean="0">
+              <a:rPr lang="ja-JP" altLang="en-US" dirty="0">
                 <a:sym typeface="Symbol" pitchFamily="18" charset="2"/>
               </a:rPr>
               <a:t>置換で名前がかぶる例</a:t>
@@ -6199,246 +6181,246 @@
           <a:lstStyle/>
           <a:p>
             <a:r>
-              <a:rPr lang="ja-JP" altLang="en-US" sz="2800" dirty="0" smtClean="0">
+              <a:rPr lang="ja-JP" altLang="en-US" sz="2800" dirty="0">
                 <a:sym typeface="Symbol" pitchFamily="18" charset="2"/>
               </a:rPr>
               <a:t>例えば、</a:t>
             </a:r>
             <a:r>
-              <a:rPr lang="en-US" altLang="ja-JP" sz="2800" dirty="0" smtClean="0">
+              <a:rPr lang="en-US" altLang="ja-JP" sz="2800" dirty="0">
                 <a:sym typeface="Symbol" pitchFamily="18" charset="2"/>
               </a:rPr>
               <a:t>(</a:t>
             </a:r>
             <a:r>
-              <a:rPr lang="en-US" altLang="ja-JP" sz="2800" dirty="0" err="1" smtClean="0">
+              <a:rPr lang="en-US" altLang="ja-JP" sz="2800" dirty="0" err="1">
                 <a:sym typeface="Symbol" pitchFamily="18" charset="2"/>
               </a:rPr>
               <a:t>λx</a:t>
             </a:r>
             <a:r>
-              <a:rPr lang="en-US" altLang="ja-JP" sz="2800" dirty="0" smtClean="0">
+              <a:rPr lang="en-US" altLang="ja-JP" sz="2800" dirty="0">
                 <a:sym typeface="Symbol" pitchFamily="18" charset="2"/>
               </a:rPr>
               <a:t>. y) [x / y]</a:t>
             </a:r>
             <a:r>
-              <a:rPr lang="ja-JP" altLang="en-US" sz="2800" dirty="0" err="1" smtClean="0">
+              <a:rPr lang="ja-JP" altLang="en-US" sz="2800" dirty="0" err="1">
                 <a:sym typeface="Symbol" pitchFamily="18" charset="2"/>
               </a:rPr>
               <a:t>のような</a:t>
             </a:r>
             <a:r>
-              <a:rPr lang="ja-JP" altLang="en-US" sz="2800" dirty="0" smtClean="0">
+              <a:rPr lang="ja-JP" altLang="en-US" sz="2800" dirty="0">
                 <a:sym typeface="Symbol" pitchFamily="18" charset="2"/>
               </a:rPr>
               <a:t>置換は、</a:t>
             </a:r>
             <a:r>
-              <a:rPr lang="en-US" altLang="ja-JP" sz="2800" dirty="0" smtClean="0">
+              <a:rPr lang="en-US" altLang="ja-JP" sz="2800" dirty="0">
                 <a:sym typeface="Symbol" pitchFamily="18" charset="2"/>
               </a:rPr>
               <a:t>(</a:t>
             </a:r>
             <a:r>
-              <a:rPr lang="en-US" altLang="ja-JP" sz="2800" dirty="0" err="1" smtClean="0">
+              <a:rPr lang="en-US" altLang="ja-JP" sz="2800" dirty="0" err="1">
                 <a:sym typeface="Symbol" pitchFamily="18" charset="2"/>
               </a:rPr>
               <a:t>λx</a:t>
             </a:r>
             <a:r>
-              <a:rPr lang="en-US" altLang="ja-JP" sz="2800" dirty="0" smtClean="0">
+              <a:rPr lang="en-US" altLang="ja-JP" sz="2800" dirty="0">
                 <a:sym typeface="Symbol" pitchFamily="18" charset="2"/>
               </a:rPr>
               <a:t> . x)</a:t>
             </a:r>
             <a:r>
-              <a:rPr lang="ja-JP" altLang="en-US" sz="2800" dirty="0" smtClean="0">
+              <a:rPr lang="ja-JP" altLang="en-US" sz="2800" dirty="0">
                 <a:sym typeface="Symbol" pitchFamily="18" charset="2"/>
               </a:rPr>
               <a:t>になるべきではない。</a:t>
             </a:r>
             <a:r>
-              <a:rPr lang="en-US" altLang="ja-JP" sz="2800" dirty="0" smtClean="0">
+              <a:rPr lang="en-US" altLang="ja-JP" sz="2800" dirty="0">
                 <a:sym typeface="Symbol" pitchFamily="18" charset="2"/>
               </a:rPr>
               <a:t> (</a:t>
             </a:r>
             <a:r>
-              <a:rPr lang="en-US" altLang="ja-JP" sz="2800" dirty="0" err="1" smtClean="0">
+              <a:rPr lang="en-US" altLang="ja-JP" sz="2800" dirty="0" err="1">
                 <a:sym typeface="Symbol" pitchFamily="18" charset="2"/>
               </a:rPr>
               <a:t>λx</a:t>
             </a:r>
             <a:r>
-              <a:rPr lang="en-US" altLang="ja-JP" sz="2800" dirty="0" smtClean="0">
+              <a:rPr lang="en-US" altLang="ja-JP" sz="2800" dirty="0">
                 <a:sym typeface="Symbol" pitchFamily="18" charset="2"/>
               </a:rPr>
               <a:t>. y) </a:t>
             </a:r>
             <a:r>
-              <a:rPr lang="ja-JP" altLang="en-US" sz="2800" dirty="0" smtClean="0">
+              <a:rPr lang="ja-JP" altLang="en-US" sz="2800" dirty="0">
                 <a:sym typeface="Symbol" pitchFamily="18" charset="2"/>
               </a:rPr>
               <a:t>中の</a:t>
             </a:r>
             <a:r>
-              <a:rPr lang="en-US" altLang="ja-JP" sz="2800" dirty="0" smtClean="0">
+              <a:rPr lang="en-US" altLang="ja-JP" sz="2800" dirty="0">
                 <a:sym typeface="Symbol" pitchFamily="18" charset="2"/>
               </a:rPr>
               <a:t>x</a:t>
             </a:r>
             <a:r>
-              <a:rPr lang="ja-JP" altLang="en-US" sz="2800" dirty="0" smtClean="0">
+              <a:rPr lang="ja-JP" altLang="en-US" sz="2800" dirty="0">
                 <a:sym typeface="Symbol" pitchFamily="18" charset="2"/>
               </a:rPr>
               <a:t>は仮の名前であり、</a:t>
             </a:r>
             <a:r>
-              <a:rPr lang="en-US" altLang="ja-JP" sz="2800" dirty="0" smtClean="0">
+              <a:rPr lang="en-US" altLang="ja-JP" sz="2800" dirty="0">
                 <a:sym typeface="Symbol" pitchFamily="18" charset="2"/>
               </a:rPr>
               <a:t> [x / y]</a:t>
             </a:r>
             <a:r>
-              <a:rPr lang="ja-JP" altLang="en-US" sz="2800" dirty="0" smtClean="0">
+              <a:rPr lang="ja-JP" altLang="en-US" sz="2800" dirty="0">
                 <a:sym typeface="Symbol" pitchFamily="18" charset="2"/>
               </a:rPr>
               <a:t> の</a:t>
             </a:r>
             <a:r>
-              <a:rPr lang="en-US" altLang="ja-JP" sz="2800" dirty="0" smtClean="0">
+              <a:rPr lang="en-US" altLang="ja-JP" sz="2800" dirty="0">
                 <a:sym typeface="Symbol" pitchFamily="18" charset="2"/>
               </a:rPr>
               <a:t>x</a:t>
             </a:r>
             <a:r>
-              <a:rPr lang="ja-JP" altLang="en-US" sz="2800" dirty="0" smtClean="0">
+              <a:rPr lang="ja-JP" altLang="en-US" sz="2800" dirty="0">
                 <a:sym typeface="Symbol" pitchFamily="18" charset="2"/>
               </a:rPr>
               <a:t>と同じではない。</a:t>
             </a:r>
-            <a:endParaRPr lang="en-US" altLang="ja-JP" sz="2800" dirty="0" smtClean="0">
+            <a:endParaRPr lang="en-US" altLang="ja-JP" sz="2800" dirty="0">
               <a:sym typeface="Symbol" pitchFamily="18" charset="2"/>
             </a:endParaRPr>
           </a:p>
           <a:p>
             <a:r>
-              <a:rPr lang="ja-JP" altLang="en-US" sz="2800" dirty="0" smtClean="0">
+              <a:rPr lang="ja-JP" altLang="en-US" sz="2800" dirty="0">
                 <a:sym typeface="Symbol" pitchFamily="18" charset="2"/>
               </a:rPr>
               <a:t>よって、</a:t>
             </a:r>
             <a:r>
-              <a:rPr lang="en-US" altLang="ja-JP" sz="2800" dirty="0" smtClean="0">
+              <a:rPr lang="en-US" altLang="ja-JP" sz="2800" dirty="0">
                 <a:sym typeface="Symbol" pitchFamily="18" charset="2"/>
               </a:rPr>
               <a:t> (</a:t>
             </a:r>
             <a:r>
-              <a:rPr lang="en-US" altLang="ja-JP" sz="2800" dirty="0" err="1" smtClean="0">
+              <a:rPr lang="en-US" altLang="ja-JP" sz="2800" dirty="0" err="1">
                 <a:sym typeface="Symbol" pitchFamily="18" charset="2"/>
               </a:rPr>
               <a:t>λx</a:t>
             </a:r>
             <a:r>
-              <a:rPr lang="en-US" altLang="ja-JP" sz="2800" dirty="0" smtClean="0">
+              <a:rPr lang="en-US" altLang="ja-JP" sz="2800" dirty="0">
                 <a:sym typeface="Symbol" pitchFamily="18" charset="2"/>
               </a:rPr>
               <a:t>. y)</a:t>
             </a:r>
             <a:r>
-              <a:rPr lang="ja-JP" altLang="en-US" sz="2800" dirty="0" smtClean="0">
+              <a:rPr lang="ja-JP" altLang="en-US" sz="2800" dirty="0">
                 <a:sym typeface="Symbol" pitchFamily="18" charset="2"/>
               </a:rPr>
               <a:t>中の仮の名前</a:t>
             </a:r>
             <a:r>
-              <a:rPr lang="en-US" altLang="ja-JP" sz="2800" dirty="0" smtClean="0">
+              <a:rPr lang="en-US" altLang="ja-JP" sz="2800" dirty="0">
                 <a:sym typeface="Symbol" pitchFamily="18" charset="2"/>
               </a:rPr>
               <a:t>x</a:t>
             </a:r>
             <a:r>
-              <a:rPr lang="ja-JP" altLang="en-US" sz="2800" dirty="0" smtClean="0">
+              <a:rPr lang="ja-JP" altLang="en-US" sz="2800" dirty="0">
                 <a:sym typeface="Symbol" pitchFamily="18" charset="2"/>
               </a:rPr>
               <a:t>をまず何らかの未使用の名前に付け替える。例えば</a:t>
             </a:r>
             <a:r>
-              <a:rPr lang="en-US" altLang="ja-JP" sz="2800" dirty="0" smtClean="0">
+              <a:rPr lang="en-US" altLang="ja-JP" sz="2800" dirty="0">
                 <a:sym typeface="Symbol" pitchFamily="18" charset="2"/>
               </a:rPr>
               <a:t>(</a:t>
             </a:r>
             <a:r>
-              <a:rPr lang="en-US" altLang="ja-JP" sz="2800" dirty="0" err="1" smtClean="0">
+              <a:rPr lang="en-US" altLang="ja-JP" sz="2800" dirty="0" err="1">
                 <a:sym typeface="Symbol" pitchFamily="18" charset="2"/>
               </a:rPr>
               <a:t>λz</a:t>
             </a:r>
             <a:r>
-              <a:rPr lang="en-US" altLang="ja-JP" sz="2800" dirty="0" smtClean="0">
+              <a:rPr lang="en-US" altLang="ja-JP" sz="2800" dirty="0">
                 <a:sym typeface="Symbol" pitchFamily="18" charset="2"/>
               </a:rPr>
               <a:t> . y)</a:t>
             </a:r>
             <a:r>
-              <a:rPr lang="ja-JP" altLang="en-US" sz="2800" dirty="0" smtClean="0">
+              <a:rPr lang="ja-JP" altLang="en-US" sz="2800" dirty="0">
                 <a:sym typeface="Symbol" pitchFamily="18" charset="2"/>
               </a:rPr>
               <a:t>としてから、</a:t>
             </a:r>
             <a:r>
-              <a:rPr lang="en-US" altLang="ja-JP" sz="2800" dirty="0" smtClean="0">
+              <a:rPr lang="en-US" altLang="ja-JP" sz="2800" dirty="0">
                 <a:sym typeface="Symbol" pitchFamily="18" charset="2"/>
               </a:rPr>
               <a:t>[ x / y ]</a:t>
             </a:r>
             <a:r>
-              <a:rPr lang="ja-JP" altLang="en-US" sz="2800" dirty="0" smtClean="0">
+              <a:rPr lang="ja-JP" altLang="en-US" sz="2800" dirty="0">
                 <a:sym typeface="Symbol" pitchFamily="18" charset="2"/>
               </a:rPr>
               <a:t>の置き換えを行う。すると、</a:t>
             </a:r>
             <a:r>
-              <a:rPr lang="en-US" altLang="ja-JP" sz="2800" dirty="0" smtClean="0">
+              <a:rPr lang="en-US" altLang="ja-JP" sz="2800" dirty="0">
                 <a:sym typeface="Symbol" pitchFamily="18" charset="2"/>
               </a:rPr>
               <a:t>(</a:t>
             </a:r>
             <a:r>
-              <a:rPr lang="en-US" altLang="ja-JP" sz="2800" dirty="0" err="1" smtClean="0">
+              <a:rPr lang="en-US" altLang="ja-JP" sz="2800" dirty="0" err="1">
                 <a:sym typeface="Symbol" pitchFamily="18" charset="2"/>
               </a:rPr>
               <a:t>λz</a:t>
             </a:r>
             <a:r>
-              <a:rPr lang="en-US" altLang="ja-JP" sz="2800" dirty="0" smtClean="0">
+              <a:rPr lang="en-US" altLang="ja-JP" sz="2800" dirty="0">
                 <a:sym typeface="Symbol" pitchFamily="18" charset="2"/>
               </a:rPr>
               <a:t> . x)</a:t>
             </a:r>
             <a:r>
-              <a:rPr lang="ja-JP" altLang="en-US" sz="2800" dirty="0" smtClean="0">
+              <a:rPr lang="ja-JP" altLang="en-US" sz="2800" dirty="0">
                 <a:sym typeface="Symbol" pitchFamily="18" charset="2"/>
               </a:rPr>
               <a:t>となる。このようになるように置換を次ページで定義する。</a:t>
             </a:r>
-            <a:endParaRPr lang="en-US" altLang="ja-JP" sz="2800" dirty="0" smtClean="0">
+            <a:endParaRPr lang="en-US" altLang="ja-JP" sz="2800" dirty="0">
               <a:sym typeface="Symbol" pitchFamily="18" charset="2"/>
             </a:endParaRPr>
           </a:p>
           <a:p>
             <a:r>
-              <a:rPr lang="en-US" altLang="ja-JP" sz="2800" dirty="0" smtClean="0">
+              <a:rPr lang="en-US" altLang="ja-JP" sz="2800" dirty="0">
                 <a:sym typeface="Symbol" pitchFamily="18" charset="2"/>
               </a:rPr>
               <a:t> </a:t>
             </a:r>
           </a:p>
           <a:p>
-            <a:endParaRPr lang="en-US" altLang="ja-JP" sz="2800" dirty="0" smtClean="0">
+            <a:endParaRPr lang="en-US" altLang="ja-JP" sz="2800" dirty="0">
               <a:sym typeface="Symbol" pitchFamily="18" charset="2"/>
             </a:endParaRPr>
           </a:p>
@@ -6449,13 +6431,6 @@
   <p:clrMapOvr>
     <a:masterClrMapping/>
   </p:clrMapOvr>
-  <p:timing>
-    <p:tnLst>
-      <p:par>
-        <p:cTn xmlns:p14="http://schemas.microsoft.com/office/powerpoint/2010/main" id="1" dur="indefinite" restart="never" nodeType="tmRoot"/>
-      </p:par>
-    </p:tnLst>
-  </p:timing>
 </p:sld>
 </file>
 
@@ -6497,35 +6472,35 @@
           <a:lstStyle/>
           <a:p>
             <a:r>
-              <a:rPr lang="ja-JP" altLang="en-US" dirty="0" smtClean="0"/>
+              <a:rPr lang="ja-JP" altLang="en-US" dirty="0"/>
               <a:t>置換</a:t>
             </a:r>
             <a:r>
-              <a:rPr lang="en-US" altLang="ja-JP" i="1" dirty="0" smtClean="0"/>
+              <a:rPr lang="en-US" altLang="ja-JP" i="1" dirty="0"/>
               <a:t>M</a:t>
             </a:r>
             <a:r>
-              <a:rPr lang="en-US" altLang="ja-JP" dirty="0" smtClean="0"/>
+              <a:rPr lang="en-US" altLang="ja-JP" dirty="0"/>
               <a:t> [ </a:t>
             </a:r>
             <a:r>
-              <a:rPr lang="en-US" altLang="ja-JP" i="1" dirty="0" smtClean="0"/>
+              <a:rPr lang="en-US" altLang="ja-JP" i="1" dirty="0"/>
               <a:t>N</a:t>
             </a:r>
             <a:r>
-              <a:rPr lang="en-US" altLang="ja-JP" dirty="0" smtClean="0"/>
+              <a:rPr lang="en-US" altLang="ja-JP" dirty="0"/>
               <a:t> / </a:t>
             </a:r>
             <a:r>
-              <a:rPr lang="en-US" altLang="ja-JP" i="1" dirty="0" smtClean="0"/>
+              <a:rPr lang="en-US" altLang="ja-JP" i="1" dirty="0"/>
               <a:t>x</a:t>
             </a:r>
             <a:r>
-              <a:rPr lang="en-US" altLang="ja-JP" dirty="0" smtClean="0"/>
+              <a:rPr lang="en-US" altLang="ja-JP" dirty="0"/>
               <a:t> ]</a:t>
             </a:r>
             <a:r>
-              <a:rPr lang="ja-JP" altLang="en-US" dirty="0" smtClean="0"/>
+              <a:rPr lang="ja-JP" altLang="en-US" dirty="0"/>
               <a:t>の定義</a:t>
             </a:r>
           </a:p>
@@ -6562,7 +6537,7 @@
           <a:lstStyle/>
           <a:p>
             <a:r>
-              <a:rPr lang="en-US" altLang="ja-JP" sz="2800" b="0" i="1" dirty="0" smtClean="0">
+              <a:rPr lang="en-US" altLang="ja-JP" sz="2800" b="0" i="1" dirty="0">
                 <a:sym typeface="Symbol" pitchFamily="18" charset="2"/>
               </a:rPr>
               <a:t>M</a:t>
@@ -6579,16 +6554,10 @@
               <a:rPr lang="ja-JP" altLang="en-US" sz="2800" b="0" i="1" dirty="0">
                 <a:sym typeface="Symbol" pitchFamily="18" charset="2"/>
               </a:rPr>
-              <a:t>  </a:t>
-            </a:r>
-            <a:r>
-              <a:rPr lang="ja-JP" altLang="en-US" sz="2800" b="0" i="1" dirty="0" smtClean="0">
-                <a:sym typeface="Symbol" pitchFamily="18" charset="2"/>
-              </a:rPr>
-              <a:t>  </a:t>
-            </a:r>
-            <a:r>
-              <a:rPr lang="en-US" altLang="ja-JP" sz="2800" b="0" i="1" dirty="0" smtClean="0">
+              <a:t>    </a:t>
+            </a:r>
+            <a:r>
+              <a:rPr lang="en-US" altLang="ja-JP" sz="2800" b="0" i="1" dirty="0">
                 <a:sym typeface="Symbol" pitchFamily="18" charset="2"/>
               </a:rPr>
               <a:t>c </a:t>
@@ -6649,31 +6618,19 @@
               <a:rPr lang="en-US" altLang="ja-JP" sz="2800" b="0" dirty="0">
                 <a:sym typeface="Symbol" pitchFamily="18" charset="2"/>
               </a:rPr>
-              <a:t>  </a:t>
-            </a:r>
-            <a:r>
-              <a:rPr lang="en-US" altLang="ja-JP" sz="2800" b="0" dirty="0" smtClean="0">
-                <a:sym typeface="Symbol" pitchFamily="18" charset="2"/>
-              </a:rPr>
-              <a:t>  </a:t>
-            </a:r>
-            <a:r>
-              <a:rPr lang="en-US" altLang="ja-JP" sz="2800" b="0" i="1" dirty="0" smtClean="0">
+              <a:t>    </a:t>
+            </a:r>
+            <a:r>
+              <a:rPr lang="en-US" altLang="ja-JP" sz="2800" b="0" i="1" dirty="0">
                 <a:sym typeface="Symbol" pitchFamily="18" charset="2"/>
               </a:rPr>
               <a:t>x</a:t>
             </a:r>
             <a:r>
-              <a:rPr lang="en-US" altLang="ja-JP" sz="2800" b="0" dirty="0" smtClean="0">
-                <a:sym typeface="Symbol" pitchFamily="18" charset="2"/>
-              </a:rPr>
-              <a:t> </a:t>
-            </a:r>
-            <a:r>
               <a:rPr lang="en-US" altLang="ja-JP" sz="2800" b="0" dirty="0">
                 <a:sym typeface="Symbol" pitchFamily="18" charset="2"/>
               </a:rPr>
-              <a:t>[ </a:t>
+              <a:t> [ </a:t>
             </a:r>
             <a:r>
               <a:rPr lang="en-US" altLang="ja-JP" sz="2800" b="0" i="1" dirty="0">
@@ -6711,31 +6668,19 @@
               <a:rPr lang="en-US" altLang="ja-JP" sz="2800" b="0" dirty="0">
                 <a:sym typeface="Symbol" pitchFamily="18" charset="2"/>
               </a:rPr>
-              <a:t>  </a:t>
-            </a:r>
-            <a:r>
-              <a:rPr lang="en-US" altLang="ja-JP" sz="2800" b="0" dirty="0" smtClean="0">
-                <a:sym typeface="Symbol" pitchFamily="18" charset="2"/>
-              </a:rPr>
-              <a:t>  </a:t>
-            </a:r>
-            <a:r>
-              <a:rPr lang="en-US" altLang="ja-JP" sz="2800" b="0" i="1" dirty="0" smtClean="0">
+              <a:t>    </a:t>
+            </a:r>
+            <a:r>
+              <a:rPr lang="en-US" altLang="ja-JP" sz="2800" b="0" i="1" dirty="0">
                 <a:sym typeface="Symbol" pitchFamily="18" charset="2"/>
               </a:rPr>
               <a:t>y</a:t>
             </a:r>
             <a:r>
-              <a:rPr lang="en-US" altLang="ja-JP" sz="2800" b="0" dirty="0" smtClean="0">
-                <a:sym typeface="Symbol" pitchFamily="18" charset="2"/>
-              </a:rPr>
-              <a:t> </a:t>
-            </a:r>
-            <a:r>
               <a:rPr lang="en-US" altLang="ja-JP" sz="2800" b="0" dirty="0">
                 <a:sym typeface="Symbol" pitchFamily="18" charset="2"/>
               </a:rPr>
-              <a:t>[ </a:t>
+              <a:t> [ </a:t>
             </a:r>
             <a:r>
               <a:rPr lang="en-US" altLang="ja-JP" sz="2800" b="0" i="1" dirty="0">
@@ -6810,15 +6755,15 @@
           </a:p>
           <a:p>
             <a:r>
-              <a:rPr lang="ja-JP" altLang="en-US" sz="2800" dirty="0" smtClean="0"/>
+              <a:rPr lang="ja-JP" altLang="en-US" sz="2800" dirty="0"/>
               <a:t> </a:t>
             </a:r>
             <a:r>
-              <a:rPr lang="ja-JP" altLang="en-US" sz="2800" b="0" dirty="0" smtClean="0"/>
+              <a:rPr lang="ja-JP" altLang="en-US" sz="2800" b="0" dirty="0"/>
               <a:t>   </a:t>
             </a:r>
             <a:r>
-              <a:rPr lang="en-US" altLang="ja-JP" sz="2800" b="0" dirty="0" smtClean="0"/>
+              <a:rPr lang="en-US" altLang="ja-JP" sz="2800" b="0" dirty="0"/>
               <a:t>(</a:t>
             </a:r>
             <a:r>
@@ -6881,123 +6826,239 @@
               <a:rPr lang="en-US" altLang="ja-JP" sz="2800" b="0" dirty="0">
                 <a:sym typeface="Symbol" pitchFamily="18" charset="2"/>
               </a:rPr>
-              <a:t>    </a:t>
-            </a:r>
-            <a:r>
-              <a:rPr lang="en-US" altLang="ja-JP" sz="2800" b="0" dirty="0" smtClean="0">
-                <a:sym typeface="Symbol" pitchFamily="18" charset="2"/>
-              </a:rPr>
-              <a:t>         </a:t>
+              <a:t>             </a:t>
+            </a:r>
+            <a:r>
+              <a:rPr lang="en-US" altLang="ja-JP" sz="2800" b="0" i="1" dirty="0">
+                <a:sym typeface="Symbol" pitchFamily="18" charset="2"/>
+              </a:rPr>
+              <a:t>y</a:t>
             </a:r>
             <a:r>
               <a:rPr lang="en-US" altLang="ja-JP" sz="2800" b="0" dirty="0">
                 <a:sym typeface="Symbol" pitchFamily="18" charset="2"/>
               </a:rPr>
-              <a:t></a:t>
+              <a:t>. </a:t>
             </a:r>
             <a:r>
               <a:rPr lang="en-US" altLang="ja-JP" sz="2800" b="0" i="1" dirty="0">
                 <a:sym typeface="Symbol" pitchFamily="18" charset="2"/>
               </a:rPr>
+              <a:t>M</a:t>
+            </a:r>
+            <a:r>
+              <a:rPr lang="en-US" altLang="ja-JP" sz="2800" b="0" dirty="0">
+                <a:sym typeface="Symbol" pitchFamily="18" charset="2"/>
+              </a:rPr>
+              <a:t>      (</a:t>
+            </a:r>
+            <a:r>
+              <a:rPr lang="en-US" altLang="ja-JP" sz="2800" b="0" i="1" dirty="0">
+                <a:sym typeface="Symbol" pitchFamily="18" charset="2"/>
+              </a:rPr>
+              <a:t>x</a:t>
+            </a:r>
+            <a:r>
+              <a:rPr lang="en-US" altLang="ja-JP" sz="2800" b="0" dirty="0">
+                <a:sym typeface="Symbol" pitchFamily="18" charset="2"/>
+              </a:rPr>
+              <a:t> = </a:t>
+            </a:r>
+            <a:r>
+              <a:rPr lang="en-US" altLang="ja-JP" sz="2800" b="0" i="1" dirty="0">
+                <a:sym typeface="Symbol" pitchFamily="18" charset="2"/>
+              </a:rPr>
               <a:t>y</a:t>
             </a:r>
             <a:r>
               <a:rPr lang="en-US" altLang="ja-JP" sz="2800" b="0" dirty="0">
                 <a:sym typeface="Symbol" pitchFamily="18" charset="2"/>
               </a:rPr>
-              <a:t>. </a:t>
+              <a:t>)</a:t>
+            </a:r>
+          </a:p>
+          <a:p>
+            <a:r>
+              <a:rPr lang="en-US" altLang="ja-JP" sz="2800" b="0" dirty="0">
+                <a:sym typeface="Symbol" pitchFamily="18" charset="2"/>
+              </a:rPr>
+              <a:t>             </a:t>
             </a:r>
             <a:r>
               <a:rPr lang="en-US" altLang="ja-JP" sz="2800" b="0" i="1" dirty="0">
                 <a:sym typeface="Symbol" pitchFamily="18" charset="2"/>
               </a:rPr>
+              <a:t>y</a:t>
+            </a:r>
+            <a:r>
+              <a:rPr lang="en-US" altLang="ja-JP" sz="2800" b="0" dirty="0">
+                <a:sym typeface="Symbol" pitchFamily="18" charset="2"/>
+              </a:rPr>
+              <a:t>. (</a:t>
+            </a:r>
+            <a:r>
+              <a:rPr lang="en-US" altLang="ja-JP" sz="2800" b="0" i="1" dirty="0">
+                <a:sym typeface="Symbol" pitchFamily="18" charset="2"/>
+              </a:rPr>
               <a:t>M</a:t>
             </a:r>
             <a:r>
               <a:rPr lang="en-US" altLang="ja-JP" sz="2800" b="0" dirty="0">
                 <a:sym typeface="Symbol" pitchFamily="18" charset="2"/>
               </a:rPr>
-              <a:t>      (</a:t>
+              <a:t> [</a:t>
             </a:r>
             <a:r>
               <a:rPr lang="en-US" altLang="ja-JP" sz="2800" b="0" i="1" dirty="0">
                 <a:sym typeface="Symbol" pitchFamily="18" charset="2"/>
               </a:rPr>
+              <a:t>N</a:t>
+            </a:r>
+            <a:r>
+              <a:rPr lang="en-US" altLang="ja-JP" sz="2800" b="0" dirty="0">
+                <a:sym typeface="Symbol" pitchFamily="18" charset="2"/>
+              </a:rPr>
+              <a:t> / </a:t>
+            </a:r>
+            <a:r>
+              <a:rPr lang="en-US" altLang="ja-JP" sz="2800" b="0" i="1" dirty="0">
+                <a:sym typeface="Symbol" pitchFamily="18" charset="2"/>
+              </a:rPr>
               <a:t>x</a:t>
             </a:r>
             <a:r>
               <a:rPr lang="en-US" altLang="ja-JP" sz="2800" b="0" dirty="0">
                 <a:sym typeface="Symbol" pitchFamily="18" charset="2"/>
               </a:rPr>
-              <a:t> = </a:t>
+              <a:t>])    (</a:t>
             </a:r>
             <a:r>
               <a:rPr lang="en-US" altLang="ja-JP" sz="2800" b="0" i="1" dirty="0">
                 <a:sym typeface="Symbol" pitchFamily="18" charset="2"/>
               </a:rPr>
+              <a:t>x</a:t>
+            </a:r>
+            <a:r>
+              <a:rPr lang="en-US" altLang="ja-JP" sz="2800" b="0" dirty="0">
+                <a:sym typeface="Symbol" pitchFamily="18" charset="2"/>
+              </a:rPr>
+              <a:t>  </a:t>
+            </a:r>
+            <a:r>
+              <a:rPr lang="en-US" altLang="ja-JP" sz="2800" b="0" i="1" dirty="0">
+                <a:sym typeface="Symbol" pitchFamily="18" charset="2"/>
+              </a:rPr>
               <a:t>y</a:t>
             </a:r>
             <a:r>
               <a:rPr lang="en-US" altLang="ja-JP" sz="2800" b="0" dirty="0">
                 <a:sym typeface="Symbol" pitchFamily="18" charset="2"/>
               </a:rPr>
-              <a:t>)</a:t>
-            </a:r>
-          </a:p>
-          <a:p>
+              <a:t>, </a:t>
+            </a:r>
+            <a:r>
+              <a:rPr lang="en-US" altLang="ja-JP" sz="2800" b="0" i="1" dirty="0">
+                <a:sym typeface="Symbol" pitchFamily="18" charset="2"/>
+              </a:rPr>
+              <a:t>y</a:t>
+            </a:r>
             <a:r>
               <a:rPr lang="en-US" altLang="ja-JP" sz="2800" b="0" dirty="0">
                 <a:sym typeface="Symbol" pitchFamily="18" charset="2"/>
               </a:rPr>
-              <a:t>      </a:t>
-            </a:r>
-            <a:r>
-              <a:rPr lang="en-US" altLang="ja-JP" sz="2800" b="0" dirty="0" smtClean="0">
-                <a:sym typeface="Symbol" pitchFamily="18" charset="2"/>
-              </a:rPr>
-              <a:t>       </a:t>
+              <a:t>  FV (</a:t>
+            </a:r>
+            <a:r>
+              <a:rPr lang="en-US" altLang="ja-JP" sz="2800" b="0" i="1" dirty="0">
+                <a:sym typeface="Symbol" pitchFamily="18" charset="2"/>
+              </a:rPr>
+              <a:t>N</a:t>
             </a:r>
             <a:r>
               <a:rPr lang="en-US" altLang="ja-JP" sz="2800" b="0" dirty="0">
                 <a:sym typeface="Symbol" pitchFamily="18" charset="2"/>
               </a:rPr>
-              <a:t></a:t>
+              <a:t>))</a:t>
+            </a:r>
+          </a:p>
+          <a:p>
+            <a:r>
+              <a:rPr lang="en-US" altLang="ja-JP" sz="2800" b="0" dirty="0">
+                <a:sym typeface="Symbol" pitchFamily="18" charset="2"/>
+              </a:rPr>
+              <a:t>             </a:t>
             </a:r>
             <a:r>
               <a:rPr lang="en-US" altLang="ja-JP" sz="2800" b="0" i="1" dirty="0">
                 <a:sym typeface="Symbol" pitchFamily="18" charset="2"/>
               </a:rPr>
+              <a:t>z</a:t>
+            </a:r>
+            <a:r>
+              <a:rPr lang="en-US" altLang="ja-JP" sz="2800" b="0" dirty="0">
+                <a:sym typeface="Symbol" pitchFamily="18" charset="2"/>
+              </a:rPr>
+              <a:t>. ((</a:t>
+            </a:r>
+            <a:r>
+              <a:rPr lang="en-US" altLang="ja-JP" sz="2800" b="0" i="1" dirty="0">
+                <a:sym typeface="Symbol" pitchFamily="18" charset="2"/>
+              </a:rPr>
+              <a:t>M</a:t>
+            </a:r>
+            <a:r>
+              <a:rPr lang="en-US" altLang="ja-JP" sz="2800" b="0" dirty="0">
+                <a:sym typeface="Symbol" pitchFamily="18" charset="2"/>
+              </a:rPr>
+              <a:t> [</a:t>
+            </a:r>
+            <a:r>
+              <a:rPr lang="en-US" altLang="ja-JP" sz="2800" b="0" i="1" dirty="0">
+                <a:sym typeface="Symbol" pitchFamily="18" charset="2"/>
+              </a:rPr>
+              <a:t> z</a:t>
+            </a:r>
+            <a:r>
+              <a:rPr lang="en-US" altLang="ja-JP" sz="2800" b="0" dirty="0">
+                <a:sym typeface="Symbol" pitchFamily="18" charset="2"/>
+              </a:rPr>
+              <a:t> / </a:t>
+            </a:r>
+            <a:r>
+              <a:rPr lang="en-US" altLang="ja-JP" sz="2800" b="0" i="1" dirty="0">
+                <a:sym typeface="Symbol" pitchFamily="18" charset="2"/>
+              </a:rPr>
               <a:t>y</a:t>
             </a:r>
             <a:r>
               <a:rPr lang="en-US" altLang="ja-JP" sz="2800" b="0" dirty="0">
                 <a:sym typeface="Symbol" pitchFamily="18" charset="2"/>
               </a:rPr>
-              <a:t>. (</a:t>
+              <a:t> ]) [</a:t>
             </a:r>
             <a:r>
               <a:rPr lang="en-US" altLang="ja-JP" sz="2800" b="0" i="1" dirty="0">
                 <a:sym typeface="Symbol" pitchFamily="18" charset="2"/>
               </a:rPr>
-              <a:t>M</a:t>
+              <a:t>N</a:t>
             </a:r>
             <a:r>
               <a:rPr lang="en-US" altLang="ja-JP" sz="2800" b="0" dirty="0">
                 <a:sym typeface="Symbol" pitchFamily="18" charset="2"/>
               </a:rPr>
-              <a:t> [</a:t>
+              <a:t> / </a:t>
             </a:r>
             <a:r>
               <a:rPr lang="en-US" altLang="ja-JP" sz="2800" b="0" i="1" dirty="0">
                 <a:sym typeface="Symbol" pitchFamily="18" charset="2"/>
               </a:rPr>
-              <a:t>N</a:t>
+              <a:t>x</a:t>
             </a:r>
             <a:r>
               <a:rPr lang="en-US" altLang="ja-JP" sz="2800" b="0" dirty="0">
                 <a:sym typeface="Symbol" pitchFamily="18" charset="2"/>
               </a:rPr>
-              <a:t> / </a:t>
+              <a:t>] )    ( </a:t>
             </a:r>
             <a:r>
               <a:rPr lang="en-US" altLang="ja-JP" sz="2800" b="0" i="1" dirty="0">
@@ -7009,19 +7070,19 @@
               <a:rPr lang="en-US" altLang="ja-JP" sz="2800" b="0" dirty="0">
                 <a:sym typeface="Symbol" pitchFamily="18" charset="2"/>
               </a:rPr>
-              <a:t>])    (</a:t>
+              <a:t>  </a:t>
             </a:r>
             <a:r>
               <a:rPr lang="en-US" altLang="ja-JP" sz="2800" b="0" i="1" dirty="0">
                 <a:sym typeface="Symbol" pitchFamily="18" charset="2"/>
               </a:rPr>
-              <a:t>x</a:t>
+              <a:t>y</a:t>
             </a:r>
             <a:r>
               <a:rPr lang="en-US" altLang="ja-JP" sz="2800" b="0" dirty="0">
                 <a:sym typeface="Symbol" pitchFamily="18" charset="2"/>
               </a:rPr>
-              <a:t>  </a:t>
+              <a:t>, </a:t>
             </a:r>
             <a:r>
               <a:rPr lang="en-US" altLang="ja-JP" sz="2800" b="0" i="1" dirty="0">
@@ -7033,177 +7094,7 @@
               <a:rPr lang="en-US" altLang="ja-JP" sz="2800" b="0" dirty="0">
                 <a:sym typeface="Symbol" pitchFamily="18" charset="2"/>
               </a:rPr>
-              <a:t>, </a:t>
-            </a:r>
-            <a:r>
-              <a:rPr lang="en-US" altLang="ja-JP" sz="2800" b="0" i="1" dirty="0">
-                <a:sym typeface="Symbol" pitchFamily="18" charset="2"/>
-              </a:rPr>
-              <a:t>y</a:t>
-            </a:r>
-            <a:r>
-              <a:rPr lang="en-US" altLang="ja-JP" sz="2800" b="0" dirty="0">
-                <a:sym typeface="Symbol" pitchFamily="18" charset="2"/>
-              </a:rPr>
-              <a:t>  FV (</a:t>
-            </a:r>
-            <a:r>
-              <a:rPr lang="en-US" altLang="ja-JP" sz="2800" b="0" i="1" dirty="0">
-                <a:sym typeface="Symbol" pitchFamily="18" charset="2"/>
-              </a:rPr>
-              <a:t>N</a:t>
-            </a:r>
-            <a:r>
-              <a:rPr lang="en-US" altLang="ja-JP" sz="2800" b="0" dirty="0">
-                <a:sym typeface="Symbol" pitchFamily="18" charset="2"/>
-              </a:rPr>
-              <a:t>))</a:t>
-            </a:r>
-          </a:p>
-          <a:p>
-            <a:r>
-              <a:rPr lang="en-US" altLang="ja-JP" sz="2800" b="0" dirty="0">
-                <a:sym typeface="Symbol" pitchFamily="18" charset="2"/>
-              </a:rPr>
-              <a:t>        </a:t>
-            </a:r>
-            <a:r>
-              <a:rPr lang="en-US" altLang="ja-JP" sz="2800" b="0" dirty="0" smtClean="0">
-                <a:sym typeface="Symbol" pitchFamily="18" charset="2"/>
-              </a:rPr>
-              <a:t>     </a:t>
-            </a:r>
-            <a:r>
-              <a:rPr lang="en-US" altLang="ja-JP" sz="2800" b="0" dirty="0">
-                <a:sym typeface="Symbol" pitchFamily="18" charset="2"/>
-              </a:rPr>
-              <a:t></a:t>
-            </a:r>
-            <a:r>
-              <a:rPr lang="en-US" altLang="ja-JP" sz="2800" b="0" i="1" dirty="0">
-                <a:sym typeface="Symbol" pitchFamily="18" charset="2"/>
-              </a:rPr>
-              <a:t>z</a:t>
-            </a:r>
-            <a:r>
-              <a:rPr lang="en-US" altLang="ja-JP" sz="2800" b="0" dirty="0">
-                <a:sym typeface="Symbol" pitchFamily="18" charset="2"/>
-              </a:rPr>
-              <a:t>. ((</a:t>
-            </a:r>
-            <a:r>
-              <a:rPr lang="en-US" altLang="ja-JP" sz="2800" b="0" i="1" dirty="0">
-                <a:sym typeface="Symbol" pitchFamily="18" charset="2"/>
-              </a:rPr>
-              <a:t>M</a:t>
-            </a:r>
-            <a:r>
-              <a:rPr lang="en-US" altLang="ja-JP" sz="2800" b="0" dirty="0">
-                <a:sym typeface="Symbol" pitchFamily="18" charset="2"/>
-              </a:rPr>
-              <a:t> [</a:t>
-            </a:r>
-            <a:r>
-              <a:rPr lang="en-US" altLang="ja-JP" sz="2800" b="0" i="1" dirty="0">
-                <a:sym typeface="Symbol" pitchFamily="18" charset="2"/>
-              </a:rPr>
-              <a:t> z</a:t>
-            </a:r>
-            <a:r>
-              <a:rPr lang="en-US" altLang="ja-JP" sz="2800" b="0" dirty="0">
-                <a:sym typeface="Symbol" pitchFamily="18" charset="2"/>
-              </a:rPr>
-              <a:t> / </a:t>
-            </a:r>
-            <a:r>
-              <a:rPr lang="en-US" altLang="ja-JP" sz="2800" b="0" i="1" dirty="0">
-                <a:sym typeface="Symbol" pitchFamily="18" charset="2"/>
-              </a:rPr>
-              <a:t>y</a:t>
-            </a:r>
-            <a:r>
-              <a:rPr lang="en-US" altLang="ja-JP" sz="2800" b="0" dirty="0">
-                <a:sym typeface="Symbol" pitchFamily="18" charset="2"/>
-              </a:rPr>
-              <a:t> ]) [</a:t>
-            </a:r>
-            <a:r>
-              <a:rPr lang="en-US" altLang="ja-JP" sz="2800" b="0" i="1" dirty="0">
-                <a:sym typeface="Symbol" pitchFamily="18" charset="2"/>
-              </a:rPr>
-              <a:t>N</a:t>
-            </a:r>
-            <a:r>
-              <a:rPr lang="en-US" altLang="ja-JP" sz="2800" b="0" dirty="0">
-                <a:sym typeface="Symbol" pitchFamily="18" charset="2"/>
-              </a:rPr>
-              <a:t> / </a:t>
-            </a:r>
-            <a:r>
-              <a:rPr lang="en-US" altLang="ja-JP" sz="2800" b="0" i="1" dirty="0">
-                <a:sym typeface="Symbol" pitchFamily="18" charset="2"/>
-              </a:rPr>
-              <a:t>x</a:t>
-            </a:r>
-            <a:r>
-              <a:rPr lang="en-US" altLang="ja-JP" sz="2800" b="0" dirty="0">
-                <a:sym typeface="Symbol" pitchFamily="18" charset="2"/>
-              </a:rPr>
-              <a:t>] )    ( </a:t>
-            </a:r>
-            <a:r>
-              <a:rPr lang="en-US" altLang="ja-JP" sz="2800" b="0" i="1" dirty="0">
-                <a:sym typeface="Symbol" pitchFamily="18" charset="2"/>
-              </a:rPr>
-              <a:t>x</a:t>
-            </a:r>
-            <a:r>
-              <a:rPr lang="en-US" altLang="ja-JP" sz="2800" b="0" dirty="0">
-                <a:sym typeface="Symbol" pitchFamily="18" charset="2"/>
-              </a:rPr>
-              <a:t>  </a:t>
-            </a:r>
-            <a:r>
-              <a:rPr lang="en-US" altLang="ja-JP" sz="2800" b="0" i="1" dirty="0">
-                <a:sym typeface="Symbol" pitchFamily="18" charset="2"/>
-              </a:rPr>
-              <a:t>y</a:t>
-            </a:r>
-            <a:r>
-              <a:rPr lang="en-US" altLang="ja-JP" sz="2800" b="0" dirty="0">
-                <a:sym typeface="Symbol" pitchFamily="18" charset="2"/>
-              </a:rPr>
-              <a:t>, </a:t>
-            </a:r>
-            <a:r>
-              <a:rPr lang="en-US" altLang="ja-JP" sz="2800" b="0" i="1" dirty="0" smtClean="0">
-                <a:sym typeface="Symbol" pitchFamily="18" charset="2"/>
-              </a:rPr>
-              <a:t>y</a:t>
-            </a:r>
-            <a:r>
-              <a:rPr lang="en-US" altLang="ja-JP" sz="2800" b="0" dirty="0" smtClean="0">
-                <a:sym typeface="Symbol" pitchFamily="18" charset="2"/>
-              </a:rPr>
-              <a:t> </a:t>
-            </a:r>
-            <a:r>
-              <a:rPr lang="en-US" altLang="ja-JP" sz="2800" b="0" dirty="0">
-                <a:sym typeface="Symbol" pitchFamily="18" charset="2"/>
-              </a:rPr>
-              <a:t> </a:t>
-            </a:r>
-            <a:r>
-              <a:rPr lang="en-US" altLang="ja-JP" sz="2800" b="0" dirty="0" smtClean="0">
-                <a:sym typeface="Symbol" pitchFamily="18" charset="2"/>
-              </a:rPr>
-              <a:t>FV </a:t>
-            </a:r>
-            <a:r>
-              <a:rPr lang="en-US" altLang="ja-JP" sz="2800" b="0" dirty="0">
-                <a:sym typeface="Symbol" pitchFamily="18" charset="2"/>
-              </a:rPr>
-              <a:t>(</a:t>
+              <a:t>  FV (</a:t>
             </a:r>
             <a:r>
               <a:rPr lang="en-US" altLang="ja-JP" sz="2800" b="0" i="1" dirty="0">
@@ -7250,31 +7141,19 @@
               <a:rPr lang="ja-JP" altLang="en-US" sz="2800" b="0" dirty="0">
                 <a:sym typeface="Symbol" pitchFamily="18" charset="2"/>
               </a:rPr>
-              <a:t>          </a:t>
-            </a:r>
-            <a:r>
-              <a:rPr lang="ja-JP" altLang="en-US" sz="2800" b="0" dirty="0" smtClean="0">
-                <a:sym typeface="Symbol" pitchFamily="18" charset="2"/>
-              </a:rPr>
-              <a:t>                                      </a:t>
-            </a:r>
-            <a:r>
-              <a:rPr lang="en-US" altLang="ja-JP" sz="2800" b="0" i="1" dirty="0" smtClean="0">
+              <a:t>                                                </a:t>
+            </a:r>
+            <a:r>
+              <a:rPr lang="en-US" altLang="ja-JP" sz="2800" b="0" i="1" dirty="0">
                 <a:sym typeface="Symbol" pitchFamily="18" charset="2"/>
               </a:rPr>
               <a:t>z</a:t>
             </a:r>
             <a:r>
-              <a:rPr lang="en-US" altLang="ja-JP" sz="2800" b="0" dirty="0" smtClean="0">
-                <a:sym typeface="Symbol" pitchFamily="18" charset="2"/>
-              </a:rPr>
-              <a:t> </a:t>
-            </a:r>
-            <a:r>
               <a:rPr lang="en-US" altLang="ja-JP" sz="2800" b="0" dirty="0">
                 <a:sym typeface="Symbol" pitchFamily="18" charset="2"/>
               </a:rPr>
-              <a:t> FV (</a:t>
+              <a:t>  FV (</a:t>
             </a:r>
             <a:r>
               <a:rPr lang="en-US" altLang="ja-JP" sz="2800" b="0" i="1" dirty="0">
@@ -7332,16 +7211,10 @@
               <a:rPr lang="ja-JP" altLang="en-US" sz="2800" b="0" dirty="0">
                 <a:sym typeface="Symbol" pitchFamily="18" charset="2"/>
               </a:rPr>
-              <a:t>  </a:t>
-            </a:r>
-            <a:r>
-              <a:rPr lang="ja-JP" altLang="en-US" sz="2800" b="0" dirty="0" smtClean="0">
-                <a:sym typeface="Symbol" pitchFamily="18" charset="2"/>
-              </a:rPr>
-              <a:t>  </a:t>
-            </a:r>
-            <a:r>
-              <a:rPr lang="en-US" altLang="ja-JP" sz="2800" b="0" dirty="0" smtClean="0">
+              <a:t>    </a:t>
+            </a:r>
+            <a:r>
+              <a:rPr lang="en-US" altLang="ja-JP" sz="2800" b="0" dirty="0">
                 <a:sym typeface="Symbol" pitchFamily="18" charset="2"/>
               </a:rPr>
               <a:t>(</a:t>
@@ -7536,13 +7409,6 @@
   <p:clrMapOvr>
     <a:masterClrMapping/>
   </p:clrMapOvr>
-  <p:timing>
-    <p:tnLst>
-      <p:par>
-        <p:cTn xmlns:p14="http://schemas.microsoft.com/office/powerpoint/2010/main" id="1" dur="indefinite" restart="never" nodeType="tmRoot"/>
-      </p:par>
-    </p:tnLst>
-  </p:timing>
 </p:sld>
 </file>
 
@@ -7579,7 +7445,7 @@
           <a:lstStyle/>
           <a:p>
             <a:r>
-              <a:rPr lang="ja-JP" altLang="en-US" dirty="0" smtClean="0">
+              <a:rPr lang="ja-JP" altLang="en-US" dirty="0">
                 <a:sym typeface="Symbol" pitchFamily="18" charset="2"/>
               </a:rPr>
               <a:t>自由変数</a:t>
@@ -7813,14 +7679,11 @@
               <a:t>2</a:t>
             </a:r>
             <a:r>
-              <a:rPr lang="en-US" altLang="ja-JP" sz="2800" b="0" dirty="0" smtClean="0">
+              <a:rPr lang="en-US" altLang="ja-JP" sz="2800" b="0" dirty="0">
                 <a:sym typeface="Symbol" pitchFamily="18" charset="2"/>
               </a:rPr>
               <a:t>)</a:t>
             </a:r>
-            <a:endParaRPr lang="en-US" altLang="ja-JP" sz="2800" b="0" dirty="0">
-              <a:sym typeface="Symbol" pitchFamily="18" charset="2"/>
-            </a:endParaRPr>
           </a:p>
         </p:txBody>
       </p:sp>
@@ -7846,38 +7709,37 @@
           <a:lstStyle/>
           <a:p>
             <a:r>
-              <a:rPr lang="ja-JP" altLang="en-US" sz="2800" dirty="0" smtClean="0"/>
+              <a:rPr lang="ja-JP" altLang="en-US" sz="2800" dirty="0"/>
               <a:t>ラムダ式</a:t>
             </a:r>
             <a:r>
-              <a:rPr lang="ja-JP" altLang="en-US" sz="2800" i="1" dirty="0" smtClean="0"/>
+              <a:rPr lang="ja-JP" altLang="en-US" sz="2800" i="1" dirty="0"/>
               <a:t> </a:t>
             </a:r>
             <a:r>
-              <a:rPr lang="en-US" altLang="ja-JP" sz="2800" i="1" dirty="0" smtClean="0"/>
+              <a:rPr lang="en-US" altLang="ja-JP" sz="2800" i="1" dirty="0"/>
               <a:t>M</a:t>
             </a:r>
             <a:r>
-              <a:rPr lang="ja-JP" altLang="en-US" sz="2800" dirty="0" smtClean="0"/>
+              <a:rPr lang="ja-JP" altLang="en-US" sz="2800" dirty="0"/>
               <a:t>の自由変数の集合</a:t>
             </a:r>
             <a:r>
-              <a:rPr lang="en-US" altLang="ja-JP" sz="2800" dirty="0" smtClean="0"/>
+              <a:rPr lang="en-US" altLang="ja-JP" sz="2800" dirty="0"/>
               <a:t>FV(</a:t>
             </a:r>
             <a:r>
-              <a:rPr lang="en-US" altLang="ja-JP" sz="2800" i="1" dirty="0" smtClean="0"/>
+              <a:rPr lang="en-US" altLang="ja-JP" sz="2800" i="1" dirty="0"/>
               <a:t>M</a:t>
             </a:r>
             <a:r>
-              <a:rPr lang="en-US" altLang="ja-JP" sz="2800" dirty="0" smtClean="0"/>
+              <a:rPr lang="en-US" altLang="ja-JP" sz="2800" dirty="0"/>
               <a:t>)</a:t>
             </a:r>
             <a:r>
-              <a:rPr lang="ja-JP" altLang="en-US" sz="2800" dirty="0" smtClean="0"/>
+              <a:rPr lang="ja-JP" altLang="en-US" sz="2800" dirty="0"/>
               <a:t>を以下のように定義する。</a:t>
             </a:r>
-            <a:endParaRPr lang="ja-JP" altLang="en-US" sz="2800" dirty="0"/>
           </a:p>
         </p:txBody>
       </p:sp>
@@ -7886,13 +7748,6 @@
   <p:clrMapOvr>
     <a:masterClrMapping/>
   </p:clrMapOvr>
-  <p:timing>
-    <p:tnLst>
-      <p:par>
-        <p:cTn xmlns:p14="http://schemas.microsoft.com/office/powerpoint/2010/main" id="1" dur="indefinite" restart="never" nodeType="tmRoot"/>
-      </p:par>
-    </p:tnLst>
-  </p:timing>
 </p:sld>
 </file>
 
@@ -7929,7 +7784,7 @@
           <a:lstStyle/>
           <a:p>
             <a:r>
-              <a:rPr lang="ja-JP" altLang="en-US" dirty="0" smtClean="0">
+              <a:rPr lang="ja-JP" altLang="en-US" dirty="0">
                 <a:sym typeface="Symbol" pitchFamily="18" charset="2"/>
               </a:rPr>
               <a:t>例</a:t>
@@ -7970,155 +7825,155 @@
           <a:p>
             <a:pPr marL="457200" indent="-457200"/>
             <a:r>
-              <a:rPr lang="ja-JP" altLang="en-US" sz="2800" b="0" dirty="0" smtClean="0"/>
+              <a:rPr lang="ja-JP" altLang="en-US" sz="2800" b="0" dirty="0"/>
               <a:t>（例１）ラムダ式 </a:t>
             </a:r>
             <a:r>
-              <a:rPr lang="en-US" altLang="ja-JP" sz="2800" b="0" dirty="0" smtClean="0"/>
+              <a:rPr lang="en-US" altLang="ja-JP" sz="2800" b="0" dirty="0"/>
               <a:t>(</a:t>
             </a:r>
             <a:r>
-              <a:rPr lang="en-US" altLang="ja-JP" sz="2800" b="0" dirty="0" err="1" smtClean="0"/>
+              <a:rPr lang="en-US" altLang="ja-JP" sz="2800" b="0" dirty="0" err="1"/>
               <a:t>λx</a:t>
             </a:r>
             <a:r>
-              <a:rPr lang="en-US" altLang="ja-JP" sz="2800" b="0" dirty="0" smtClean="0"/>
+              <a:rPr lang="en-US" altLang="ja-JP" sz="2800" b="0" dirty="0"/>
               <a:t> . x)</a:t>
             </a:r>
             <a:r>
-              <a:rPr lang="ja-JP" altLang="en-US" sz="2800" dirty="0" smtClean="0"/>
+              <a:rPr lang="ja-JP" altLang="en-US" sz="2800" dirty="0"/>
               <a:t>の自由変数を計算してみる。</a:t>
             </a:r>
             <a:r>
-              <a:rPr lang="en-US" altLang="ja-JP" sz="2800" dirty="0" smtClean="0"/>
+              <a:rPr lang="en-US" altLang="ja-JP" sz="2800" dirty="0"/>
               <a:t>FV</a:t>
             </a:r>
             <a:r>
-              <a:rPr lang="ja-JP" altLang="en-US" sz="2800" dirty="0" smtClean="0"/>
+              <a:rPr lang="ja-JP" altLang="en-US" sz="2800" dirty="0"/>
               <a:t>の定義により、</a:t>
             </a:r>
-            <a:endParaRPr lang="en-US" altLang="ja-JP" sz="2800" dirty="0" smtClean="0"/>
+            <a:endParaRPr lang="en-US" altLang="ja-JP" sz="2800" dirty="0"/>
           </a:p>
           <a:p>
             <a:pPr marL="457200" indent="-457200"/>
             <a:r>
-              <a:rPr lang="en-US" altLang="ja-JP" sz="2800" dirty="0" smtClean="0"/>
+              <a:rPr lang="en-US" altLang="ja-JP" sz="2800" dirty="0"/>
               <a:t>  FV (</a:t>
             </a:r>
             <a:r>
-              <a:rPr lang="en-US" altLang="ja-JP" sz="2800" dirty="0" err="1" smtClean="0"/>
+              <a:rPr lang="en-US" altLang="ja-JP" sz="2800" dirty="0" err="1"/>
               <a:t>λx</a:t>
             </a:r>
             <a:r>
-              <a:rPr lang="en-US" altLang="ja-JP" sz="2800" dirty="0" smtClean="0"/>
+              <a:rPr lang="en-US" altLang="ja-JP" sz="2800" dirty="0"/>
               <a:t>. x) = FV (x) \ {x} = {x} \ {x} = { }</a:t>
             </a:r>
           </a:p>
           <a:p>
             <a:pPr marL="457200" indent="-457200"/>
             <a:r>
-              <a:rPr lang="ja-JP" altLang="en-US" sz="2800" dirty="0" smtClean="0"/>
+              <a:rPr lang="ja-JP" altLang="en-US" sz="2800" dirty="0"/>
               <a:t>である。（</a:t>
             </a:r>
             <a:r>
-              <a:rPr lang="en-US" altLang="ja-JP" sz="2800" dirty="0" smtClean="0"/>
+              <a:rPr lang="en-US" altLang="ja-JP" sz="2800" dirty="0"/>
               <a:t> </a:t>
             </a:r>
             <a:r>
-              <a:rPr lang="ja-JP" altLang="en-US" sz="2800" dirty="0" smtClean="0"/>
+              <a:rPr lang="ja-JP" altLang="en-US" sz="2800" dirty="0"/>
               <a:t>ラムダ式</a:t>
             </a:r>
             <a:r>
-              <a:rPr lang="en-US" altLang="ja-JP" sz="2800" dirty="0" smtClean="0"/>
+              <a:rPr lang="en-US" altLang="ja-JP" sz="2800" dirty="0"/>
               <a:t>(</a:t>
             </a:r>
             <a:r>
-              <a:rPr lang="en-US" altLang="ja-JP" sz="2800" dirty="0" err="1" smtClean="0"/>
+              <a:rPr lang="en-US" altLang="ja-JP" sz="2800" dirty="0" err="1"/>
               <a:t>λx</a:t>
             </a:r>
             <a:r>
-              <a:rPr lang="en-US" altLang="ja-JP" sz="2800" dirty="0" smtClean="0"/>
+              <a:rPr lang="en-US" altLang="ja-JP" sz="2800" dirty="0"/>
               <a:t> . x)</a:t>
             </a:r>
             <a:r>
-              <a:rPr lang="ja-JP" altLang="en-US" sz="2800" dirty="0" err="1" smtClean="0"/>
+              <a:rPr lang="ja-JP" altLang="en-US" sz="2800" dirty="0" err="1"/>
               <a:t>には</a:t>
             </a:r>
             <a:r>
-              <a:rPr lang="ja-JP" altLang="en-US" sz="2800" dirty="0" smtClean="0"/>
+              <a:rPr lang="ja-JP" altLang="en-US" sz="2800" dirty="0"/>
               <a:t>自由変数はない。）</a:t>
             </a:r>
-            <a:endParaRPr lang="en-US" altLang="ja-JP" sz="2800" dirty="0" smtClean="0"/>
+            <a:endParaRPr lang="en-US" altLang="ja-JP" sz="2800" dirty="0"/>
           </a:p>
           <a:p>
             <a:pPr marL="457200" indent="-457200"/>
-            <a:endParaRPr lang="en-US" altLang="ja-JP" sz="2800" b="0" dirty="0" smtClean="0"/>
+            <a:endParaRPr lang="en-US" altLang="ja-JP" sz="2800" b="0" dirty="0"/>
           </a:p>
           <a:p>
             <a:pPr marL="457200" indent="-457200"/>
             <a:r>
-              <a:rPr lang="ja-JP" altLang="en-US" sz="2800" dirty="0" smtClean="0"/>
+              <a:rPr lang="ja-JP" altLang="en-US" sz="2800" dirty="0"/>
               <a:t>（例２）ラムダ式 </a:t>
             </a:r>
             <a:r>
-              <a:rPr lang="en-US" altLang="ja-JP" sz="2800" dirty="0" smtClean="0"/>
+              <a:rPr lang="en-US" altLang="ja-JP" sz="2800" dirty="0"/>
               <a:t>(</a:t>
             </a:r>
             <a:r>
-              <a:rPr lang="en-US" altLang="ja-JP" sz="2800" dirty="0" err="1" smtClean="0"/>
+              <a:rPr lang="en-US" altLang="ja-JP" sz="2800" dirty="0" err="1"/>
               <a:t>λx</a:t>
             </a:r>
             <a:r>
-              <a:rPr lang="en-US" altLang="ja-JP" sz="2800" dirty="0" smtClean="0"/>
+              <a:rPr lang="en-US" altLang="ja-JP" sz="2800" dirty="0"/>
               <a:t>. x y)</a:t>
             </a:r>
             <a:r>
-              <a:rPr lang="ja-JP" altLang="en-US" sz="2800" dirty="0" smtClean="0"/>
+              <a:rPr lang="ja-JP" altLang="en-US" sz="2800" dirty="0"/>
               <a:t>の自由変数は、</a:t>
             </a:r>
-            <a:endParaRPr lang="en-US" altLang="ja-JP" sz="2800" dirty="0" smtClean="0"/>
+            <a:endParaRPr lang="en-US" altLang="ja-JP" sz="2800" dirty="0"/>
           </a:p>
           <a:p>
             <a:pPr marL="457200" indent="-457200"/>
             <a:r>
-              <a:rPr lang="en-US" altLang="ja-JP" sz="2800" b="0" dirty="0" smtClean="0"/>
+              <a:rPr lang="en-US" altLang="ja-JP" sz="2800" b="0" dirty="0"/>
               <a:t>  FV (</a:t>
             </a:r>
             <a:r>
-              <a:rPr lang="en-US" altLang="ja-JP" sz="2800" b="0" dirty="0" err="1" smtClean="0"/>
+              <a:rPr lang="en-US" altLang="ja-JP" sz="2800" b="0" dirty="0" err="1"/>
               <a:t>λx</a:t>
             </a:r>
             <a:r>
-              <a:rPr lang="en-US" altLang="ja-JP" sz="2800" b="0" dirty="0" smtClean="0"/>
+              <a:rPr lang="en-US" altLang="ja-JP" sz="2800" b="0" dirty="0"/>
               <a:t>. </a:t>
             </a:r>
             <a:r>
-              <a:rPr lang="en-US" altLang="ja-JP" sz="2800" dirty="0" smtClean="0"/>
+              <a:rPr lang="en-US" altLang="ja-JP" sz="2800" dirty="0"/>
               <a:t>x y) = FV (x y) \ {x} = (FV (x) U FV(y)) \ {x}</a:t>
             </a:r>
           </a:p>
           <a:p>
             <a:pPr marL="457200" indent="-457200"/>
             <a:r>
-              <a:rPr lang="en-US" altLang="ja-JP" sz="2800" b="0" dirty="0" smtClean="0"/>
+              <a:rPr lang="en-US" altLang="ja-JP" sz="2800" b="0" dirty="0"/>
               <a:t>                      = ({x} U {y}) \ {x} = {x, y} \ {x} = {y}</a:t>
             </a:r>
           </a:p>
           <a:p>
             <a:pPr marL="457200" indent="-457200"/>
             <a:r>
-              <a:rPr lang="ja-JP" altLang="en-US" sz="2800" dirty="0" smtClean="0"/>
+              <a:rPr lang="ja-JP" altLang="en-US" sz="2800" dirty="0"/>
               <a:t>となり、</a:t>
             </a:r>
             <a:r>
-              <a:rPr lang="en-US" altLang="ja-JP" sz="2800" dirty="0" smtClean="0"/>
+              <a:rPr lang="en-US" altLang="ja-JP" sz="2800" dirty="0"/>
               <a:t>y</a:t>
             </a:r>
             <a:r>
-              <a:rPr lang="ja-JP" altLang="en-US" sz="2800" dirty="0" smtClean="0"/>
+              <a:rPr lang="ja-JP" altLang="en-US" sz="2800" dirty="0"/>
               <a:t>１つである。</a:t>
             </a:r>
-            <a:endParaRPr lang="en-US" altLang="ja-JP" sz="2800" dirty="0" smtClean="0"/>
+            <a:endParaRPr lang="en-US" altLang="ja-JP" sz="2800" dirty="0"/>
           </a:p>
         </p:txBody>
       </p:sp>
@@ -8127,13 +7982,6 @@
   <p:clrMapOvr>
     <a:masterClrMapping/>
   </p:clrMapOvr>
-  <p:timing>
-    <p:tnLst>
-      <p:par>
-        <p:cTn xmlns:p14="http://schemas.microsoft.com/office/powerpoint/2010/main" id="1" dur="indefinite" restart="never" nodeType="tmRoot"/>
-      </p:par>
-    </p:tnLst>
-  </p:timing>
 </p:sld>
 </file>
 
@@ -8195,7 +8043,7 @@
               <a:defRPr/>
             </a:pPr>
             <a:r>
-              <a:rPr kumimoji="1" lang="ja-JP" altLang="en-US" sz="4400" b="0" i="0" u="none" strike="noStrike" kern="1200" cap="none" spc="0" normalizeH="0" baseline="0" noProof="0" dirty="0" smtClean="0">
+              <a:rPr kumimoji="1" lang="ja-JP" altLang="en-US" sz="4400" b="0" i="0" u="none" strike="noStrike" kern="1200" cap="none" spc="0" normalizeH="0" baseline="0" noProof="0" dirty="0">
                 <a:ln>
                   <a:noFill/>
                 </a:ln>
@@ -8238,69 +8086,69 @@
           <a:lstStyle/>
           <a:p>
             <a:r>
-              <a:rPr kumimoji="1" lang="ja-JP" altLang="en-US" sz="2800" dirty="0" smtClean="0"/>
+              <a:rPr kumimoji="1" lang="ja-JP" altLang="en-US" sz="2800" dirty="0"/>
               <a:t>（問１） ラムダ式 </a:t>
             </a:r>
             <a:r>
-              <a:rPr lang="en-US" altLang="ja-JP" sz="2800" dirty="0" smtClean="0">
+              <a:rPr lang="en-US" altLang="ja-JP" sz="2800" dirty="0">
                 <a:sym typeface="Symbol" pitchFamily="18" charset="2"/>
               </a:rPr>
               <a:t>(z. z) w </a:t>
             </a:r>
             <a:r>
-              <a:rPr lang="ja-JP" altLang="en-US" sz="2800" dirty="0" smtClean="0">
+              <a:rPr lang="ja-JP" altLang="en-US" sz="2800" dirty="0">
                 <a:sym typeface="Symbol" pitchFamily="18" charset="2"/>
               </a:rPr>
               <a:t>中の自由変数を求めよ。</a:t>
             </a:r>
-            <a:endParaRPr lang="en-US" altLang="ja-JP" sz="2800" dirty="0" smtClean="0">
+            <a:endParaRPr lang="en-US" altLang="ja-JP" sz="2800" dirty="0">
               <a:sym typeface="Symbol" pitchFamily="18" charset="2"/>
             </a:endParaRPr>
           </a:p>
           <a:p>
             <a:r>
-              <a:rPr lang="ja-JP" altLang="en-US" sz="2800" dirty="0" smtClean="0">
+              <a:rPr lang="ja-JP" altLang="en-US" sz="2800" dirty="0">
                 <a:sym typeface="Symbol" pitchFamily="18" charset="2"/>
               </a:rPr>
               <a:t>（問２） ラムダ式 </a:t>
             </a:r>
             <a:r>
-              <a:rPr lang="en-US" altLang="ja-JP" sz="2800" dirty="0" smtClean="0">
+              <a:rPr lang="en-US" altLang="ja-JP" sz="2800" dirty="0">
                 <a:sym typeface="Symbol" pitchFamily="18" charset="2"/>
               </a:rPr>
               <a:t>(</a:t>
             </a:r>
             <a:r>
-              <a:rPr lang="en-US" altLang="ja-JP" sz="2800" dirty="0" err="1" smtClean="0">
+              <a:rPr lang="en-US" altLang="ja-JP" sz="2800" dirty="0" err="1">
                 <a:sym typeface="Symbol" pitchFamily="18" charset="2"/>
               </a:rPr>
               <a:t>λz</a:t>
             </a:r>
             <a:r>
-              <a:rPr lang="en-US" altLang="ja-JP" sz="2800" dirty="0" smtClean="0">
+              <a:rPr lang="en-US" altLang="ja-JP" sz="2800" dirty="0">
                 <a:sym typeface="Symbol" pitchFamily="18" charset="2"/>
               </a:rPr>
               <a:t>. z y) ((</a:t>
             </a:r>
             <a:r>
-              <a:rPr lang="en-US" altLang="ja-JP" sz="2800" dirty="0" err="1" smtClean="0">
+              <a:rPr lang="en-US" altLang="ja-JP" sz="2800" dirty="0" err="1">
                 <a:sym typeface="Symbol" pitchFamily="18" charset="2"/>
               </a:rPr>
               <a:t>λz</a:t>
             </a:r>
             <a:r>
-              <a:rPr lang="en-US" altLang="ja-JP" sz="2800" dirty="0" smtClean="0">
+              <a:rPr lang="en-US" altLang="ja-JP" sz="2800" dirty="0">
                 <a:sym typeface="Symbol" pitchFamily="18" charset="2"/>
               </a:rPr>
               <a:t>. z) w) </a:t>
             </a:r>
             <a:r>
-              <a:rPr lang="ja-JP" altLang="en-US" sz="2800" dirty="0" smtClean="0">
+              <a:rPr lang="ja-JP" altLang="en-US" sz="2800" dirty="0">
                 <a:sym typeface="Symbol" pitchFamily="18" charset="2"/>
               </a:rPr>
               <a:t>中の自由変数を求めよ。</a:t>
             </a:r>
-            <a:endParaRPr lang="en-US" altLang="ja-JP" sz="2800" dirty="0" smtClean="0">
+            <a:endParaRPr lang="en-US" altLang="ja-JP" sz="2800" dirty="0">
               <a:sym typeface="Symbol" pitchFamily="18" charset="2"/>
             </a:endParaRPr>
           </a:p>
@@ -8372,7 +8220,7 @@
               <a:defRPr/>
             </a:pPr>
             <a:r>
-              <a:rPr kumimoji="1" lang="ja-JP" altLang="en-US" sz="4400" b="0" i="0" u="none" strike="noStrike" kern="1200" cap="none" spc="0" normalizeH="0" baseline="0" noProof="0" dirty="0" smtClean="0">
+              <a:rPr kumimoji="1" lang="ja-JP" altLang="en-US" sz="4400" b="0" i="0" u="none" strike="noStrike" kern="1200" cap="none" spc="0" normalizeH="0" baseline="0" noProof="0" dirty="0">
                 <a:ln>
                   <a:noFill/>
                 </a:ln>
@@ -8415,60 +8263,48 @@
           <a:lstStyle/>
           <a:p>
             <a:r>
-              <a:rPr kumimoji="1" lang="ja-JP" altLang="en-US" sz="2800" dirty="0" smtClean="0">
+              <a:rPr kumimoji="1" lang="ja-JP" altLang="en-US" sz="2800" dirty="0">
                 <a:sym typeface="Symbol" pitchFamily="18" charset="2"/>
               </a:rPr>
               <a:t>（問１） 置換</a:t>
             </a:r>
             <a:r>
-              <a:rPr lang="en-US" altLang="ja-JP" sz="2800" dirty="0" smtClean="0">
+              <a:rPr lang="en-US" altLang="ja-JP" sz="2800" dirty="0">
                 <a:sym typeface="Symbol" pitchFamily="18" charset="2"/>
               </a:rPr>
               <a:t> (x y) [z/x] </a:t>
             </a:r>
             <a:r>
-              <a:rPr lang="ja-JP" altLang="en-US" sz="2800" dirty="0" smtClean="0">
-                <a:sym typeface="Symbol" pitchFamily="18" charset="2"/>
-              </a:rPr>
-              <a:t>を</a:t>
-            </a:r>
-            <a:r>
-              <a:rPr lang="ja-JP" altLang="en-US" sz="2800" dirty="0" smtClean="0">
-                <a:sym typeface="Symbol" pitchFamily="18" charset="2"/>
-              </a:rPr>
-              <a:t>求めよ</a:t>
-            </a:r>
-            <a:r>
-              <a:rPr lang="ja-JP" altLang="en-US" sz="2800" dirty="0" smtClean="0">
-                <a:sym typeface="Symbol" pitchFamily="18" charset="2"/>
-              </a:rPr>
-              <a:t>。</a:t>
-            </a:r>
-            <a:endParaRPr kumimoji="1" lang="en-US" altLang="ja-JP" sz="2800" dirty="0" smtClean="0">
+              <a:rPr lang="ja-JP" altLang="en-US" sz="2800" dirty="0">
+                <a:sym typeface="Symbol" pitchFamily="18" charset="2"/>
+              </a:rPr>
+              <a:t>を求めよ。</a:t>
+            </a:r>
+            <a:endParaRPr kumimoji="1" lang="en-US" altLang="ja-JP" sz="2800" dirty="0">
               <a:sym typeface="Symbol" pitchFamily="18" charset="2"/>
             </a:endParaRPr>
           </a:p>
           <a:p>
             <a:r>
-              <a:rPr lang="ja-JP" altLang="en-US" sz="2800" dirty="0" smtClean="0">
+              <a:rPr lang="ja-JP" altLang="en-US" sz="2800" dirty="0">
                 <a:sym typeface="Symbol" pitchFamily="18" charset="2"/>
               </a:rPr>
               <a:t>（問２） 置換 </a:t>
             </a:r>
             <a:r>
-              <a:rPr lang="en-US" altLang="ja-JP" sz="2800" dirty="0" smtClean="0">
+              <a:rPr lang="en-US" altLang="ja-JP" sz="2800" dirty="0">
                 <a:sym typeface="Symbol" pitchFamily="18" charset="2"/>
               </a:rPr>
               <a:t>(</a:t>
             </a:r>
             <a:r>
-              <a:rPr lang="en-US" altLang="ja-JP" sz="2800" dirty="0" err="1" smtClean="0">
+              <a:rPr lang="en-US" altLang="ja-JP" sz="2800" dirty="0" err="1">
                 <a:sym typeface="Symbol" pitchFamily="18" charset="2"/>
               </a:rPr>
               <a:t>λy</a:t>
             </a:r>
             <a:r>
-              <a:rPr lang="en-US" altLang="ja-JP" sz="2800" dirty="0" smtClean="0">
+              <a:rPr lang="en-US" altLang="ja-JP" sz="2800" dirty="0">
                 <a:sym typeface="Symbol" pitchFamily="18" charset="2"/>
               </a:rPr>
               <a:t>. x y) [z/x] </a:t>
@@ -8479,31 +8315,31 @@
               </a:rPr>
               <a:t>を求めよ。</a:t>
             </a:r>
-            <a:endParaRPr lang="en-US" altLang="ja-JP" sz="2800" dirty="0" smtClean="0">
+            <a:endParaRPr lang="en-US" altLang="ja-JP" sz="2800" dirty="0">
               <a:sym typeface="Symbol" pitchFamily="18" charset="2"/>
             </a:endParaRPr>
           </a:p>
           <a:p>
             <a:r>
-              <a:rPr lang="ja-JP" altLang="en-US" sz="2800" dirty="0" smtClean="0">
+              <a:rPr lang="ja-JP" altLang="en-US" sz="2800" dirty="0">
                 <a:sym typeface="Symbol" pitchFamily="18" charset="2"/>
               </a:rPr>
               <a:t>（問３） 置換 </a:t>
             </a:r>
             <a:r>
-              <a:rPr lang="en-US" altLang="ja-JP" sz="2800" dirty="0" smtClean="0">
+              <a:rPr lang="en-US" altLang="ja-JP" sz="2800" dirty="0">
                 <a:sym typeface="Symbol" pitchFamily="18" charset="2"/>
               </a:rPr>
               <a:t>(</a:t>
             </a:r>
             <a:r>
-              <a:rPr lang="en-US" altLang="ja-JP" sz="2800" dirty="0" err="1" smtClean="0">
+              <a:rPr lang="en-US" altLang="ja-JP" sz="2800" dirty="0" err="1">
                 <a:sym typeface="Symbol" pitchFamily="18" charset="2"/>
               </a:rPr>
               <a:t>λy</a:t>
             </a:r>
             <a:r>
-              <a:rPr lang="en-US" altLang="ja-JP" sz="2800" dirty="0" smtClean="0">
+              <a:rPr lang="en-US" altLang="ja-JP" sz="2800" dirty="0">
                 <a:sym typeface="Symbol" pitchFamily="18" charset="2"/>
               </a:rPr>
               <a:t>. x y) [y/x] </a:t>
@@ -8514,43 +8350,43 @@
               </a:rPr>
               <a:t>を求めよ。</a:t>
             </a:r>
-            <a:endParaRPr lang="en-US" altLang="ja-JP" sz="2800" dirty="0" smtClean="0">
+            <a:endParaRPr lang="en-US" altLang="ja-JP" sz="2800" dirty="0">
               <a:sym typeface="Symbol" pitchFamily="18" charset="2"/>
             </a:endParaRPr>
           </a:p>
           <a:p>
             <a:r>
-              <a:rPr lang="ja-JP" altLang="en-US" sz="2800" dirty="0" smtClean="0">
+              <a:rPr lang="ja-JP" altLang="en-US" sz="2800" dirty="0">
                 <a:sym typeface="Symbol" pitchFamily="18" charset="2"/>
               </a:rPr>
               <a:t>（問４） 置換</a:t>
             </a:r>
             <a:r>
-              <a:rPr lang="en-US" altLang="ja-JP" sz="2800" dirty="0" smtClean="0">
+              <a:rPr lang="en-US" altLang="ja-JP" sz="2800" dirty="0">
                 <a:sym typeface="Symbol" pitchFamily="18" charset="2"/>
               </a:rPr>
               <a:t> (</a:t>
             </a:r>
             <a:r>
-              <a:rPr lang="en-US" altLang="ja-JP" sz="2800" dirty="0" err="1" smtClean="0">
+              <a:rPr lang="en-US" altLang="ja-JP" sz="2800" dirty="0" err="1">
                 <a:sym typeface="Symbol" pitchFamily="18" charset="2"/>
               </a:rPr>
               <a:t>λy</a:t>
             </a:r>
             <a:r>
-              <a:rPr lang="en-US" altLang="ja-JP" sz="2800" dirty="0" smtClean="0">
+              <a:rPr lang="en-US" altLang="ja-JP" sz="2800" dirty="0">
                 <a:sym typeface="Symbol" pitchFamily="18" charset="2"/>
               </a:rPr>
               <a:t>. x y) [</a:t>
             </a:r>
             <a:r>
-              <a:rPr lang="en-US" altLang="ja-JP" sz="2800" dirty="0" err="1" smtClean="0">
+              <a:rPr lang="en-US" altLang="ja-JP" sz="2800" dirty="0" err="1">
                 <a:sym typeface="Symbol" pitchFamily="18" charset="2"/>
               </a:rPr>
               <a:t>λz</a:t>
             </a:r>
             <a:r>
-              <a:rPr lang="en-US" altLang="ja-JP" sz="2800" dirty="0" smtClean="0">
+              <a:rPr lang="en-US" altLang="ja-JP" sz="2800" dirty="0">
                 <a:sym typeface="Symbol" pitchFamily="18" charset="2"/>
               </a:rPr>
               <a:t>. z y/x] </a:t>
@@ -8561,7 +8397,7 @@
               </a:rPr>
               <a:t>を求めよ。</a:t>
             </a:r>
-            <a:endParaRPr lang="en-US" altLang="ja-JP" sz="2800" dirty="0" smtClean="0">
+            <a:endParaRPr lang="en-US" altLang="ja-JP" sz="2800" dirty="0">
               <a:sym typeface="Symbol" pitchFamily="18" charset="2"/>
             </a:endParaRPr>
           </a:p>
@@ -8633,7 +8469,7 @@
               <a:defRPr/>
             </a:pPr>
             <a:r>
-              <a:rPr kumimoji="1" lang="ja-JP" altLang="en-US" sz="4400" b="0" i="0" u="none" strike="noStrike" kern="1200" cap="none" spc="0" normalizeH="0" baseline="0" noProof="0" dirty="0" smtClean="0">
+              <a:rPr kumimoji="1" lang="ja-JP" altLang="en-US" sz="4400" b="0" i="0" u="none" strike="noStrike" kern="1200" cap="none" spc="0" normalizeH="0" baseline="0" noProof="0" dirty="0">
                 <a:ln>
                   <a:noFill/>
                 </a:ln>
@@ -8676,223 +8512,187 @@
           <a:lstStyle/>
           <a:p>
             <a:r>
-              <a:rPr kumimoji="1" lang="ja-JP" altLang="en-US" sz="2800" dirty="0" smtClean="0"/>
+              <a:rPr kumimoji="1" lang="ja-JP" altLang="en-US" sz="2800" dirty="0"/>
               <a:t>（問１） ラムダ式 </a:t>
             </a:r>
             <a:r>
-              <a:rPr lang="en-US" altLang="ja-JP" sz="2800" dirty="0" smtClean="0">
+              <a:rPr lang="en-US" altLang="ja-JP" sz="2800" dirty="0">
                 <a:sym typeface="Symbol" pitchFamily="18" charset="2"/>
               </a:rPr>
               <a:t>(</a:t>
             </a:r>
             <a:r>
-              <a:rPr lang="en-US" altLang="ja-JP" sz="2800" dirty="0" err="1" smtClean="0">
+              <a:rPr lang="en-US" altLang="ja-JP" sz="2800" dirty="0" err="1">
                 <a:sym typeface="Symbol" pitchFamily="18" charset="2"/>
               </a:rPr>
               <a:t>λx</a:t>
             </a:r>
             <a:r>
-              <a:rPr lang="en-US" altLang="ja-JP" sz="2800" dirty="0" smtClean="0">
+              <a:rPr lang="en-US" altLang="ja-JP" sz="2800" dirty="0">
                 <a:sym typeface="Symbol" pitchFamily="18" charset="2"/>
               </a:rPr>
               <a:t>. x</a:t>
             </a:r>
             <a:r>
-              <a:rPr lang="ja-JP" altLang="en-US" sz="2800" dirty="0" smtClean="0">
+              <a:rPr lang="ja-JP" altLang="en-US" sz="2800" dirty="0">
                 <a:sym typeface="Symbol" pitchFamily="18" charset="2"/>
               </a:rPr>
               <a:t> </a:t>
             </a:r>
             <a:r>
-              <a:rPr lang="en-US" altLang="ja-JP" sz="2800" dirty="0" smtClean="0">
+              <a:rPr lang="en-US" altLang="ja-JP" sz="2800" dirty="0">
                 <a:sym typeface="Symbol" pitchFamily="18" charset="2"/>
               </a:rPr>
               <a:t>y) (</a:t>
             </a:r>
             <a:r>
-              <a:rPr lang="en-US" altLang="ja-JP" sz="2800" dirty="0" err="1" smtClean="0">
+              <a:rPr lang="en-US" altLang="ja-JP" sz="2800" dirty="0" err="1">
                 <a:sym typeface="Symbol" pitchFamily="18" charset="2"/>
               </a:rPr>
               <a:t>λz</a:t>
             </a:r>
             <a:r>
-              <a:rPr lang="en-US" altLang="ja-JP" sz="2800" dirty="0" smtClean="0">
+              <a:rPr lang="en-US" altLang="ja-JP" sz="2800" dirty="0">
                 <a:sym typeface="Symbol" pitchFamily="18" charset="2"/>
               </a:rPr>
               <a:t>. z) </a:t>
             </a:r>
             <a:r>
-              <a:rPr lang="ja-JP" altLang="en-US" sz="2800" dirty="0" smtClean="0">
+              <a:rPr lang="ja-JP" altLang="en-US" sz="2800" dirty="0">
                 <a:sym typeface="Symbol" pitchFamily="18" charset="2"/>
               </a:rPr>
               <a:t>に</a:t>
             </a:r>
             <a:r>
-              <a:rPr lang="en-US" altLang="ja-JP" sz="2800" dirty="0" smtClean="0">
+              <a:rPr lang="en-US" altLang="ja-JP" sz="2800" dirty="0">
                 <a:sym typeface="Symbol" pitchFamily="18" charset="2"/>
               </a:rPr>
               <a:t>β</a:t>
             </a:r>
             <a:r>
-              <a:rPr lang="ja-JP" altLang="en-US" sz="2800" dirty="0" smtClean="0">
-                <a:sym typeface="Symbol" pitchFamily="18" charset="2"/>
-              </a:rPr>
-              <a:t>変換</a:t>
-            </a:r>
-            <a:r>
-              <a:rPr lang="ja-JP" altLang="en-US" sz="2800" dirty="0" smtClean="0">
-                <a:sym typeface="Symbol" pitchFamily="18" charset="2"/>
-              </a:rPr>
-              <a:t>を</a:t>
-            </a:r>
-            <a:r>
-              <a:rPr lang="en-US" altLang="ja-JP" sz="2800" dirty="0" smtClean="0">
+              <a:rPr lang="ja-JP" altLang="en-US" sz="2800" dirty="0">
+                <a:sym typeface="Symbol" pitchFamily="18" charset="2"/>
+              </a:rPr>
+              <a:t>変換を</a:t>
+            </a:r>
+            <a:r>
+              <a:rPr lang="en-US" altLang="ja-JP" sz="2800" dirty="0">
                 <a:sym typeface="Symbol" pitchFamily="18" charset="2"/>
               </a:rPr>
               <a:t>1</a:t>
             </a:r>
             <a:r>
-              <a:rPr lang="ja-JP" altLang="en-US" sz="2800" dirty="0" smtClean="0">
-                <a:sym typeface="Symbol" pitchFamily="18" charset="2"/>
-              </a:rPr>
-              <a:t>回</a:t>
-            </a:r>
-            <a:r>
-              <a:rPr lang="ja-JP" altLang="en-US" sz="2800" dirty="0" smtClean="0">
-                <a:sym typeface="Symbol" pitchFamily="18" charset="2"/>
-              </a:rPr>
-              <a:t>適用</a:t>
-            </a:r>
-            <a:r>
-              <a:rPr lang="ja-JP" altLang="en-US" sz="2800" dirty="0" smtClean="0">
-                <a:sym typeface="Symbol" pitchFamily="18" charset="2"/>
-              </a:rPr>
-              <a:t>せよ。</a:t>
-            </a:r>
-            <a:endParaRPr lang="en-US" altLang="ja-JP" sz="2800" dirty="0" smtClean="0">
+              <a:rPr lang="ja-JP" altLang="en-US" sz="2800" dirty="0">
+                <a:sym typeface="Symbol" pitchFamily="18" charset="2"/>
+              </a:rPr>
+              <a:t>回適用せよ。</a:t>
+            </a:r>
+            <a:endParaRPr lang="en-US" altLang="ja-JP" sz="2800" dirty="0">
               <a:sym typeface="Symbol" pitchFamily="18" charset="2"/>
             </a:endParaRPr>
           </a:p>
           <a:p>
             <a:r>
-              <a:rPr kumimoji="1" lang="ja-JP" altLang="en-US" sz="2800" dirty="0" smtClean="0">
+              <a:rPr kumimoji="1" lang="ja-JP" altLang="en-US" sz="2800" dirty="0">
                 <a:sym typeface="Symbol" pitchFamily="18" charset="2"/>
               </a:rPr>
               <a:t>（問２） ラムダ式 </a:t>
             </a:r>
             <a:r>
-              <a:rPr lang="en-US" altLang="ja-JP" sz="2800" dirty="0" smtClean="0">
+              <a:rPr lang="en-US" altLang="ja-JP" sz="2800" dirty="0">
                 <a:sym typeface="Symbol" pitchFamily="18" charset="2"/>
               </a:rPr>
               <a:t>(</a:t>
             </a:r>
             <a:r>
-              <a:rPr kumimoji="1" lang="en-US" altLang="ja-JP" sz="2800" dirty="0" err="1" smtClean="0">
+              <a:rPr kumimoji="1" lang="en-US" altLang="ja-JP" sz="2800" dirty="0" err="1">
                 <a:sym typeface="Symbol" pitchFamily="18" charset="2"/>
               </a:rPr>
               <a:t>λx</a:t>
             </a:r>
             <a:r>
-              <a:rPr kumimoji="1" lang="en-US" altLang="ja-JP" sz="2800" dirty="0" smtClean="0">
+              <a:rPr kumimoji="1" lang="en-US" altLang="ja-JP" sz="2800" dirty="0">
                 <a:sym typeface="Symbol" pitchFamily="18" charset="2"/>
               </a:rPr>
               <a:t>. (</a:t>
             </a:r>
             <a:r>
-              <a:rPr kumimoji="1" lang="en-US" altLang="ja-JP" sz="2800" dirty="0" err="1" smtClean="0">
+              <a:rPr kumimoji="1" lang="en-US" altLang="ja-JP" sz="2800" dirty="0" err="1">
                 <a:sym typeface="Symbol" pitchFamily="18" charset="2"/>
               </a:rPr>
               <a:t>λy</a:t>
             </a:r>
             <a:r>
-              <a:rPr kumimoji="1" lang="en-US" altLang="ja-JP" sz="2800" dirty="0" smtClean="0">
+              <a:rPr kumimoji="1" lang="en-US" altLang="ja-JP" sz="2800" dirty="0">
                 <a:sym typeface="Symbol" pitchFamily="18" charset="2"/>
               </a:rPr>
               <a:t>. x </a:t>
             </a:r>
             <a:r>
-              <a:rPr lang="en-US" altLang="ja-JP" sz="2800" dirty="0" smtClean="0">
+              <a:rPr lang="en-US" altLang="ja-JP" sz="2800" dirty="0">
                 <a:sym typeface="Symbol" pitchFamily="18" charset="2"/>
               </a:rPr>
               <a:t>y</a:t>
             </a:r>
             <a:r>
-              <a:rPr kumimoji="1" lang="en-US" altLang="ja-JP" sz="2800" dirty="0" smtClean="0">
+              <a:rPr kumimoji="1" lang="en-US" altLang="ja-JP" sz="2800" dirty="0">
                 <a:sym typeface="Symbol" pitchFamily="18" charset="2"/>
               </a:rPr>
               <a:t>)) (</a:t>
             </a:r>
             <a:r>
-              <a:rPr kumimoji="1" lang="en-US" altLang="ja-JP" sz="2800" dirty="0" err="1" smtClean="0">
+              <a:rPr kumimoji="1" lang="en-US" altLang="ja-JP" sz="2800" dirty="0" err="1">
                 <a:sym typeface="Symbol" pitchFamily="18" charset="2"/>
               </a:rPr>
               <a:t>λz</a:t>
             </a:r>
             <a:r>
-              <a:rPr kumimoji="1" lang="en-US" altLang="ja-JP" sz="2800" dirty="0" smtClean="0">
+              <a:rPr kumimoji="1" lang="en-US" altLang="ja-JP" sz="2800" dirty="0">
                 <a:sym typeface="Symbol" pitchFamily="18" charset="2"/>
               </a:rPr>
               <a:t>. </a:t>
             </a:r>
             <a:r>
-              <a:rPr lang="en-US" altLang="ja-JP" sz="2800" dirty="0" smtClean="0">
+              <a:rPr lang="en-US" altLang="ja-JP" sz="2800" dirty="0">
                 <a:sym typeface="Symbol" pitchFamily="18" charset="2"/>
               </a:rPr>
               <a:t>y z</a:t>
             </a:r>
             <a:r>
-              <a:rPr kumimoji="1" lang="en-US" altLang="ja-JP" sz="2800" dirty="0" smtClean="0">
+              <a:rPr kumimoji="1" lang="en-US" altLang="ja-JP" sz="2800" dirty="0">
                 <a:sym typeface="Symbol" pitchFamily="18" charset="2"/>
               </a:rPr>
               <a:t>) </a:t>
             </a:r>
             <a:r>
-              <a:rPr kumimoji="1" lang="ja-JP" altLang="en-US" sz="2800" dirty="0" smtClean="0">
+              <a:rPr kumimoji="1" lang="ja-JP" altLang="en-US" sz="2800" dirty="0">
                 <a:sym typeface="Symbol" pitchFamily="18" charset="2"/>
               </a:rPr>
               <a:t>に</a:t>
             </a:r>
             <a:r>
-              <a:rPr kumimoji="1" lang="en-US" altLang="ja-JP" sz="2800" dirty="0" smtClean="0">
+              <a:rPr kumimoji="1" lang="en-US" altLang="ja-JP" sz="2800" dirty="0">
                 <a:sym typeface="Symbol" pitchFamily="18" charset="2"/>
               </a:rPr>
               <a:t>β</a:t>
             </a:r>
             <a:r>
-              <a:rPr kumimoji="1" lang="ja-JP" altLang="en-US" sz="2800" dirty="0" smtClean="0">
-                <a:sym typeface="Symbol" pitchFamily="18" charset="2"/>
-              </a:rPr>
-              <a:t>変換</a:t>
-            </a:r>
-            <a:r>
-              <a:rPr kumimoji="1" lang="ja-JP" altLang="en-US" sz="2800" dirty="0" smtClean="0">
-                <a:sym typeface="Symbol" pitchFamily="18" charset="2"/>
-              </a:rPr>
-              <a:t>を</a:t>
-            </a:r>
-            <a:r>
-              <a:rPr kumimoji="1" lang="en-US" altLang="ja-JP" sz="2800" dirty="0" smtClean="0">
+              <a:rPr kumimoji="1" lang="ja-JP" altLang="en-US" sz="2800" dirty="0">
+                <a:sym typeface="Symbol" pitchFamily="18" charset="2"/>
+              </a:rPr>
+              <a:t>変換を</a:t>
+            </a:r>
+            <a:r>
+              <a:rPr kumimoji="1" lang="en-US" altLang="ja-JP" sz="2800" dirty="0">
                 <a:sym typeface="Symbol" pitchFamily="18" charset="2"/>
               </a:rPr>
               <a:t>1</a:t>
             </a:r>
             <a:r>
-              <a:rPr kumimoji="1" lang="ja-JP" altLang="en-US" sz="2800" dirty="0" smtClean="0">
-                <a:sym typeface="Symbol" pitchFamily="18" charset="2"/>
-              </a:rPr>
-              <a:t>回</a:t>
-            </a:r>
-            <a:r>
-              <a:rPr kumimoji="1" lang="ja-JP" altLang="en-US" sz="2800" dirty="0" smtClean="0">
-                <a:sym typeface="Symbol" pitchFamily="18" charset="2"/>
-              </a:rPr>
-              <a:t>適用</a:t>
-            </a:r>
-            <a:r>
-              <a:rPr kumimoji="1" lang="ja-JP" altLang="en-US" sz="2800" dirty="0" smtClean="0">
-                <a:sym typeface="Symbol" pitchFamily="18" charset="2"/>
-              </a:rPr>
-              <a:t>せよ。</a:t>
+              <a:rPr kumimoji="1" lang="ja-JP" altLang="en-US" sz="2800" dirty="0">
+                <a:sym typeface="Symbol" pitchFamily="18" charset="2"/>
+              </a:rPr>
+              <a:t>回適用せよ。</a:t>
             </a:r>
             <a:endParaRPr kumimoji="1" lang="ja-JP" altLang="en-US" sz="2800" dirty="0"/>
           </a:p>
@@ -8939,7 +8739,7 @@
           <a:lstStyle/>
           <a:p>
             <a:r>
-              <a:rPr lang="ja-JP" altLang="en-US" dirty="0" smtClean="0">
+              <a:rPr lang="ja-JP" altLang="en-US" dirty="0">
                 <a:sym typeface="Symbol" pitchFamily="18" charset="2"/>
               </a:rPr>
               <a:t>変換列</a:t>
@@ -8969,95 +8769,95 @@
           <a:lstStyle/>
           <a:p>
             <a:r>
-              <a:rPr lang="ja-JP" altLang="en-US" sz="2800" dirty="0" smtClean="0"/>
+              <a:rPr lang="ja-JP" altLang="en-US" sz="2800" dirty="0"/>
               <a:t>ラムダ式</a:t>
             </a:r>
             <a:r>
-              <a:rPr lang="en-US" altLang="ja-JP" sz="2800" i="1" dirty="0" smtClean="0"/>
+              <a:rPr lang="en-US" altLang="ja-JP" sz="2800" i="1" dirty="0"/>
               <a:t>M</a:t>
             </a:r>
             <a:r>
-              <a:rPr lang="en-US" altLang="ja-JP" sz="2800" baseline="-25000" dirty="0" smtClean="0"/>
+              <a:rPr lang="en-US" altLang="ja-JP" sz="2800" baseline="-25000" dirty="0"/>
               <a:t>1</a:t>
             </a:r>
             <a:r>
-              <a:rPr lang="ja-JP" altLang="en-US" sz="2800" dirty="0" smtClean="0"/>
+              <a:rPr lang="ja-JP" altLang="en-US" sz="2800" dirty="0"/>
               <a:t>に</a:t>
             </a:r>
             <a:r>
-              <a:rPr lang="en-US" altLang="ja-JP" sz="2800" dirty="0" smtClean="0"/>
+              <a:rPr lang="en-US" altLang="ja-JP" sz="2800" dirty="0"/>
               <a:t>β</a:t>
             </a:r>
             <a:r>
-              <a:rPr lang="ja-JP" altLang="en-US" sz="2800" dirty="0" smtClean="0"/>
+              <a:rPr lang="ja-JP" altLang="en-US" sz="2800" dirty="0"/>
               <a:t>変換を有限回（</a:t>
             </a:r>
             <a:r>
-              <a:rPr lang="en-US" altLang="ja-JP" sz="2800" dirty="0" smtClean="0"/>
+              <a:rPr lang="en-US" altLang="ja-JP" sz="2800" dirty="0"/>
               <a:t>0</a:t>
             </a:r>
             <a:r>
-              <a:rPr lang="ja-JP" altLang="en-US" sz="2800" dirty="0" smtClean="0"/>
+              <a:rPr lang="ja-JP" altLang="en-US" sz="2800" dirty="0"/>
               <a:t>回以上）繰り返してラムダ式</a:t>
             </a:r>
             <a:r>
-              <a:rPr lang="en-US" altLang="ja-JP" sz="2800" i="1" dirty="0" smtClean="0"/>
+              <a:rPr lang="en-US" altLang="ja-JP" sz="2800" i="1" dirty="0"/>
               <a:t>M</a:t>
             </a:r>
             <a:r>
-              <a:rPr lang="en-US" altLang="ja-JP" sz="2800" i="1" baseline="-25000" dirty="0" smtClean="0"/>
+              <a:rPr lang="en-US" altLang="ja-JP" sz="2800" i="1" baseline="-25000" dirty="0"/>
               <a:t>n</a:t>
             </a:r>
             <a:r>
-              <a:rPr lang="ja-JP" altLang="en-US" sz="2800" dirty="0" smtClean="0"/>
+              <a:rPr lang="ja-JP" altLang="en-US" sz="2800" dirty="0"/>
               <a:t>が得られるとき、</a:t>
             </a:r>
           </a:p>
           <a:p>
             <a:r>
-              <a:rPr lang="en-US" altLang="ja-JP" sz="2800" i="1" dirty="0" smtClean="0">
+              <a:rPr lang="en-US" altLang="ja-JP" sz="2800" i="1" dirty="0">
                 <a:sym typeface="Symbol" pitchFamily="18" charset="2"/>
               </a:rPr>
               <a:t>M</a:t>
             </a:r>
             <a:r>
-              <a:rPr lang="en-US" altLang="ja-JP" sz="2800" baseline="-25000" dirty="0" smtClean="0">
+              <a:rPr lang="en-US" altLang="ja-JP" sz="2800" baseline="-25000" dirty="0">
                 <a:sym typeface="Symbol" pitchFamily="18" charset="2"/>
               </a:rPr>
               <a:t>1</a:t>
             </a:r>
             <a:r>
-              <a:rPr lang="en-US" altLang="ja-JP" sz="2800" dirty="0" smtClean="0">
+              <a:rPr lang="en-US" altLang="ja-JP" sz="2800" dirty="0">
                 <a:sym typeface="Symbol" pitchFamily="18" charset="2"/>
               </a:rPr>
               <a:t>  </a:t>
             </a:r>
             <a:r>
-              <a:rPr lang="en-US" altLang="ja-JP" sz="2800" i="1" dirty="0" smtClean="0">
+              <a:rPr lang="en-US" altLang="ja-JP" sz="2800" i="1" dirty="0">
                 <a:sym typeface="Symbol" pitchFamily="18" charset="2"/>
               </a:rPr>
               <a:t>M</a:t>
             </a:r>
             <a:r>
-              <a:rPr lang="en-US" altLang="ja-JP" sz="2800" baseline="-25000" dirty="0" smtClean="0">
+              <a:rPr lang="en-US" altLang="ja-JP" sz="2800" baseline="-25000" dirty="0">
                 <a:sym typeface="Symbol" pitchFamily="18" charset="2"/>
               </a:rPr>
               <a:t>2</a:t>
             </a:r>
             <a:r>
-              <a:rPr lang="en-US" altLang="ja-JP" sz="2800" dirty="0" smtClean="0">
+              <a:rPr lang="en-US" altLang="ja-JP" sz="2800" dirty="0">
                 <a:sym typeface="Symbol" pitchFamily="18" charset="2"/>
               </a:rPr>
               <a:t>  …  </a:t>
             </a:r>
             <a:r>
-              <a:rPr lang="en-US" altLang="ja-JP" sz="2800" i="1" dirty="0" smtClean="0">
+              <a:rPr lang="en-US" altLang="ja-JP" sz="2800" i="1" dirty="0">
                 <a:sym typeface="Symbol" pitchFamily="18" charset="2"/>
               </a:rPr>
               <a:t>M</a:t>
             </a:r>
             <a:r>
-              <a:rPr lang="en-US" altLang="ja-JP" sz="2800" i="1" baseline="-25000" dirty="0" smtClean="0">
+              <a:rPr lang="en-US" altLang="ja-JP" sz="2800" i="1" baseline="-25000" dirty="0">
                 <a:sym typeface="Symbol" pitchFamily="18" charset="2"/>
               </a:rPr>
               <a:t>n</a:t>
@@ -9065,152 +8865,151 @@
           </a:p>
           <a:p>
             <a:r>
-              <a:rPr lang="ja-JP" altLang="en-US" sz="2800" dirty="0" smtClean="0"/>
+              <a:rPr lang="ja-JP" altLang="en-US" sz="2800" dirty="0"/>
               <a:t>を</a:t>
             </a:r>
             <a:r>
-              <a:rPr lang="en-US" altLang="ja-JP" sz="2800" dirty="0" smtClean="0"/>
+              <a:rPr lang="en-US" altLang="ja-JP" sz="2800" dirty="0"/>
               <a:t>β</a:t>
             </a:r>
             <a:r>
-              <a:rPr lang="ja-JP" altLang="en-US" sz="2800" dirty="0" smtClean="0"/>
+              <a:rPr lang="ja-JP" altLang="en-US" sz="2800" dirty="0"/>
               <a:t>変換列という。（これは</a:t>
             </a:r>
             <a:r>
-              <a:rPr lang="en-US" altLang="ja-JP" sz="2800" i="1" dirty="0" smtClean="0">
+              <a:rPr lang="en-US" altLang="ja-JP" sz="2800" i="1" dirty="0">
                 <a:sym typeface="Symbol" pitchFamily="18" charset="2"/>
               </a:rPr>
               <a:t>M</a:t>
             </a:r>
             <a:r>
-              <a:rPr lang="en-US" altLang="ja-JP" sz="2800" baseline="-25000" dirty="0" smtClean="0">
+              <a:rPr lang="en-US" altLang="ja-JP" sz="2800" baseline="-25000" dirty="0">
                 <a:sym typeface="Symbol" pitchFamily="18" charset="2"/>
               </a:rPr>
               <a:t>1</a:t>
             </a:r>
             <a:r>
-              <a:rPr lang="en-US" altLang="ja-JP" sz="2800" dirty="0" smtClean="0">
+              <a:rPr lang="en-US" altLang="ja-JP" sz="2800" dirty="0">
                 <a:sym typeface="Symbol" pitchFamily="18" charset="2"/>
               </a:rPr>
               <a:t>  *  </a:t>
             </a:r>
             <a:r>
-              <a:rPr lang="en-US" altLang="ja-JP" sz="2800" i="1" dirty="0" smtClean="0">
+              <a:rPr lang="en-US" altLang="ja-JP" sz="2800" i="1" dirty="0">
                 <a:sym typeface="Symbol" pitchFamily="18" charset="2"/>
               </a:rPr>
               <a:t>M</a:t>
             </a:r>
             <a:r>
-              <a:rPr lang="en-US" altLang="ja-JP" sz="2800" i="1" baseline="-25000" dirty="0" smtClean="0">
+              <a:rPr lang="en-US" altLang="ja-JP" sz="2800" i="1" baseline="-25000" dirty="0">
                 <a:sym typeface="Symbol" pitchFamily="18" charset="2"/>
               </a:rPr>
               <a:t>n </a:t>
             </a:r>
             <a:r>
-              <a:rPr lang="ja-JP" altLang="en-US" sz="2800" baseline="-25000" dirty="0" smtClean="0">
+              <a:rPr lang="ja-JP" altLang="en-US" sz="2800" baseline="-25000" dirty="0">
                 <a:sym typeface="Symbol" pitchFamily="18" charset="2"/>
               </a:rPr>
               <a:t> </a:t>
             </a:r>
             <a:r>
-              <a:rPr lang="ja-JP" altLang="en-US" sz="2800" dirty="0" smtClean="0"/>
+              <a:rPr lang="ja-JP" altLang="en-US" sz="2800" dirty="0"/>
               <a:t>と書いてもよい。）</a:t>
             </a:r>
           </a:p>
           <a:p>
             <a:r>
-              <a:rPr lang="ja-JP" altLang="en-US" sz="2800" dirty="0" smtClean="0"/>
+              <a:rPr lang="ja-JP" altLang="en-US" sz="2800" dirty="0"/>
               <a:t>また、</a:t>
             </a:r>
             <a:r>
-              <a:rPr lang="en-US" altLang="ja-JP" sz="2800" i="1" dirty="0" smtClean="0">
+              <a:rPr lang="en-US" altLang="ja-JP" sz="2800" i="1" dirty="0">
                 <a:sym typeface="Symbol" pitchFamily="18" charset="2"/>
               </a:rPr>
               <a:t> M</a:t>
             </a:r>
             <a:r>
-              <a:rPr lang="en-US" altLang="ja-JP" sz="2800" dirty="0" smtClean="0">
+              <a:rPr lang="en-US" altLang="ja-JP" sz="2800" dirty="0">
                 <a:sym typeface="Symbol" pitchFamily="18" charset="2"/>
               </a:rPr>
               <a:t>  </a:t>
             </a:r>
             <a:r>
-              <a:rPr lang="en-US" altLang="ja-JP" sz="2800" i="1" dirty="0" smtClean="0">
+              <a:rPr lang="en-US" altLang="ja-JP" sz="2800" i="1" dirty="0">
                 <a:sym typeface="Symbol" pitchFamily="18" charset="2"/>
               </a:rPr>
               <a:t>N</a:t>
             </a:r>
             <a:r>
-              <a:rPr lang="en-US" altLang="ja-JP" sz="2800" dirty="0" smtClean="0">
+              <a:rPr lang="en-US" altLang="ja-JP" sz="2800" dirty="0">
                 <a:sym typeface="Symbol" pitchFamily="18" charset="2"/>
               </a:rPr>
               <a:t> </a:t>
             </a:r>
             <a:r>
-              <a:rPr lang="ja-JP" altLang="en-US" sz="2800" dirty="0" smtClean="0">
+              <a:rPr lang="ja-JP" altLang="en-US" sz="2800" dirty="0">
                 <a:sym typeface="Symbol" pitchFamily="18" charset="2"/>
               </a:rPr>
               <a:t>かつ </a:t>
             </a:r>
             <a:r>
-              <a:rPr lang="en-US" altLang="ja-JP" sz="2800" i="1" dirty="0" smtClean="0">
+              <a:rPr lang="en-US" altLang="ja-JP" sz="2800" i="1" dirty="0">
                 <a:sym typeface="Symbol" pitchFamily="18" charset="2"/>
               </a:rPr>
               <a:t>N</a:t>
             </a:r>
             <a:r>
-              <a:rPr lang="en-US" altLang="ja-JP" sz="2800" dirty="0" smtClean="0">
+              <a:rPr lang="en-US" altLang="ja-JP" sz="2800" dirty="0">
                 <a:sym typeface="Symbol" pitchFamily="18" charset="2"/>
               </a:rPr>
               <a:t> </a:t>
             </a:r>
             <a:r>
-              <a:rPr lang="en-US" altLang="ja-JP" dirty="0" smtClean="0">
+              <a:rPr lang="en-US" altLang="ja-JP" dirty="0">
                 <a:sym typeface="Symbol" pitchFamily="18" charset="2"/>
               </a:rPr>
               <a:t> </a:t>
             </a:r>
             <a:r>
-              <a:rPr lang="en-US" altLang="ja-JP" sz="2800" i="1" dirty="0" smtClean="0">
+              <a:rPr lang="en-US" altLang="ja-JP" sz="2800" i="1" dirty="0">
                 <a:sym typeface="Symbol" pitchFamily="18" charset="2"/>
               </a:rPr>
               <a:t>M </a:t>
             </a:r>
             <a:r>
-              <a:rPr lang="ja-JP" altLang="en-US" sz="2800" dirty="0" smtClean="0">
+              <a:rPr lang="ja-JP" altLang="en-US" sz="2800" dirty="0">
                 <a:sym typeface="Symbol" pitchFamily="18" charset="2"/>
               </a:rPr>
               <a:t>のとき</a:t>
             </a:r>
             <a:r>
-              <a:rPr lang="ja-JP" altLang="en-US" sz="2800" dirty="0" smtClean="0"/>
+              <a:rPr lang="ja-JP" altLang="en-US" sz="2800" dirty="0"/>
               <a:t>、</a:t>
             </a:r>
           </a:p>
           <a:p>
             <a:r>
-              <a:rPr lang="en-US" altLang="ja-JP" sz="2800" i="1" dirty="0" smtClean="0">
+              <a:rPr lang="en-US" altLang="ja-JP" sz="2800" i="1" dirty="0">
                 <a:sym typeface="Symbol" pitchFamily="18" charset="2"/>
               </a:rPr>
               <a:t>M</a:t>
             </a:r>
             <a:r>
-              <a:rPr lang="en-US" altLang="ja-JP" sz="2800" dirty="0" smtClean="0">
+              <a:rPr lang="en-US" altLang="ja-JP" sz="2800" dirty="0">
                 <a:sym typeface="Symbol" pitchFamily="18" charset="2"/>
               </a:rPr>
               <a:t>  </a:t>
             </a:r>
             <a:r>
-              <a:rPr lang="en-US" altLang="ja-JP" sz="2800" i="1" dirty="0" smtClean="0">
+              <a:rPr lang="en-US" altLang="ja-JP" sz="2800" i="1" dirty="0">
                 <a:sym typeface="Symbol" pitchFamily="18" charset="2"/>
               </a:rPr>
               <a:t>N </a:t>
             </a:r>
             <a:r>
-              <a:rPr lang="ja-JP" altLang="en-US" sz="2800" dirty="0" smtClean="0"/>
+              <a:rPr lang="ja-JP" altLang="en-US" sz="2800" dirty="0"/>
               <a:t>と書く。</a:t>
             </a:r>
-            <a:endParaRPr lang="ja-JP" altLang="en-US" sz="2800" dirty="0"/>
           </a:p>
         </p:txBody>
       </p:sp>
@@ -9219,13 +9018,6 @@
   <p:clrMapOvr>
     <a:masterClrMapping/>
   </p:clrMapOvr>
-  <p:timing>
-    <p:tnLst>
-      <p:par>
-        <p:cTn xmlns:p14="http://schemas.microsoft.com/office/powerpoint/2010/main" id="1" dur="indefinite" restart="never" nodeType="tmRoot"/>
-      </p:par>
-    </p:tnLst>
-  </p:timing>
 </p:sld>
 </file>
 
@@ -9262,7 +9054,7 @@
           <a:lstStyle/>
           <a:p>
             <a:r>
-              <a:rPr lang="ja-JP" altLang="en-US" smtClean="0">
+              <a:rPr lang="ja-JP" altLang="en-US">
                 <a:sym typeface="Symbol" pitchFamily="18" charset="2"/>
               </a:rPr>
               <a:t>例</a:t>
@@ -9303,16 +9095,10 @@
           <a:p>
             <a:pPr marL="457200" indent="-457200"/>
             <a:r>
-              <a:rPr lang="en-US" altLang="ja-JP" sz="2800" b="0" dirty="0" smtClean="0">
-                <a:sym typeface="Symbol" pitchFamily="18" charset="2"/>
-              </a:rPr>
-              <a:t>(</a:t>
-            </a:r>
-            <a:r>
               <a:rPr lang="en-US" altLang="ja-JP" sz="2800" b="0" dirty="0">
                 <a:sym typeface="Symbol" pitchFamily="18" charset="2"/>
               </a:rPr>
-              <a:t>x. y. x y)  z w </a:t>
+              <a:t>(x. y. x y)  z w </a:t>
             </a:r>
           </a:p>
           <a:p>
@@ -9339,20 +9125,17 @@
               <a:t>z </a:t>
             </a:r>
             <a:r>
-              <a:rPr lang="ja-JP" altLang="en-US" sz="2800" dirty="0" smtClean="0">
+              <a:rPr lang="ja-JP" altLang="en-US" sz="2800" dirty="0">
                 <a:sym typeface="Symbol" pitchFamily="18" charset="2"/>
               </a:rPr>
               <a:t> </a:t>
             </a:r>
             <a:r>
-              <a:rPr lang="en-US" altLang="ja-JP" sz="2800" b="0" dirty="0" smtClean="0">
+              <a:rPr lang="en-US" altLang="ja-JP" sz="2800" b="0" dirty="0">
                 <a:sym typeface="Symbol" pitchFamily="18" charset="2"/>
               </a:rPr>
               <a:t>w </a:t>
             </a:r>
-            <a:endParaRPr lang="en-US" altLang="ja-JP" sz="2800" b="0" dirty="0">
-              <a:sym typeface="Symbol" pitchFamily="18" charset="2"/>
-            </a:endParaRPr>
           </a:p>
         </p:txBody>
       </p:sp>
@@ -9378,42 +9161,41 @@
           <a:lstStyle/>
           <a:p>
             <a:r>
-              <a:rPr lang="ja-JP" altLang="en-US" sz="2800" dirty="0" smtClean="0"/>
+              <a:rPr lang="ja-JP" altLang="en-US" sz="2800" dirty="0"/>
               <a:t>ラムダ式 </a:t>
             </a:r>
             <a:r>
-              <a:rPr lang="en-US" altLang="ja-JP" sz="2800" dirty="0" smtClean="0"/>
+              <a:rPr lang="en-US" altLang="ja-JP" sz="2800" dirty="0"/>
               <a:t>(</a:t>
             </a:r>
             <a:r>
-              <a:rPr lang="en-US" altLang="ja-JP" sz="2800" dirty="0" err="1" smtClean="0"/>
+              <a:rPr lang="en-US" altLang="ja-JP" sz="2800" dirty="0" err="1"/>
               <a:t>λx</a:t>
             </a:r>
             <a:r>
-              <a:rPr lang="en-US" altLang="ja-JP" sz="2800" dirty="0" smtClean="0"/>
+              <a:rPr lang="en-US" altLang="ja-JP" sz="2800" dirty="0"/>
               <a:t>. </a:t>
             </a:r>
             <a:r>
-              <a:rPr lang="en-US" altLang="ja-JP" sz="2800" dirty="0" err="1" smtClean="0"/>
+              <a:rPr lang="en-US" altLang="ja-JP" sz="2800" dirty="0" err="1"/>
               <a:t>λy</a:t>
             </a:r>
             <a:r>
-              <a:rPr lang="en-US" altLang="ja-JP" sz="2800" dirty="0" smtClean="0"/>
+              <a:rPr lang="en-US" altLang="ja-JP" sz="2800" dirty="0"/>
               <a:t>. x y)  z w </a:t>
             </a:r>
             <a:r>
-              <a:rPr lang="ja-JP" altLang="en-US" sz="2800" dirty="0" smtClean="0"/>
+              <a:rPr lang="ja-JP" altLang="en-US" sz="2800" dirty="0"/>
               <a:t>に対して、以下の</a:t>
             </a:r>
             <a:r>
-              <a:rPr lang="en-US" altLang="ja-JP" sz="2800" dirty="0" smtClean="0"/>
+              <a:rPr lang="en-US" altLang="ja-JP" sz="2800" dirty="0"/>
               <a:t>β</a:t>
             </a:r>
             <a:r>
-              <a:rPr lang="ja-JP" altLang="en-US" sz="2800" dirty="0" smtClean="0"/>
+              <a:rPr lang="ja-JP" altLang="en-US" sz="2800" dirty="0"/>
               <a:t>変換列が存在する。</a:t>
             </a:r>
-            <a:endParaRPr lang="ja-JP" altLang="en-US" sz="2800" dirty="0"/>
           </a:p>
         </p:txBody>
       </p:sp>
@@ -9422,13 +9204,6 @@
   <p:clrMapOvr>
     <a:masterClrMapping/>
   </p:clrMapOvr>
-  <p:timing>
-    <p:tnLst>
-      <p:par>
-        <p:cTn xmlns:p14="http://schemas.microsoft.com/office/powerpoint/2010/main" id="1" dur="indefinite" restart="never" nodeType="tmRoot"/>
-      </p:par>
-    </p:tnLst>
-  </p:timing>
 </p:sld>
 </file>
 
@@ -9465,7 +9240,7 @@
           <a:lstStyle/>
           <a:p>
             <a:r>
-              <a:rPr lang="ja-JP" altLang="en-US" dirty="0" smtClean="0"/>
+              <a:rPr lang="ja-JP" altLang="en-US" dirty="0"/>
               <a:t>ラムダ計算</a:t>
             </a:r>
           </a:p>
@@ -9503,18 +9278,17 @@
           <a:lstStyle/>
           <a:p>
             <a:r>
-              <a:rPr lang="ja-JP" altLang="en-US" sz="2800" dirty="0" smtClean="0"/>
+              <a:rPr lang="ja-JP" altLang="en-US" sz="2800" dirty="0"/>
               <a:t>ラムダ計算は</a:t>
             </a:r>
             <a:r>
-              <a:rPr lang="en-US" altLang="ja-JP" sz="2800" dirty="0" smtClean="0"/>
+              <a:rPr lang="en-US" altLang="ja-JP" sz="2800" dirty="0"/>
               <a:t>1930</a:t>
             </a:r>
             <a:r>
-              <a:rPr lang="ja-JP" altLang="en-US" sz="2800" dirty="0" smtClean="0"/>
+              <a:rPr lang="ja-JP" altLang="en-US" sz="2800" dirty="0"/>
               <a:t>年代（計算機ができる前）に考え出された。現在では、関数型言語の核となっている。</a:t>
             </a:r>
-            <a:endParaRPr lang="ja-JP" altLang="en-US" sz="2800" dirty="0"/>
           </a:p>
           <a:p>
             <a:r>
@@ -9556,21 +9330,21 @@
           <a:lstStyle/>
           <a:p>
             <a:r>
-              <a:rPr lang="en-US" altLang="ja-JP" sz="2800" b="0" dirty="0" smtClean="0"/>
+              <a:rPr lang="en-US" altLang="ja-JP" sz="2800" b="0" dirty="0"/>
               <a:t>[</a:t>
             </a:r>
             <a:r>
-              <a:rPr lang="ja-JP" altLang="en-US" sz="2800" b="0" dirty="0" smtClean="0"/>
+              <a:rPr lang="ja-JP" altLang="en-US" sz="2800" b="0" dirty="0"/>
               <a:t>ラムダ式の定義</a:t>
             </a:r>
             <a:r>
-              <a:rPr lang="en-US" altLang="ja-JP" sz="2800" b="0" dirty="0" smtClean="0"/>
+              <a:rPr lang="en-US" altLang="ja-JP" sz="2800" b="0" dirty="0"/>
               <a:t>]</a:t>
             </a:r>
           </a:p>
           <a:p>
             <a:r>
-              <a:rPr lang="en-US" altLang="ja-JP" sz="2800" b="0" dirty="0" smtClean="0"/>
+              <a:rPr lang="en-US" altLang="ja-JP" sz="2800" b="0" dirty="0"/>
               <a:t> </a:t>
             </a:r>
             <a:r>
@@ -9653,18 +9427,14 @@
             </a:r>
             <a:r>
               <a:rPr lang="en-US" altLang="ja-JP" sz="2800" dirty="0"/>
-              <a:t> </a:t>
-            </a:r>
-            <a:r>
-              <a:rPr lang="en-US" altLang="ja-JP" sz="2800" dirty="0" smtClean="0"/>
-              <a:t> </a:t>
-            </a:r>
-            <a:r>
-              <a:rPr lang="en-US" altLang="ja-JP" sz="2800" b="0" dirty="0" smtClean="0"/>
+              <a:t>  </a:t>
+            </a:r>
+            <a:r>
+              <a:rPr lang="en-US" altLang="ja-JP" sz="2800" b="0" dirty="0"/>
               <a:t>|</a:t>
             </a:r>
             <a:r>
-              <a:rPr lang="en-US" altLang="ja-JP" sz="2800" b="0" i="1" dirty="0" smtClean="0"/>
+              <a:rPr lang="en-US" altLang="ja-JP" sz="2800" b="0" i="1" dirty="0"/>
               <a:t> </a:t>
             </a:r>
             <a:r>
@@ -9724,13 +9494,6 @@
   <p:clrMapOvr>
     <a:masterClrMapping/>
   </p:clrMapOvr>
-  <p:timing>
-    <p:tnLst>
-      <p:par>
-        <p:cTn xmlns:p14="http://schemas.microsoft.com/office/powerpoint/2010/main" id="1" dur="indefinite" restart="never" nodeType="tmRoot"/>
-      </p:par>
-    </p:tnLst>
-  </p:timing>
 </p:sld>
 </file>
 
@@ -9767,7 +9530,7 @@
           <a:lstStyle/>
           <a:p>
             <a:r>
-              <a:rPr lang="ja-JP" altLang="en-US" dirty="0" smtClean="0">
+              <a:rPr lang="ja-JP" altLang="en-US" dirty="0">
                 <a:sym typeface="Symbol" pitchFamily="18" charset="2"/>
               </a:rPr>
               <a:t>練習問題４</a:t>
@@ -9797,58 +9560,57 @@
           <a:lstStyle/>
           <a:p>
             <a:r>
-              <a:rPr lang="ja-JP" altLang="en-US" sz="2800" dirty="0" smtClean="0"/>
+              <a:rPr lang="ja-JP" altLang="en-US" sz="2800" dirty="0"/>
               <a:t>ラムダ式 </a:t>
             </a:r>
             <a:r>
-              <a:rPr lang="en-US" altLang="ja-JP" sz="2800" dirty="0" smtClean="0"/>
+              <a:rPr lang="en-US" altLang="ja-JP" sz="2800" dirty="0"/>
               <a:t>(</a:t>
             </a:r>
             <a:r>
-              <a:rPr lang="en-US" altLang="ja-JP" sz="2800" dirty="0" err="1" smtClean="0"/>
+              <a:rPr lang="en-US" altLang="ja-JP" sz="2800" dirty="0" err="1"/>
               <a:t>λx</a:t>
             </a:r>
             <a:r>
-              <a:rPr lang="en-US" altLang="ja-JP" sz="2800" dirty="0" smtClean="0"/>
+              <a:rPr lang="en-US" altLang="ja-JP" sz="2800" dirty="0"/>
               <a:t>. </a:t>
             </a:r>
             <a:r>
-              <a:rPr lang="en-US" altLang="ja-JP" sz="2800" dirty="0" err="1" smtClean="0"/>
+              <a:rPr lang="en-US" altLang="ja-JP" sz="2800" dirty="0" err="1"/>
               <a:t>λy</a:t>
             </a:r>
             <a:r>
-              <a:rPr lang="en-US" altLang="ja-JP" sz="2800" dirty="0" smtClean="0"/>
+              <a:rPr lang="en-US" altLang="ja-JP" sz="2800" dirty="0"/>
               <a:t>. x y)  (</a:t>
             </a:r>
             <a:r>
-              <a:rPr lang="en-US" altLang="ja-JP" sz="2800" dirty="0" err="1" smtClean="0"/>
+              <a:rPr lang="en-US" altLang="ja-JP" sz="2800" dirty="0" err="1"/>
               <a:t>λz</a:t>
             </a:r>
             <a:r>
-              <a:rPr lang="en-US" altLang="ja-JP" sz="2800" dirty="0" smtClean="0"/>
+              <a:rPr lang="en-US" altLang="ja-JP" sz="2800" dirty="0"/>
               <a:t>. z) w </a:t>
             </a:r>
             <a:r>
-              <a:rPr lang="ja-JP" altLang="en-US" sz="2800" dirty="0" smtClean="0"/>
+              <a:rPr lang="ja-JP" altLang="en-US" sz="2800" dirty="0"/>
               <a:t>は、何度か</a:t>
             </a:r>
             <a:r>
-              <a:rPr lang="en-US" altLang="ja-JP" sz="2800" dirty="0" smtClean="0"/>
+              <a:rPr lang="en-US" altLang="ja-JP" sz="2800" dirty="0"/>
               <a:t>β</a:t>
             </a:r>
             <a:r>
-              <a:rPr lang="ja-JP" altLang="en-US" sz="2800" dirty="0" smtClean="0"/>
+              <a:rPr lang="ja-JP" altLang="en-US" sz="2800" dirty="0"/>
               <a:t>変換を行うことによって</a:t>
             </a:r>
             <a:r>
-              <a:rPr lang="en-US" altLang="ja-JP" sz="2800" dirty="0" smtClean="0"/>
+              <a:rPr lang="en-US" altLang="ja-JP" sz="2800" dirty="0"/>
               <a:t>w</a:t>
             </a:r>
             <a:r>
-              <a:rPr lang="ja-JP" altLang="en-US" sz="2800" dirty="0" smtClean="0"/>
+              <a:rPr lang="ja-JP" altLang="en-US" sz="2800" dirty="0"/>
               <a:t>に変換できるが、その過程を示せ。</a:t>
             </a:r>
-            <a:endParaRPr lang="ja-JP" altLang="en-US" sz="2800" dirty="0"/>
           </a:p>
         </p:txBody>
       </p:sp>
@@ -9857,13 +9619,6 @@
   <p:clrMapOvr>
     <a:masterClrMapping/>
   </p:clrMapOvr>
-  <p:timing>
-    <p:tnLst>
-      <p:par>
-        <p:cTn xmlns:p14="http://schemas.microsoft.com/office/powerpoint/2010/main" id="1" dur="indefinite" restart="never" nodeType="tmRoot"/>
-      </p:par>
-    </p:tnLst>
-  </p:timing>
 </p:sld>
 </file>
 
@@ -9905,11 +9660,11 @@
           <a:lstStyle/>
           <a:p>
             <a:r>
-              <a:rPr lang="en-US" altLang="ja-JP" smtClean="0"/>
+              <a:rPr lang="en-US" altLang="ja-JP"/>
               <a:t>Church-Rosser</a:t>
             </a:r>
             <a:r>
-              <a:rPr lang="ja-JP" altLang="en-US" smtClean="0"/>
+              <a:rPr lang="ja-JP" altLang="en-US"/>
               <a:t>の定理</a:t>
             </a:r>
           </a:p>
@@ -10154,13 +9909,6 @@
   <p:clrMapOvr>
     <a:masterClrMapping/>
   </p:clrMapOvr>
-  <p:timing>
-    <p:tnLst>
-      <p:par>
-        <p:cTn xmlns:p14="http://schemas.microsoft.com/office/powerpoint/2010/main" id="1" dur="indefinite" restart="never" nodeType="tmRoot"/>
-      </p:par>
-    </p:tnLst>
-  </p:timing>
 </p:sld>
 </file>
 
@@ -10202,7 +9950,7 @@
           <a:lstStyle/>
           <a:p>
             <a:r>
-              <a:rPr lang="ja-JP" altLang="en-US" dirty="0" smtClean="0"/>
+              <a:rPr lang="ja-JP" altLang="en-US" dirty="0"/>
               <a:t>例</a:t>
             </a:r>
           </a:p>
@@ -10293,69 +10041,63 @@
               <a:rPr lang="ja-JP" altLang="en-US" sz="2800" b="0" dirty="0">
                 <a:sym typeface="Symbol" pitchFamily="18" charset="2"/>
               </a:rPr>
-              <a:t>は</a:t>
-            </a:r>
-            <a:r>
-              <a:rPr lang="ja-JP" altLang="en-US" sz="2800" b="0" dirty="0" smtClean="0">
-                <a:sym typeface="Symbol" pitchFamily="18" charset="2"/>
-              </a:rPr>
-              <a:t>、</a:t>
-            </a:r>
-            <a:r>
-              <a:rPr lang="en-US" altLang="ja-JP" sz="2800" dirty="0" smtClean="0"/>
+              <a:t>は、</a:t>
+            </a:r>
+            <a:r>
+              <a:rPr lang="en-US" altLang="ja-JP" sz="2800" dirty="0"/>
               <a:t> </a:t>
             </a:r>
           </a:p>
           <a:p>
             <a:pPr indent="-457200"/>
             <a:r>
-              <a:rPr lang="en-US" altLang="ja-JP" sz="2800" dirty="0" smtClean="0"/>
+              <a:rPr lang="en-US" altLang="ja-JP" sz="2800" dirty="0"/>
               <a:t>(</a:t>
             </a:r>
             <a:r>
-              <a:rPr lang="en-US" altLang="ja-JP" sz="2800" dirty="0" smtClean="0">
+              <a:rPr lang="en-US" altLang="ja-JP" sz="2800" dirty="0">
                 <a:sym typeface="Symbol" pitchFamily="18" charset="2"/>
               </a:rPr>
               <a:t>x. y. x y)  (z. z) w </a:t>
             </a:r>
             <a:r>
-              <a:rPr lang="en-US" altLang="ja-JP" sz="2800" dirty="0" smtClean="0">
+              <a:rPr lang="en-US" altLang="ja-JP" sz="2800" dirty="0">
                 <a:sym typeface="Symbol"/>
               </a:rPr>
               <a:t></a:t>
             </a:r>
             <a:r>
-              <a:rPr lang="ja-JP" altLang="en-US" sz="2800" dirty="0" smtClean="0">
+              <a:rPr lang="ja-JP" altLang="en-US" sz="2800" dirty="0">
                 <a:sym typeface="Symbol"/>
               </a:rPr>
               <a:t> </a:t>
             </a:r>
             <a:r>
-              <a:rPr lang="en-US" altLang="ja-JP" sz="2800" dirty="0" smtClean="0">
+              <a:rPr lang="en-US" altLang="ja-JP" sz="2800" dirty="0">
                 <a:sym typeface="Symbol"/>
               </a:rPr>
               <a:t>(</a:t>
             </a:r>
             <a:r>
-              <a:rPr lang="en-US" altLang="ja-JP" sz="2800" dirty="0" err="1" smtClean="0">
+              <a:rPr lang="en-US" altLang="ja-JP" sz="2800" dirty="0" err="1">
                 <a:sym typeface="Symbol"/>
               </a:rPr>
               <a:t>λy</a:t>
             </a:r>
             <a:r>
-              <a:rPr lang="en-US" altLang="ja-JP" sz="2800" dirty="0" smtClean="0">
+              <a:rPr lang="en-US" altLang="ja-JP" sz="2800" dirty="0">
                 <a:sym typeface="Symbol"/>
               </a:rPr>
               <a:t>. (</a:t>
             </a:r>
             <a:r>
-              <a:rPr lang="en-US" altLang="ja-JP" sz="2800" dirty="0" err="1" smtClean="0">
+              <a:rPr lang="en-US" altLang="ja-JP" sz="2800" dirty="0" err="1">
                 <a:sym typeface="Symbol"/>
               </a:rPr>
               <a:t>λz</a:t>
             </a:r>
             <a:r>
-              <a:rPr lang="en-US" altLang="ja-JP" sz="2800" dirty="0" smtClean="0">
+              <a:rPr lang="en-US" altLang="ja-JP" sz="2800" dirty="0">
                 <a:sym typeface="Symbol"/>
               </a:rPr>
               <a:t>. z) y) w</a:t>
@@ -10364,54 +10106,54 @@
           <a:p>
             <a:pPr indent="-457200"/>
             <a:r>
-              <a:rPr lang="ja-JP" altLang="en-US" sz="2800" dirty="0" err="1" smtClean="0">
+              <a:rPr lang="ja-JP" altLang="en-US" sz="2800" dirty="0" err="1">
                 <a:sym typeface="Symbol"/>
               </a:rPr>
               <a:t>のように</a:t>
             </a:r>
             <a:r>
-              <a:rPr lang="ja-JP" altLang="en-US" sz="2800" dirty="0" smtClean="0">
+              <a:rPr lang="ja-JP" altLang="en-US" sz="2800" dirty="0">
                 <a:sym typeface="Symbol"/>
               </a:rPr>
               <a:t>まず</a:t>
             </a:r>
             <a:r>
-              <a:rPr lang="en-US" altLang="ja-JP" sz="2800" dirty="0" smtClean="0">
+              <a:rPr lang="en-US" altLang="ja-JP" sz="2800" dirty="0">
                 <a:sym typeface="Symbol"/>
               </a:rPr>
               <a:t>β</a:t>
             </a:r>
             <a:r>
-              <a:rPr lang="ja-JP" altLang="en-US" sz="2800" dirty="0" smtClean="0">
+              <a:rPr lang="ja-JP" altLang="en-US" sz="2800" dirty="0">
                 <a:sym typeface="Symbol"/>
               </a:rPr>
               <a:t>変換される。この</a:t>
             </a:r>
             <a:r>
-              <a:rPr lang="en-US" altLang="ja-JP" sz="2800" dirty="0" smtClean="0">
+              <a:rPr lang="en-US" altLang="ja-JP" sz="2800" dirty="0">
                 <a:sym typeface="Symbol"/>
               </a:rPr>
               <a:t>λ</a:t>
             </a:r>
             <a:r>
-              <a:rPr lang="ja-JP" altLang="en-US" sz="2800" dirty="0" smtClean="0">
+              <a:rPr lang="ja-JP" altLang="en-US" sz="2800" dirty="0">
                 <a:sym typeface="Symbol"/>
               </a:rPr>
               <a:t>式に対し、２通りの</a:t>
             </a:r>
             <a:r>
-              <a:rPr lang="en-US" altLang="ja-JP" sz="2800" dirty="0" smtClean="0">
+              <a:rPr lang="en-US" altLang="ja-JP" sz="2800" dirty="0">
                 <a:sym typeface="Symbol"/>
               </a:rPr>
               <a:t>β</a:t>
             </a:r>
             <a:r>
-              <a:rPr lang="ja-JP" altLang="en-US" sz="2800" dirty="0" smtClean="0">
+              <a:rPr lang="ja-JP" altLang="en-US" sz="2800" dirty="0">
                 <a:sym typeface="Symbol"/>
               </a:rPr>
               <a:t>変換の適用が可能である。</a:t>
             </a:r>
-            <a:endParaRPr lang="en-US" altLang="ja-JP" sz="2800" dirty="0" smtClean="0">
+            <a:endParaRPr lang="en-US" altLang="ja-JP" sz="2800" dirty="0">
               <a:sym typeface="Symbol"/>
             </a:endParaRPr>
           </a:p>
@@ -10420,67 +10162,67 @@
               <a:buAutoNum type="arabicParenBoth"/>
             </a:pPr>
             <a:r>
-              <a:rPr lang="en-US" altLang="ja-JP" sz="2800" dirty="0" smtClean="0">
+              <a:rPr lang="en-US" altLang="ja-JP" sz="2800" dirty="0">
                 <a:sym typeface="Symbol"/>
               </a:rPr>
               <a:t>(</a:t>
             </a:r>
             <a:r>
-              <a:rPr lang="en-US" altLang="ja-JP" sz="2800" dirty="0" err="1" smtClean="0">
+              <a:rPr lang="en-US" altLang="ja-JP" sz="2800" dirty="0" err="1">
                 <a:sym typeface="Symbol"/>
               </a:rPr>
               <a:t>λy</a:t>
             </a:r>
             <a:r>
-              <a:rPr lang="en-US" altLang="ja-JP" sz="2800" dirty="0" smtClean="0">
+              <a:rPr lang="en-US" altLang="ja-JP" sz="2800" dirty="0">
                 <a:sym typeface="Symbol"/>
               </a:rPr>
               <a:t>. (</a:t>
             </a:r>
             <a:r>
-              <a:rPr lang="en-US" altLang="ja-JP" sz="2800" dirty="0" err="1" smtClean="0">
+              <a:rPr lang="en-US" altLang="ja-JP" sz="2800" dirty="0" err="1">
                 <a:sym typeface="Symbol"/>
               </a:rPr>
               <a:t>λz</a:t>
             </a:r>
             <a:r>
-              <a:rPr lang="en-US" altLang="ja-JP" sz="2800" dirty="0" smtClean="0">
+              <a:rPr lang="en-US" altLang="ja-JP" sz="2800" dirty="0">
                 <a:sym typeface="Symbol"/>
               </a:rPr>
               <a:t>. z) y) w</a:t>
             </a:r>
             <a:r>
-              <a:rPr lang="ja-JP" altLang="en-US" sz="2800" dirty="0" smtClean="0">
+              <a:rPr lang="ja-JP" altLang="en-US" sz="2800" dirty="0">
                 <a:sym typeface="Symbol"/>
               </a:rPr>
               <a:t> </a:t>
             </a:r>
             <a:r>
-              <a:rPr lang="en-US" altLang="ja-JP" sz="2800" dirty="0" smtClean="0">
+              <a:rPr lang="en-US" altLang="ja-JP" sz="2800" dirty="0">
                 <a:sym typeface="Symbol"/>
               </a:rPr>
               <a:t></a:t>
             </a:r>
             <a:r>
-              <a:rPr lang="ja-JP" altLang="en-US" sz="2800" dirty="0" smtClean="0">
+              <a:rPr lang="ja-JP" altLang="en-US" sz="2800" dirty="0">
                 <a:sym typeface="Symbol"/>
               </a:rPr>
               <a:t> </a:t>
             </a:r>
             <a:r>
-              <a:rPr lang="en-US" altLang="ja-JP" sz="2800" dirty="0" smtClean="0">
+              <a:rPr lang="en-US" altLang="ja-JP" sz="2800" dirty="0">
                 <a:sym typeface="Symbol"/>
               </a:rPr>
               <a:t>(</a:t>
             </a:r>
             <a:r>
-              <a:rPr lang="en-US" altLang="ja-JP" sz="2800" dirty="0" err="1" smtClean="0">
+              <a:rPr lang="en-US" altLang="ja-JP" sz="2800" dirty="0" err="1">
                 <a:sym typeface="Symbol"/>
               </a:rPr>
               <a:t>λy</a:t>
             </a:r>
             <a:r>
-              <a:rPr lang="en-US" altLang="ja-JP" sz="2800" dirty="0" smtClean="0">
+              <a:rPr lang="en-US" altLang="ja-JP" sz="2800" dirty="0">
                 <a:sym typeface="Symbol"/>
               </a:rPr>
               <a:t>. y) w</a:t>
@@ -10492,67 +10234,67 @@
               <a:buAutoNum type="arabicParenBoth"/>
             </a:pPr>
             <a:r>
-              <a:rPr lang="en-US" altLang="ja-JP" sz="2800" dirty="0" smtClean="0">
+              <a:rPr lang="en-US" altLang="ja-JP" sz="2800" dirty="0">
                 <a:sym typeface="Symbol"/>
               </a:rPr>
               <a:t>(</a:t>
             </a:r>
             <a:r>
-              <a:rPr lang="en-US" altLang="ja-JP" sz="2800" dirty="0" err="1" smtClean="0">
+              <a:rPr lang="en-US" altLang="ja-JP" sz="2800" dirty="0" err="1">
                 <a:sym typeface="Symbol"/>
               </a:rPr>
               <a:t>λy</a:t>
             </a:r>
             <a:r>
-              <a:rPr lang="en-US" altLang="ja-JP" sz="2800" dirty="0" smtClean="0">
+              <a:rPr lang="en-US" altLang="ja-JP" sz="2800" dirty="0">
                 <a:sym typeface="Symbol"/>
               </a:rPr>
               <a:t>. (</a:t>
             </a:r>
             <a:r>
-              <a:rPr lang="en-US" altLang="ja-JP" sz="2800" dirty="0" err="1" smtClean="0">
+              <a:rPr lang="en-US" altLang="ja-JP" sz="2800" dirty="0" err="1">
                 <a:sym typeface="Symbol"/>
               </a:rPr>
               <a:t>λz</a:t>
             </a:r>
             <a:r>
-              <a:rPr lang="en-US" altLang="ja-JP" sz="2800" dirty="0" smtClean="0">
+              <a:rPr lang="en-US" altLang="ja-JP" sz="2800" dirty="0">
                 <a:sym typeface="Symbol"/>
               </a:rPr>
               <a:t>. z) y) w</a:t>
             </a:r>
             <a:r>
-              <a:rPr lang="ja-JP" altLang="en-US" sz="2800" dirty="0" smtClean="0">
+              <a:rPr lang="ja-JP" altLang="en-US" sz="2800" dirty="0">
                 <a:sym typeface="Symbol"/>
               </a:rPr>
               <a:t> </a:t>
             </a:r>
             <a:r>
-              <a:rPr lang="en-US" altLang="ja-JP" sz="2800" dirty="0" smtClean="0">
+              <a:rPr lang="en-US" altLang="ja-JP" sz="2800" dirty="0">
                 <a:sym typeface="Symbol"/>
               </a:rPr>
               <a:t></a:t>
             </a:r>
             <a:r>
-              <a:rPr lang="ja-JP" altLang="en-US" sz="2800" dirty="0" smtClean="0">
+              <a:rPr lang="ja-JP" altLang="en-US" sz="2800" dirty="0">
                 <a:sym typeface="Symbol"/>
               </a:rPr>
               <a:t> </a:t>
             </a:r>
             <a:r>
-              <a:rPr lang="en-US" altLang="ja-JP" sz="2800" dirty="0" smtClean="0">
+              <a:rPr lang="en-US" altLang="ja-JP" sz="2800" dirty="0">
                 <a:sym typeface="Symbol"/>
               </a:rPr>
               <a:t>(</a:t>
             </a:r>
             <a:r>
-              <a:rPr lang="en-US" altLang="ja-JP" sz="2800" dirty="0" err="1" smtClean="0">
+              <a:rPr lang="en-US" altLang="ja-JP" sz="2800" dirty="0" err="1">
                 <a:sym typeface="Symbol"/>
               </a:rPr>
               <a:t>λz</a:t>
             </a:r>
             <a:r>
-              <a:rPr lang="en-US" altLang="ja-JP" sz="2800" dirty="0" smtClean="0">
+              <a:rPr lang="en-US" altLang="ja-JP" sz="2800" dirty="0">
                 <a:sym typeface="Symbol"/>
               </a:rPr>
               <a:t>. z) w</a:t>
@@ -10561,78 +10303,78 @@
           <a:p>
             <a:pPr marL="514350" indent="-514350"/>
             <a:r>
-              <a:rPr lang="en-US" altLang="ja-JP" sz="2800" dirty="0" smtClean="0">
+              <a:rPr lang="en-US" altLang="ja-JP" sz="2800" dirty="0">
                 <a:sym typeface="Symbol"/>
               </a:rPr>
               <a:t>(1), (2)</a:t>
             </a:r>
             <a:r>
-              <a:rPr lang="ja-JP" altLang="en-US" sz="2800" dirty="0" smtClean="0">
+              <a:rPr lang="ja-JP" altLang="en-US" sz="2800" dirty="0">
                 <a:sym typeface="Symbol"/>
               </a:rPr>
               <a:t>に対して</a:t>
             </a:r>
             <a:r>
-              <a:rPr lang="en-US" altLang="ja-JP" sz="2800" dirty="0" smtClean="0">
+              <a:rPr lang="en-US" altLang="ja-JP" sz="2800" dirty="0">
                 <a:sym typeface="Symbol"/>
               </a:rPr>
               <a:t>β</a:t>
             </a:r>
             <a:r>
-              <a:rPr lang="ja-JP" altLang="en-US" sz="2800" dirty="0" smtClean="0">
+              <a:rPr lang="ja-JP" altLang="en-US" sz="2800" dirty="0">
                 <a:sym typeface="Symbol"/>
               </a:rPr>
               <a:t>変換を一度適用すると、どちらも</a:t>
             </a:r>
             <a:r>
-              <a:rPr lang="en-US" altLang="ja-JP" sz="2800" dirty="0" smtClean="0">
+              <a:rPr lang="en-US" altLang="ja-JP" sz="2800" dirty="0">
                 <a:sym typeface="Symbol"/>
               </a:rPr>
               <a:t>w</a:t>
             </a:r>
             <a:r>
-              <a:rPr lang="ja-JP" altLang="en-US" sz="2800" dirty="0" smtClean="0">
+              <a:rPr lang="ja-JP" altLang="en-US" sz="2800" dirty="0">
                 <a:sym typeface="Symbol"/>
               </a:rPr>
               <a:t>になる。</a:t>
             </a:r>
-            <a:endParaRPr lang="en-US" altLang="ja-JP" sz="2800" dirty="0" smtClean="0">
+            <a:endParaRPr lang="en-US" altLang="ja-JP" sz="2800" dirty="0">
               <a:sym typeface="Symbol"/>
             </a:endParaRPr>
           </a:p>
           <a:p>
             <a:pPr indent="-514350"/>
             <a:r>
-              <a:rPr lang="ja-JP" altLang="en-US" sz="2800" dirty="0" smtClean="0">
+              <a:rPr lang="ja-JP" altLang="en-US" sz="2800" dirty="0">
                 <a:sym typeface="Symbol"/>
               </a:rPr>
               <a:t>このように、</a:t>
             </a:r>
             <a:r>
-              <a:rPr lang="en-US" altLang="ja-JP" sz="2800" dirty="0" smtClean="0">
+              <a:rPr lang="en-US" altLang="ja-JP" sz="2800" dirty="0">
                 <a:sym typeface="Symbol"/>
               </a:rPr>
               <a:t>β</a:t>
             </a:r>
             <a:r>
-              <a:rPr lang="ja-JP" altLang="en-US" sz="2800" dirty="0" smtClean="0">
+              <a:rPr lang="ja-JP" altLang="en-US" sz="2800" dirty="0">
                 <a:sym typeface="Symbol"/>
               </a:rPr>
               <a:t>変換で一度枝分かれした後、必ず合流する経路があるというのが</a:t>
             </a:r>
             <a:r>
-              <a:rPr lang="en-US" altLang="ja-JP" sz="2800" dirty="0" smtClean="0">
+              <a:rPr lang="en-US" altLang="ja-JP" sz="2800" dirty="0">
                 <a:sym typeface="Symbol"/>
               </a:rPr>
               <a:t>Church-Rosser</a:t>
             </a:r>
             <a:r>
-              <a:rPr lang="ja-JP" altLang="en-US" sz="2800" dirty="0" smtClean="0">
+              <a:rPr lang="ja-JP" altLang="en-US" sz="2800" dirty="0">
                 <a:sym typeface="Symbol"/>
               </a:rPr>
               <a:t>定理である。</a:t>
             </a:r>
-            <a:endParaRPr lang="en-US" altLang="ja-JP" sz="2800" dirty="0" smtClean="0">
+            <a:endParaRPr lang="en-US" altLang="ja-JP" sz="2800" dirty="0">
               <a:sym typeface="Symbol" pitchFamily="18" charset="2"/>
             </a:endParaRPr>
           </a:p>
@@ -10649,13 +10391,6 @@
   <p:clrMapOvr>
     <a:masterClrMapping/>
   </p:clrMapOvr>
-  <p:timing>
-    <p:tnLst>
-      <p:par>
-        <p:cTn xmlns:p14="http://schemas.microsoft.com/office/powerpoint/2010/main" id="1" dur="indefinite" restart="never" nodeType="tmRoot"/>
-      </p:par>
-    </p:tnLst>
-  </p:timing>
 </p:sld>
 </file>
 
@@ -10692,7 +10427,7 @@
           <a:lstStyle/>
           <a:p>
             <a:r>
-              <a:rPr lang="ja-JP" altLang="en-US" dirty="0" smtClean="0">
+              <a:rPr lang="ja-JP" altLang="en-US" dirty="0">
                 <a:sym typeface="Symbol" pitchFamily="18" charset="2"/>
               </a:rPr>
               <a:t>練習問題５</a:t>
@@ -10722,66 +10457,65 @@
           <a:lstStyle/>
           <a:p>
             <a:r>
-              <a:rPr lang="ja-JP" altLang="en-US" sz="2800" dirty="0" smtClean="0"/>
+              <a:rPr lang="ja-JP" altLang="en-US" sz="2800" dirty="0"/>
               <a:t>ラムダ式 </a:t>
             </a:r>
             <a:r>
-              <a:rPr lang="en-US" altLang="ja-JP" sz="2800" dirty="0" smtClean="0"/>
+              <a:rPr lang="en-US" altLang="ja-JP" sz="2800" dirty="0"/>
               <a:t>(</a:t>
             </a:r>
             <a:r>
-              <a:rPr lang="en-US" altLang="ja-JP" sz="2800" dirty="0" err="1" smtClean="0"/>
+              <a:rPr lang="en-US" altLang="ja-JP" sz="2800" dirty="0" err="1"/>
               <a:t>λx</a:t>
             </a:r>
             <a:r>
-              <a:rPr lang="en-US" altLang="ja-JP" sz="2800" dirty="0" smtClean="0"/>
+              <a:rPr lang="en-US" altLang="ja-JP" sz="2800" dirty="0"/>
               <a:t>. </a:t>
             </a:r>
             <a:r>
-              <a:rPr lang="en-US" altLang="ja-JP" sz="2800" dirty="0" err="1" smtClean="0"/>
+              <a:rPr lang="en-US" altLang="ja-JP" sz="2800" dirty="0" err="1"/>
               <a:t>λy</a:t>
             </a:r>
             <a:r>
-              <a:rPr lang="en-US" altLang="ja-JP" sz="2800" dirty="0" smtClean="0"/>
+              <a:rPr lang="en-US" altLang="ja-JP" sz="2800" dirty="0"/>
               <a:t>. x y)  (</a:t>
             </a:r>
             <a:r>
-              <a:rPr lang="en-US" altLang="ja-JP" sz="2800" dirty="0" err="1" smtClean="0"/>
+              <a:rPr lang="en-US" altLang="ja-JP" sz="2800" dirty="0" err="1"/>
               <a:t>λx</a:t>
             </a:r>
             <a:r>
-              <a:rPr lang="en-US" altLang="ja-JP" sz="2800" dirty="0" smtClean="0"/>
+              <a:rPr lang="en-US" altLang="ja-JP" sz="2800" dirty="0"/>
               <a:t>. x y) w</a:t>
             </a:r>
             <a:r>
-              <a:rPr lang="ja-JP" altLang="en-US" sz="2800" dirty="0" smtClean="0"/>
+              <a:rPr lang="ja-JP" altLang="en-US" sz="2800" dirty="0"/>
               <a:t>に対して、</a:t>
             </a:r>
             <a:r>
-              <a:rPr lang="en-US" altLang="ja-JP" sz="2800" dirty="0" smtClean="0"/>
+              <a:rPr lang="en-US" altLang="ja-JP" sz="2800" dirty="0"/>
               <a:t>β</a:t>
             </a:r>
             <a:r>
-              <a:rPr lang="ja-JP" altLang="en-US" sz="2800" dirty="0" smtClean="0"/>
+              <a:rPr lang="ja-JP" altLang="en-US" sz="2800" dirty="0"/>
               <a:t>変換を適用する箇所のないラムダ式になるまで</a:t>
             </a:r>
             <a:r>
-              <a:rPr lang="en-US" altLang="ja-JP" sz="2800" dirty="0" smtClean="0"/>
+              <a:rPr lang="en-US" altLang="ja-JP" sz="2800" dirty="0"/>
               <a:t>β</a:t>
             </a:r>
             <a:r>
-              <a:rPr lang="ja-JP" altLang="en-US" sz="2800" dirty="0" smtClean="0"/>
+              <a:rPr lang="ja-JP" altLang="en-US" sz="2800" dirty="0"/>
               <a:t>変換を適用せよ。また、この例では途中で、２通りの適用可能性のあるラムダ式が出てくる。２通りの</a:t>
             </a:r>
             <a:r>
-              <a:rPr lang="en-US" altLang="ja-JP" sz="2800" dirty="0" smtClean="0"/>
+              <a:rPr lang="en-US" altLang="ja-JP" sz="2800" dirty="0"/>
               <a:t>β</a:t>
             </a:r>
             <a:r>
-              <a:rPr lang="ja-JP" altLang="en-US" sz="2800" dirty="0" smtClean="0"/>
+              <a:rPr lang="ja-JP" altLang="en-US" sz="2800" dirty="0"/>
               <a:t>変換列を示せ。</a:t>
             </a:r>
-            <a:endParaRPr lang="ja-JP" altLang="en-US" sz="2800" dirty="0"/>
           </a:p>
         </p:txBody>
       </p:sp>
@@ -10790,13 +10524,6 @@
   <p:clrMapOvr>
     <a:masterClrMapping/>
   </p:clrMapOvr>
-  <p:timing>
-    <p:tnLst>
-      <p:par>
-        <p:cTn xmlns:p14="http://schemas.microsoft.com/office/powerpoint/2010/main" id="1" dur="indefinite" restart="never" nodeType="tmRoot"/>
-      </p:par>
-    </p:tnLst>
-  </p:timing>
 </p:sld>
 </file>
 
@@ -10858,7 +10585,7 @@
               <a:defRPr/>
             </a:pPr>
             <a:r>
-              <a:rPr lang="ja-JP" altLang="en-US" sz="4400" dirty="0" smtClean="0">
+              <a:rPr lang="ja-JP" altLang="en-US" sz="4400" dirty="0">
                 <a:latin typeface="+mj-lt"/>
                 <a:ea typeface="+mj-ea"/>
                 <a:cs typeface="+mj-cs"/>
@@ -10866,7 +10593,7 @@
               </a:rPr>
               <a:t>参考文献</a:t>
             </a:r>
-            <a:endParaRPr kumimoji="1" lang="ja-JP" altLang="en-US" sz="4400" b="0" i="0" u="none" strike="noStrike" kern="1200" cap="none" spc="0" normalizeH="0" baseline="0" noProof="0" dirty="0" smtClean="0">
+            <a:endParaRPr kumimoji="1" lang="ja-JP" altLang="en-US" sz="4400" b="0" i="0" u="none" strike="noStrike" kern="1200" cap="none" spc="0" normalizeH="0" baseline="0" noProof="0" dirty="0">
               <a:ln>
                 <a:noFill/>
               </a:ln>
@@ -10906,7 +10633,7 @@
           <a:lstStyle/>
           <a:p>
             <a:r>
-              <a:rPr lang="en-US" altLang="ja-JP" sz="2800" dirty="0" smtClean="0"/>
+              <a:rPr lang="en-US" altLang="ja-JP" sz="2800" dirty="0"/>
               <a:t>Alonzo Church, </a:t>
             </a:r>
           </a:p>
@@ -10915,7 +10642,7 @@
               <a:buNone/>
             </a:pPr>
             <a:r>
-              <a:rPr lang="en-US" altLang="ja-JP" sz="2800" dirty="0" smtClean="0"/>
+              <a:rPr lang="en-US" altLang="ja-JP" sz="2800" dirty="0"/>
               <a:t>“An unsolvable problem of elementary number theory”,  </a:t>
             </a:r>
           </a:p>
@@ -10924,11 +10651,11 @@
               <a:buNone/>
             </a:pPr>
             <a:r>
-              <a:rPr lang="en-US" altLang="ja-JP" sz="2800" i="1" dirty="0" smtClean="0"/>
+              <a:rPr lang="en-US" altLang="ja-JP" sz="2800" i="1" dirty="0"/>
               <a:t>American Journal of Mathematics</a:t>
             </a:r>
             <a:r>
-              <a:rPr lang="en-US" altLang="ja-JP" sz="2800" dirty="0" smtClean="0"/>
+              <a:rPr lang="en-US" altLang="ja-JP" sz="2800" dirty="0"/>
               <a:t>, </a:t>
             </a:r>
           </a:p>
@@ -10937,7 +10664,7 @@
               <a:buNone/>
             </a:pPr>
             <a:r>
-              <a:rPr lang="en-US" altLang="ja-JP" sz="2800" dirty="0" smtClean="0"/>
+              <a:rPr lang="en-US" altLang="ja-JP" sz="2800" dirty="0"/>
               <a:t>vol. 58 , pp. 345-363, 1936.</a:t>
             </a:r>
           </a:p>
@@ -10984,7 +10711,7 @@
           <a:lstStyle/>
           <a:p>
             <a:r>
-              <a:rPr lang="ja-JP" altLang="en-US" smtClean="0"/>
+              <a:rPr lang="ja-JP" altLang="en-US"/>
               <a:t>ラムダ式</a:t>
             </a:r>
           </a:p>
@@ -11121,29 +10848,29 @@
           <a:lstStyle/>
           <a:p>
             <a:r>
-              <a:rPr lang="ja-JP" altLang="en-US" sz="2800" dirty="0" smtClean="0"/>
+              <a:rPr lang="ja-JP" altLang="en-US" sz="2800" dirty="0"/>
               <a:t>（例）  </a:t>
             </a:r>
             <a:r>
-              <a:rPr lang="en-US" altLang="ja-JP" sz="2800" b="0" dirty="0" smtClean="0"/>
+              <a:rPr lang="en-US" altLang="ja-JP" sz="2800" b="0" dirty="0"/>
               <a:t>x y z </a:t>
             </a:r>
             <a:r>
-              <a:rPr lang="ja-JP" altLang="en-US" sz="2800" b="0" dirty="0" smtClean="0"/>
+              <a:rPr lang="ja-JP" altLang="en-US" sz="2800" b="0" dirty="0"/>
               <a:t>は、</a:t>
             </a:r>
             <a:r>
-              <a:rPr lang="en-US" altLang="ja-JP" sz="2800" b="0" dirty="0" smtClean="0"/>
+              <a:rPr lang="en-US" altLang="ja-JP" sz="2800" b="0" dirty="0"/>
               <a:t>((x y) z)</a:t>
             </a:r>
             <a:r>
-              <a:rPr lang="ja-JP" altLang="en-US" sz="2800" b="0" dirty="0" smtClean="0"/>
+              <a:rPr lang="ja-JP" altLang="en-US" sz="2800" b="0" dirty="0"/>
               <a:t>を表す。</a:t>
             </a:r>
           </a:p>
           <a:p>
             <a:r>
-              <a:rPr lang="ja-JP" altLang="en-US" sz="2800" dirty="0" smtClean="0"/>
+              <a:rPr lang="ja-JP" altLang="en-US" sz="2800" dirty="0"/>
               <a:t>（例）  </a:t>
             </a:r>
             <a:r>
@@ -11181,22 +10908,18 @@
               <a:t>は、 </a:t>
             </a:r>
             <a:r>
-              <a:rPr lang="en-US" altLang="ja-JP" sz="2800" b="0" dirty="0" smtClean="0"/>
+              <a:rPr lang="en-US" altLang="ja-JP" sz="2800" b="0" dirty="0"/>
               <a:t>(</a:t>
             </a:r>
             <a:r>
-              <a:rPr lang="ja-JP" altLang="en-US" sz="2800" b="0" dirty="0" smtClean="0">
+              <a:rPr lang="ja-JP" altLang="en-US" sz="2800" b="0" dirty="0">
                 <a:sym typeface="Symbol" pitchFamily="18" charset="2"/>
               </a:rPr>
               <a:t></a:t>
             </a:r>
             <a:r>
-              <a:rPr lang="en-US" altLang="ja-JP" sz="2800" b="0" dirty="0" smtClean="0"/>
-              <a:t>x</a:t>
-            </a:r>
-            <a:r>
               <a:rPr lang="en-US" altLang="ja-JP" sz="2800" b="0" dirty="0"/>
-              <a:t>. (</a:t>
+              <a:t>x. (</a:t>
             </a:r>
             <a:r>
               <a:rPr lang="ja-JP" altLang="en-US" sz="2800" b="0" dirty="0">
@@ -11216,14 +10939,10 @@
             </a:r>
             <a:r>
               <a:rPr lang="en-US" altLang="ja-JP" sz="2800" b="0" dirty="0"/>
-              <a:t>z. ((x y) z</a:t>
-            </a:r>
-            <a:r>
-              <a:rPr lang="en-US" altLang="ja-JP" sz="2800" b="0" dirty="0" smtClean="0"/>
-              <a:t>))))</a:t>
-            </a:r>
-            <a:r>
-              <a:rPr lang="en-US" altLang="ja-JP" sz="2800" dirty="0" smtClean="0"/>
+              <a:t>z. ((x y) z))))</a:t>
+            </a:r>
+            <a:r>
+              <a:rPr lang="en-US" altLang="ja-JP" sz="2800" dirty="0"/>
               <a:t> </a:t>
             </a:r>
             <a:r>
@@ -11239,13 +10958,6 @@
   <p:clrMapOvr>
     <a:masterClrMapping/>
   </p:clrMapOvr>
-  <p:timing>
-    <p:tnLst>
-      <p:par>
-        <p:cTn xmlns:p14="http://schemas.microsoft.com/office/powerpoint/2010/main" id="1" dur="indefinite" restart="never" nodeType="tmRoot"/>
-      </p:par>
-    </p:tnLst>
-  </p:timing>
 </p:sld>
 </file>
 
@@ -11282,7 +10994,7 @@
           <a:lstStyle/>
           <a:p>
             <a:r>
-              <a:rPr lang="ja-JP" altLang="en-US" smtClean="0"/>
+              <a:rPr lang="ja-JP" altLang="en-US"/>
               <a:t>ラムダ式</a:t>
             </a:r>
           </a:p>
@@ -11347,31 +11059,22 @@
             <a:pPr marL="457200" indent="-457200"/>
             <a:r>
               <a:rPr lang="ja-JP" altLang="en-US" sz="2800" b="0" dirty="0"/>
-              <a:t>で定義される</a:t>
-            </a:r>
-            <a:r>
-              <a:rPr lang="ja-JP" altLang="en-US" sz="2800" b="0" dirty="0" smtClean="0"/>
-              <a:t>関数</a:t>
-            </a:r>
-            <a:r>
-              <a:rPr lang="en-US" altLang="ja-JP" sz="2800" b="0" dirty="0" smtClean="0"/>
+              <a:t>で定義される関数</a:t>
+            </a:r>
+            <a:r>
+              <a:rPr lang="en-US" altLang="ja-JP" sz="2800" b="0" dirty="0"/>
               <a:t>g</a:t>
             </a:r>
             <a:r>
-              <a:rPr lang="ja-JP" altLang="en-US" sz="2800" b="0" dirty="0" smtClean="0"/>
+              <a:rPr lang="ja-JP" altLang="en-US" sz="2800" b="0" dirty="0"/>
               <a:t>を</a:t>
             </a:r>
-            <a:endParaRPr lang="ja-JP" altLang="en-US" sz="2800" b="0" dirty="0"/>
           </a:p>
           <a:p>
             <a:pPr marL="457200" indent="-457200"/>
             <a:r>
-              <a:rPr lang="en-US" altLang="ja-JP" sz="2800" b="0" dirty="0" smtClean="0"/>
-              <a:t>g </a:t>
-            </a:r>
-            <a:r>
               <a:rPr lang="en-US" altLang="ja-JP" sz="2800" b="0" dirty="0"/>
-              <a:t>= </a:t>
+              <a:t>g = </a:t>
             </a:r>
             <a:r>
               <a:rPr lang="en-US" altLang="ja-JP" sz="2800" b="0" dirty="0">
@@ -11403,13 +11106,6 @@
   <p:clrMapOvr>
     <a:masterClrMapping/>
   </p:clrMapOvr>
-  <p:timing>
-    <p:tnLst>
-      <p:par>
-        <p:cTn xmlns:p14="http://schemas.microsoft.com/office/powerpoint/2010/main" id="1" dur="indefinite" restart="never" nodeType="tmRoot"/>
-      </p:par>
-    </p:tnLst>
-  </p:timing>
 </p:sld>
 </file>
 
@@ -11446,7 +11142,7 @@
           <a:lstStyle/>
           <a:p>
             <a:r>
-              <a:rPr lang="ja-JP" altLang="en-US" dirty="0" smtClean="0"/>
+              <a:rPr lang="ja-JP" altLang="en-US" dirty="0"/>
               <a:t>ラムダ計算</a:t>
             </a:r>
           </a:p>
@@ -11474,18 +11170,17 @@
           <a:lstStyle/>
           <a:p>
             <a:r>
-              <a:rPr lang="ja-JP" altLang="en-US" sz="2800" dirty="0" smtClean="0"/>
+              <a:rPr lang="ja-JP" altLang="en-US" sz="2800" dirty="0"/>
               <a:t>ラムダ式に対し、形式的な式変形（</a:t>
             </a:r>
             <a:r>
-              <a:rPr lang="en-US" altLang="ja-JP" sz="2800" dirty="0" smtClean="0"/>
+              <a:rPr lang="en-US" altLang="ja-JP" sz="2800" dirty="0"/>
               <a:t>β</a:t>
             </a:r>
             <a:r>
-              <a:rPr lang="ja-JP" altLang="en-US" sz="2800" dirty="0" smtClean="0"/>
+              <a:rPr lang="ja-JP" altLang="en-US" sz="2800" dirty="0"/>
               <a:t>変換、次ページ以降で説明）を行うことが計算であるという考えに従った計算体系がラムダ計算。</a:t>
             </a:r>
-            <a:endParaRPr lang="ja-JP" altLang="en-US" sz="2800" dirty="0"/>
           </a:p>
         </p:txBody>
       </p:sp>
@@ -11494,13 +11189,6 @@
   <p:clrMapOvr>
     <a:masterClrMapping/>
   </p:clrMapOvr>
-  <p:timing>
-    <p:tnLst>
-      <p:par>
-        <p:cTn xmlns:p14="http://schemas.microsoft.com/office/powerpoint/2010/main" id="1" dur="indefinite" restart="never" nodeType="tmRoot"/>
-      </p:par>
-    </p:tnLst>
-  </p:timing>
 </p:sld>
 </file>
 
@@ -11539,7 +11227,7 @@
           <a:lstStyle/>
           <a:p>
             <a:r>
-              <a:rPr lang="ja-JP" altLang="en-US" dirty="0" smtClean="0">
+              <a:rPr lang="ja-JP" altLang="en-US" dirty="0">
                 <a:sym typeface="Symbol" pitchFamily="18" charset="2"/>
               </a:rPr>
               <a:t>変換の例</a:t>
@@ -11569,7 +11257,7 @@
           <a:lstStyle/>
           <a:p>
             <a:pPr marL="457200" indent="-457200"/>
-            <a:endParaRPr lang="en-US" altLang="ja-JP" sz="2800" dirty="0" smtClean="0">
+            <a:endParaRPr lang="en-US" altLang="ja-JP" sz="2800" dirty="0">
               <a:sym typeface="Symbol" pitchFamily="18" charset="2"/>
             </a:endParaRPr>
           </a:p>
@@ -11603,23 +11291,23 @@
           <a:lstStyle/>
           <a:p>
             <a:r>
-              <a:rPr lang="en-US" altLang="ja-JP" sz="2800" dirty="0" smtClean="0"/>
+              <a:rPr lang="en-US" altLang="ja-JP" sz="2800" dirty="0"/>
               <a:t>g ( x ) = x  </a:t>
             </a:r>
             <a:r>
-              <a:rPr lang="ja-JP" altLang="en-US" sz="2800" dirty="0" smtClean="0"/>
+              <a:rPr lang="ja-JP" altLang="en-US" sz="2800" dirty="0"/>
               <a:t>と </a:t>
             </a:r>
             <a:r>
-              <a:rPr lang="en-US" altLang="ja-JP" sz="2800" dirty="0" smtClean="0"/>
+              <a:rPr lang="en-US" altLang="ja-JP" sz="2800" dirty="0"/>
               <a:t>g ( y ) = y</a:t>
             </a:r>
             <a:r>
-              <a:rPr lang="ja-JP" altLang="en-US" sz="2800" dirty="0" smtClean="0"/>
+              <a:rPr lang="ja-JP" altLang="en-US" sz="2800" dirty="0"/>
               <a:t>は同じ意味であるのと同じ。</a:t>
             </a:r>
             <a:r>
-              <a:rPr lang="en-US" altLang="ja-JP" sz="2800" dirty="0" smtClean="0"/>
+              <a:rPr lang="en-US" altLang="ja-JP" sz="2800" dirty="0"/>
               <a:t> </a:t>
             </a:r>
             <a:endParaRPr lang="ja-JP" altLang="en-US" sz="2800" dirty="0"/>
@@ -11649,25 +11337,25 @@
           <a:p>
             <a:pPr marL="457200" indent="-457200"/>
             <a:r>
-              <a:rPr lang="ja-JP" altLang="en-US" sz="2800" dirty="0" smtClean="0">
+              <a:rPr lang="ja-JP" altLang="en-US" sz="2800" dirty="0">
                 <a:sym typeface="Symbol" pitchFamily="18" charset="2"/>
               </a:rPr>
               <a:t>（例１）</a:t>
             </a:r>
             <a:r>
-              <a:rPr lang="en-US" altLang="ja-JP" sz="2800" dirty="0" smtClean="0">
+              <a:rPr lang="en-US" altLang="ja-JP" sz="2800" dirty="0">
                 <a:sym typeface="Symbol" pitchFamily="18" charset="2"/>
               </a:rPr>
               <a:t> (x. x)  z</a:t>
             </a:r>
             <a:r>
-              <a:rPr lang="ja-JP" altLang="en-US" sz="2800" dirty="0" smtClean="0">
+              <a:rPr lang="ja-JP" altLang="en-US" sz="2800" dirty="0">
                 <a:sym typeface="Symbol" pitchFamily="18" charset="2"/>
               </a:rPr>
               <a:t> </a:t>
             </a:r>
             <a:r>
-              <a:rPr lang="en-US" altLang="ja-JP" sz="2800" dirty="0" smtClean="0">
+              <a:rPr lang="en-US" altLang="ja-JP" sz="2800" dirty="0">
                 <a:sym typeface="Symbol" pitchFamily="18" charset="2"/>
               </a:rPr>
               <a:t>  z</a:t>
@@ -11676,25 +11364,25 @@
           <a:p>
             <a:pPr marL="457200" indent="-457200"/>
             <a:r>
-              <a:rPr lang="ja-JP" altLang="en-US" sz="2800" dirty="0" smtClean="0">
+              <a:rPr lang="ja-JP" altLang="en-US" sz="2800" dirty="0">
                 <a:sym typeface="Symbol" pitchFamily="18" charset="2"/>
               </a:rPr>
               <a:t>（例２）</a:t>
             </a:r>
             <a:r>
-              <a:rPr lang="en-US" altLang="ja-JP" sz="2800" dirty="0" smtClean="0">
+              <a:rPr lang="en-US" altLang="ja-JP" sz="2800" dirty="0">
                 <a:sym typeface="Symbol" pitchFamily="18" charset="2"/>
               </a:rPr>
               <a:t> (y. y)  z</a:t>
             </a:r>
             <a:r>
-              <a:rPr lang="ja-JP" altLang="en-US" sz="2800" dirty="0" smtClean="0">
+              <a:rPr lang="ja-JP" altLang="en-US" sz="2800" dirty="0">
                 <a:sym typeface="Symbol" pitchFamily="18" charset="2"/>
               </a:rPr>
               <a:t> </a:t>
             </a:r>
             <a:r>
-              <a:rPr lang="en-US" altLang="ja-JP" sz="2800" dirty="0" smtClean="0">
+              <a:rPr lang="en-US" altLang="ja-JP" sz="2800" dirty="0">
                 <a:sym typeface="Symbol" pitchFamily="18" charset="2"/>
               </a:rPr>
               <a:t>  z</a:t>
@@ -11724,54 +11412,53 @@
           <a:lstStyle/>
           <a:p>
             <a:r>
-              <a:rPr lang="ja-JP" altLang="en-US" sz="2800" dirty="0" smtClean="0"/>
+              <a:rPr lang="ja-JP" altLang="en-US" sz="2800" dirty="0"/>
               <a:t>直感的には、</a:t>
             </a:r>
             <a:r>
-              <a:rPr lang="en-US" altLang="ja-JP" sz="2800" dirty="0" err="1" smtClean="0"/>
+              <a:rPr lang="en-US" altLang="ja-JP" sz="2800" dirty="0" err="1"/>
               <a:t>λx</a:t>
             </a:r>
             <a:r>
-              <a:rPr lang="en-US" altLang="ja-JP" sz="2800" dirty="0" smtClean="0"/>
+              <a:rPr lang="en-US" altLang="ja-JP" sz="2800" dirty="0"/>
               <a:t>. x</a:t>
             </a:r>
             <a:r>
-              <a:rPr lang="ja-JP" altLang="en-US" sz="2800" dirty="0" smtClean="0"/>
+              <a:rPr lang="ja-JP" altLang="en-US" sz="2800" dirty="0"/>
               <a:t>は</a:t>
             </a:r>
             <a:r>
-              <a:rPr lang="en-US" altLang="ja-JP" sz="2800" dirty="0" smtClean="0"/>
+              <a:rPr lang="en-US" altLang="ja-JP" sz="2800" dirty="0"/>
               <a:t>x</a:t>
             </a:r>
             <a:r>
-              <a:rPr lang="ja-JP" altLang="en-US" sz="2800" dirty="0" smtClean="0"/>
+              <a:rPr lang="ja-JP" altLang="en-US" sz="2800" dirty="0"/>
               <a:t>を受け取って</a:t>
             </a:r>
             <a:r>
-              <a:rPr lang="en-US" altLang="ja-JP" sz="2800" dirty="0" smtClean="0"/>
+              <a:rPr lang="en-US" altLang="ja-JP" sz="2800" dirty="0"/>
               <a:t>x</a:t>
             </a:r>
             <a:r>
-              <a:rPr lang="ja-JP" altLang="en-US" sz="2800" dirty="0" smtClean="0"/>
+              <a:rPr lang="ja-JP" altLang="en-US" sz="2800" dirty="0"/>
               <a:t>を返す関数であり、この</a:t>
             </a:r>
             <a:r>
-              <a:rPr lang="en-US" altLang="ja-JP" sz="2800" dirty="0" smtClean="0"/>
+              <a:rPr lang="en-US" altLang="ja-JP" sz="2800" dirty="0"/>
               <a:t>x</a:t>
             </a:r>
             <a:r>
-              <a:rPr lang="ja-JP" altLang="en-US" sz="2800" dirty="0" smtClean="0"/>
+              <a:rPr lang="ja-JP" altLang="en-US" sz="2800" dirty="0"/>
               <a:t>を</a:t>
             </a:r>
             <a:r>
-              <a:rPr lang="en-US" altLang="ja-JP" sz="2800" dirty="0" smtClean="0"/>
+              <a:rPr lang="en-US" altLang="ja-JP" sz="2800" dirty="0"/>
               <a:t>y</a:t>
             </a:r>
             <a:r>
-              <a:rPr lang="ja-JP" altLang="en-US" sz="2800" dirty="0" smtClean="0"/>
+              <a:rPr lang="ja-JP" altLang="en-US" sz="2800" dirty="0"/>
               <a:t>に変えても意味は同じである。</a:t>
             </a:r>
-            <a:endParaRPr lang="ja-JP" altLang="en-US" sz="2800" dirty="0"/>
           </a:p>
         </p:txBody>
       </p:sp>
@@ -11780,13 +11467,6 @@
   <p:clrMapOvr>
     <a:masterClrMapping/>
   </p:clrMapOvr>
-  <p:timing>
-    <p:tnLst>
-      <p:par>
-        <p:cTn xmlns:p14="http://schemas.microsoft.com/office/powerpoint/2010/main" id="1" dur="indefinite" restart="never" nodeType="tmRoot"/>
-      </p:par>
-    </p:tnLst>
-  </p:timing>
 </p:sld>
 </file>
 
@@ -11825,7 +11505,7 @@
           <a:lstStyle/>
           <a:p>
             <a:r>
-              <a:rPr lang="ja-JP" altLang="en-US" dirty="0" smtClean="0">
+              <a:rPr lang="ja-JP" altLang="en-US" dirty="0">
                 <a:sym typeface="Symbol" pitchFamily="18" charset="2"/>
               </a:rPr>
               <a:t>変換の例（続き）</a:t>
@@ -11856,25 +11536,25 @@
           <a:p>
             <a:pPr marL="457200" indent="-457200"/>
             <a:r>
-              <a:rPr lang="ja-JP" altLang="en-US" sz="2800" dirty="0" smtClean="0">
+              <a:rPr lang="ja-JP" altLang="en-US" sz="2800" dirty="0">
                 <a:sym typeface="Symbol" pitchFamily="18" charset="2"/>
               </a:rPr>
               <a:t>（例３）</a:t>
             </a:r>
             <a:r>
-              <a:rPr lang="en-US" altLang="ja-JP" sz="2800" dirty="0" smtClean="0">
+              <a:rPr lang="en-US" altLang="ja-JP" sz="2800" dirty="0">
                 <a:sym typeface="Symbol" pitchFamily="18" charset="2"/>
               </a:rPr>
               <a:t> (x. x</a:t>
             </a:r>
             <a:r>
-              <a:rPr lang="ja-JP" altLang="en-US" sz="2800" dirty="0" smtClean="0">
+              <a:rPr lang="ja-JP" altLang="en-US" sz="2800" dirty="0">
                 <a:sym typeface="Symbol" pitchFamily="18" charset="2"/>
               </a:rPr>
               <a:t> </a:t>
             </a:r>
             <a:r>
-              <a:rPr lang="en-US" altLang="ja-JP" sz="2800" dirty="0" smtClean="0">
+              <a:rPr lang="en-US" altLang="ja-JP" sz="2800" dirty="0">
                 <a:sym typeface="Symbol" pitchFamily="18" charset="2"/>
               </a:rPr>
               <a:t>y) (z. z)  (z. z) y</a:t>
@@ -11882,7 +11562,7 @@
           </a:p>
           <a:p>
             <a:pPr marL="457200" indent="-457200"/>
-            <a:endParaRPr lang="en-US" altLang="ja-JP" sz="2800" dirty="0" smtClean="0">
+            <a:endParaRPr lang="en-US" altLang="ja-JP" sz="2800" dirty="0">
               <a:sym typeface="Symbol" pitchFamily="18" charset="2"/>
             </a:endParaRPr>
           </a:p>
@@ -11910,90 +11590,89 @@
           <a:lstStyle/>
           <a:p>
             <a:r>
-              <a:rPr lang="en-US" altLang="ja-JP" sz="2800" dirty="0" smtClean="0"/>
+              <a:rPr lang="en-US" altLang="ja-JP" sz="2800" dirty="0"/>
               <a:t>(</a:t>
             </a:r>
             <a:r>
-              <a:rPr lang="en-US" altLang="ja-JP" sz="2800" dirty="0" err="1" smtClean="0"/>
+              <a:rPr lang="en-US" altLang="ja-JP" sz="2800" dirty="0" err="1"/>
               <a:t>λx</a:t>
             </a:r>
             <a:r>
-              <a:rPr lang="en-US" altLang="ja-JP" sz="2800" dirty="0" smtClean="0"/>
+              <a:rPr lang="en-US" altLang="ja-JP" sz="2800" dirty="0"/>
               <a:t>. x y)</a:t>
             </a:r>
             <a:r>
-              <a:rPr lang="ja-JP" altLang="en-US" sz="2800" dirty="0" smtClean="0"/>
+              <a:rPr lang="ja-JP" altLang="en-US" sz="2800" dirty="0"/>
               <a:t>は、</a:t>
             </a:r>
             <a:r>
-              <a:rPr lang="en-US" altLang="ja-JP" sz="2800" dirty="0" smtClean="0"/>
+              <a:rPr lang="en-US" altLang="ja-JP" sz="2800" dirty="0"/>
               <a:t>x</a:t>
             </a:r>
             <a:r>
-              <a:rPr lang="ja-JP" altLang="en-US" sz="2800" dirty="0" smtClean="0"/>
+              <a:rPr lang="ja-JP" altLang="en-US" sz="2800" dirty="0"/>
               <a:t>を受け取って、それを</a:t>
             </a:r>
             <a:r>
-              <a:rPr lang="en-US" altLang="ja-JP" sz="2800" dirty="0" smtClean="0"/>
+              <a:rPr lang="en-US" altLang="ja-JP" sz="2800" dirty="0"/>
               <a:t>y</a:t>
             </a:r>
             <a:r>
-              <a:rPr lang="ja-JP" altLang="en-US" sz="2800" dirty="0" smtClean="0"/>
+              <a:rPr lang="ja-JP" altLang="en-US" sz="2800" dirty="0"/>
               <a:t>に適用する関数である。</a:t>
             </a:r>
             <a:r>
-              <a:rPr lang="en-US" altLang="ja-JP" sz="2800" dirty="0" smtClean="0"/>
+              <a:rPr lang="en-US" altLang="ja-JP" sz="2800" dirty="0"/>
               <a:t>(</a:t>
             </a:r>
             <a:r>
-              <a:rPr lang="en-US" altLang="ja-JP" sz="2800" dirty="0" err="1" smtClean="0"/>
+              <a:rPr lang="en-US" altLang="ja-JP" sz="2800" dirty="0" err="1"/>
               <a:t>λz</a:t>
             </a:r>
             <a:r>
-              <a:rPr lang="en-US" altLang="ja-JP" sz="2800" dirty="0" smtClean="0"/>
+              <a:rPr lang="en-US" altLang="ja-JP" sz="2800" dirty="0"/>
               <a:t>. z)</a:t>
             </a:r>
             <a:r>
-              <a:rPr lang="ja-JP" altLang="en-US" sz="2800" dirty="0" smtClean="0"/>
+              <a:rPr lang="ja-JP" altLang="en-US" sz="2800" dirty="0"/>
               <a:t>を受け取った場合は、それを</a:t>
             </a:r>
             <a:r>
-              <a:rPr lang="en-US" altLang="ja-JP" sz="2800" dirty="0" smtClean="0"/>
+              <a:rPr lang="en-US" altLang="ja-JP" sz="2800" dirty="0"/>
               <a:t>y</a:t>
             </a:r>
             <a:r>
-              <a:rPr lang="ja-JP" altLang="en-US" sz="2800" dirty="0" smtClean="0"/>
+              <a:rPr lang="ja-JP" altLang="en-US" sz="2800" dirty="0"/>
               <a:t>に適用する関数適用式になる。</a:t>
             </a:r>
             <a:r>
-              <a:rPr lang="en-US" altLang="ja-JP" sz="2800" dirty="0" smtClean="0"/>
+              <a:rPr lang="en-US" altLang="ja-JP" sz="2800" dirty="0"/>
               <a:t>(</a:t>
             </a:r>
             <a:r>
-              <a:rPr lang="ja-JP" altLang="en-US" sz="2800" dirty="0" smtClean="0"/>
+              <a:rPr lang="ja-JP" altLang="en-US" sz="2800" dirty="0"/>
               <a:t>これをさらに</a:t>
             </a:r>
             <a:r>
-              <a:rPr lang="en-US" altLang="ja-JP" sz="2800" dirty="0" smtClean="0"/>
+              <a:rPr lang="en-US" altLang="ja-JP" sz="2800" dirty="0"/>
               <a:t>β</a:t>
             </a:r>
             <a:r>
-              <a:rPr lang="ja-JP" altLang="en-US" sz="2800" dirty="0" smtClean="0"/>
+              <a:rPr lang="ja-JP" altLang="en-US" sz="2800" dirty="0"/>
               <a:t>変換すると</a:t>
             </a:r>
             <a:r>
-              <a:rPr lang="en-US" altLang="ja-JP" sz="2800" dirty="0" smtClean="0"/>
+              <a:rPr lang="en-US" altLang="ja-JP" sz="2800" dirty="0"/>
               <a:t>y</a:t>
             </a:r>
             <a:r>
-              <a:rPr lang="ja-JP" altLang="en-US" sz="2800" dirty="0" smtClean="0"/>
+              <a:rPr lang="ja-JP" altLang="en-US" sz="2800" dirty="0"/>
               <a:t>になる</a:t>
             </a:r>
             <a:r>
-              <a:rPr lang="en-US" altLang="ja-JP" sz="2800" dirty="0" smtClean="0"/>
+              <a:rPr lang="en-US" altLang="ja-JP" sz="2800" dirty="0"/>
               <a:t>)</a:t>
             </a:r>
-            <a:endParaRPr lang="en-US" altLang="ja-JP" sz="2800" dirty="0"/>
           </a:p>
         </p:txBody>
       </p:sp>
@@ -12019,45 +11698,45 @@
           <a:lstStyle/>
           <a:p>
             <a:r>
-              <a:rPr lang="ja-JP" altLang="en-US" sz="2800" dirty="0" smtClean="0"/>
+              <a:rPr lang="ja-JP" altLang="en-US" sz="2800" dirty="0"/>
               <a:t>（例４）</a:t>
             </a:r>
             <a:r>
-              <a:rPr lang="en-US" altLang="ja-JP" sz="2800" dirty="0" smtClean="0"/>
+              <a:rPr lang="en-US" altLang="ja-JP" sz="2800" dirty="0"/>
               <a:t> (</a:t>
             </a:r>
             <a:r>
-              <a:rPr lang="en-US" altLang="ja-JP" sz="2800" dirty="0" err="1" smtClean="0"/>
+              <a:rPr lang="en-US" altLang="ja-JP" sz="2800" dirty="0" err="1"/>
               <a:t>λx</a:t>
             </a:r>
             <a:r>
-              <a:rPr lang="en-US" altLang="ja-JP" sz="2800" dirty="0" smtClean="0"/>
+              <a:rPr lang="en-US" altLang="ja-JP" sz="2800" dirty="0"/>
               <a:t>. x)  (</a:t>
             </a:r>
             <a:r>
-              <a:rPr lang="en-US" altLang="ja-JP" sz="2800" dirty="0" err="1" smtClean="0"/>
+              <a:rPr lang="en-US" altLang="ja-JP" sz="2800" dirty="0" err="1"/>
               <a:t>λy</a:t>
             </a:r>
             <a:r>
-              <a:rPr lang="en-US" altLang="ja-JP" sz="2800" dirty="0" smtClean="0"/>
+              <a:rPr lang="en-US" altLang="ja-JP" sz="2800" dirty="0"/>
               <a:t>. y) </a:t>
             </a:r>
             <a:r>
-              <a:rPr lang="en-US" altLang="ja-JP" sz="2800" dirty="0" smtClean="0">
+              <a:rPr lang="en-US" altLang="ja-JP" sz="2800" dirty="0">
                 <a:sym typeface="Symbol" pitchFamily="18" charset="2"/>
               </a:rPr>
               <a:t> </a:t>
             </a:r>
             <a:r>
-              <a:rPr lang="en-US" altLang="ja-JP" sz="2800" dirty="0" smtClean="0"/>
+              <a:rPr lang="en-US" altLang="ja-JP" sz="2800" dirty="0"/>
               <a:t>(</a:t>
             </a:r>
             <a:r>
-              <a:rPr lang="en-US" altLang="ja-JP" sz="2800" dirty="0" err="1" smtClean="0"/>
+              <a:rPr lang="en-US" altLang="ja-JP" sz="2800" dirty="0" err="1"/>
               <a:t>λy</a:t>
             </a:r>
             <a:r>
-              <a:rPr lang="en-US" altLang="ja-JP" sz="2800" dirty="0" smtClean="0"/>
+              <a:rPr lang="en-US" altLang="ja-JP" sz="2800" dirty="0"/>
               <a:t>. y) </a:t>
             </a:r>
           </a:p>
@@ -12085,70 +11764,69 @@
           <a:lstStyle/>
           <a:p>
             <a:r>
-              <a:rPr lang="en-US" altLang="ja-JP" sz="2800" dirty="0" smtClean="0"/>
+              <a:rPr lang="en-US" altLang="ja-JP" sz="2800" dirty="0"/>
               <a:t>(</a:t>
             </a:r>
             <a:r>
-              <a:rPr lang="en-US" altLang="ja-JP" sz="2800" dirty="0" err="1" smtClean="0"/>
+              <a:rPr lang="en-US" altLang="ja-JP" sz="2800" dirty="0" err="1"/>
               <a:t>λx</a:t>
             </a:r>
             <a:r>
-              <a:rPr lang="en-US" altLang="ja-JP" sz="2800" dirty="0" smtClean="0"/>
+              <a:rPr lang="en-US" altLang="ja-JP" sz="2800" dirty="0"/>
               <a:t>. x)</a:t>
             </a:r>
             <a:r>
-              <a:rPr lang="ja-JP" altLang="en-US" sz="2800" dirty="0" smtClean="0"/>
+              <a:rPr lang="ja-JP" altLang="en-US" sz="2800" dirty="0"/>
               <a:t>は</a:t>
             </a:r>
             <a:r>
-              <a:rPr lang="en-US" altLang="ja-JP" sz="2800" dirty="0" smtClean="0"/>
+              <a:rPr lang="en-US" altLang="ja-JP" sz="2800" dirty="0"/>
               <a:t>x</a:t>
             </a:r>
             <a:r>
-              <a:rPr lang="ja-JP" altLang="en-US" sz="2800" dirty="0" smtClean="0"/>
+              <a:rPr lang="ja-JP" altLang="en-US" sz="2800" dirty="0"/>
               <a:t>を受け取って</a:t>
             </a:r>
             <a:r>
-              <a:rPr lang="en-US" altLang="ja-JP" sz="2800" dirty="0" smtClean="0"/>
+              <a:rPr lang="en-US" altLang="ja-JP" sz="2800" dirty="0"/>
               <a:t>x</a:t>
             </a:r>
             <a:r>
-              <a:rPr lang="ja-JP" altLang="en-US" sz="2800" dirty="0" smtClean="0"/>
+              <a:rPr lang="ja-JP" altLang="en-US" sz="2800" dirty="0"/>
               <a:t>を返す関数であり、 </a:t>
             </a:r>
             <a:r>
-              <a:rPr lang="en-US" altLang="ja-JP" sz="2800" dirty="0" smtClean="0"/>
+              <a:rPr lang="en-US" altLang="ja-JP" sz="2800" dirty="0"/>
               <a:t>(</a:t>
             </a:r>
             <a:r>
-              <a:rPr lang="en-US" altLang="ja-JP" sz="2800" dirty="0" err="1" smtClean="0"/>
+              <a:rPr lang="en-US" altLang="ja-JP" sz="2800" dirty="0" err="1"/>
               <a:t>λy</a:t>
             </a:r>
             <a:r>
-              <a:rPr lang="en-US" altLang="ja-JP" sz="2800" dirty="0" smtClean="0"/>
+              <a:rPr lang="en-US" altLang="ja-JP" sz="2800" dirty="0"/>
               <a:t>. y) </a:t>
             </a:r>
             <a:r>
-              <a:rPr lang="ja-JP" altLang="en-US" sz="2800" dirty="0" smtClean="0"/>
+              <a:rPr lang="ja-JP" altLang="en-US" sz="2800" dirty="0"/>
               <a:t>を受けとった場合、 </a:t>
             </a:r>
             <a:r>
-              <a:rPr lang="en-US" altLang="ja-JP" sz="2800" dirty="0" smtClean="0"/>
+              <a:rPr lang="en-US" altLang="ja-JP" sz="2800" dirty="0"/>
               <a:t>(</a:t>
             </a:r>
             <a:r>
-              <a:rPr lang="en-US" altLang="ja-JP" sz="2800" dirty="0" err="1" smtClean="0"/>
+              <a:rPr lang="en-US" altLang="ja-JP" sz="2800" dirty="0" err="1"/>
               <a:t>λy</a:t>
             </a:r>
             <a:r>
-              <a:rPr lang="en-US" altLang="ja-JP" sz="2800" dirty="0" smtClean="0"/>
+              <a:rPr lang="en-US" altLang="ja-JP" sz="2800" dirty="0"/>
               <a:t>. y)</a:t>
             </a:r>
             <a:r>
-              <a:rPr lang="ja-JP" altLang="en-US" sz="2800" dirty="0" smtClean="0"/>
+              <a:rPr lang="ja-JP" altLang="en-US" sz="2800" dirty="0"/>
               <a:t>になる。</a:t>
             </a:r>
-            <a:endParaRPr lang="ja-JP" altLang="en-US" sz="2800" dirty="0"/>
           </a:p>
         </p:txBody>
       </p:sp>
@@ -12157,13 +11835,6 @@
   <p:clrMapOvr>
     <a:masterClrMapping/>
   </p:clrMapOvr>
-  <p:timing>
-    <p:tnLst>
-      <p:par>
-        <p:cTn xmlns:p14="http://schemas.microsoft.com/office/powerpoint/2010/main" id="1" dur="indefinite" restart="never" nodeType="tmRoot"/>
-      </p:par>
-    </p:tnLst>
-  </p:timing>
 </p:sld>
 </file>
 
@@ -12200,7 +11871,7 @@
           <a:lstStyle/>
           <a:p>
             <a:r>
-              <a:rPr lang="ja-JP" altLang="en-US" dirty="0" smtClean="0"/>
+              <a:rPr lang="ja-JP" altLang="en-US" dirty="0"/>
               <a:t>メタ変数</a:t>
             </a:r>
           </a:p>
@@ -12238,110 +11909,102 @@
           <a:lstStyle/>
           <a:p>
             <a:r>
-              <a:rPr lang="ja-JP" altLang="en-US" sz="2800" dirty="0" smtClean="0"/>
+              <a:rPr lang="ja-JP" altLang="en-US" sz="2800" dirty="0"/>
               <a:t>以下でラムダ式の変換を定義する。その際に、ラムダ式、定数、変数を表すための変数（メタ変数）として以下のものを用いる。</a:t>
             </a:r>
-            <a:endParaRPr lang="en-US" altLang="ja-JP" sz="2800" dirty="0" smtClean="0"/>
-          </a:p>
-          <a:p>
-            <a:r>
-              <a:rPr lang="en-US" altLang="ja-JP" sz="2800" dirty="0" smtClean="0"/>
+            <a:endParaRPr lang="en-US" altLang="ja-JP" sz="2800" dirty="0"/>
+          </a:p>
+          <a:p>
+            <a:r>
+              <a:rPr lang="en-US" altLang="ja-JP" sz="2800" dirty="0"/>
               <a:t> </a:t>
             </a:r>
           </a:p>
           <a:p>
             <a:r>
-              <a:rPr lang="en-US" altLang="ja-JP" sz="2800" i="1" dirty="0" smtClean="0"/>
+              <a:rPr lang="en-US" altLang="ja-JP" sz="2800" i="1" dirty="0"/>
               <a:t>M, N, P, M</a:t>
             </a:r>
             <a:r>
-              <a:rPr lang="en-US" altLang="ja-JP" sz="2800" baseline="-25000" dirty="0" smtClean="0"/>
+              <a:rPr lang="en-US" altLang="ja-JP" sz="2800" baseline="-25000" dirty="0"/>
               <a:t>1</a:t>
             </a:r>
             <a:r>
-              <a:rPr lang="en-US" altLang="ja-JP" sz="2800" i="1" dirty="0" smtClean="0"/>
+              <a:rPr lang="en-US" altLang="ja-JP" sz="2800" i="1" dirty="0"/>
               <a:t>, M</a:t>
             </a:r>
             <a:r>
-              <a:rPr lang="en-US" altLang="ja-JP" sz="2800" baseline="-25000" dirty="0" smtClean="0"/>
+              <a:rPr lang="en-US" altLang="ja-JP" sz="2800" baseline="-25000" dirty="0"/>
               <a:t>2</a:t>
             </a:r>
             <a:r>
-              <a:rPr lang="en-US" altLang="ja-JP" sz="2800" i="1" dirty="0" smtClean="0"/>
+              <a:rPr lang="en-US" altLang="ja-JP" sz="2800" i="1" dirty="0"/>
               <a:t> </a:t>
             </a:r>
             <a:r>
-              <a:rPr lang="ja-JP" altLang="en-US" sz="2800" dirty="0" smtClean="0"/>
+              <a:rPr lang="ja-JP" altLang="en-US" sz="2800" dirty="0"/>
               <a:t>等</a:t>
             </a:r>
             <a:r>
-              <a:rPr lang="en-US" altLang="ja-JP" sz="2800" dirty="0" smtClean="0"/>
+              <a:rPr lang="en-US" altLang="ja-JP" sz="2800" dirty="0"/>
               <a:t>:  </a:t>
             </a:r>
             <a:r>
-              <a:rPr lang="ja-JP" altLang="en-US" sz="2800" dirty="0" smtClean="0"/>
+              <a:rPr lang="ja-JP" altLang="en-US" sz="2800" dirty="0"/>
               <a:t>ラムダ式</a:t>
             </a:r>
-            <a:endParaRPr lang="en-US" altLang="ja-JP" sz="2800" dirty="0" smtClean="0"/>
-          </a:p>
-          <a:p>
-            <a:r>
-              <a:rPr lang="en-US" altLang="ja-JP" sz="2800" dirty="0" smtClean="0"/>
+            <a:endParaRPr lang="en-US" altLang="ja-JP" sz="2800" dirty="0"/>
+          </a:p>
+          <a:p>
+            <a:r>
+              <a:rPr lang="en-US" altLang="ja-JP" sz="2800" dirty="0"/>
               <a:t> </a:t>
             </a:r>
             <a:r>
-              <a:rPr lang="en-US" altLang="ja-JP" sz="2800" i="1" dirty="0" smtClean="0"/>
+              <a:rPr lang="en-US" altLang="ja-JP" sz="2800" i="1" dirty="0"/>
               <a:t>c</a:t>
             </a:r>
             <a:r>
-              <a:rPr lang="en-US" altLang="ja-JP" sz="2800" dirty="0" smtClean="0"/>
+              <a:rPr lang="en-US" altLang="ja-JP" sz="2800" dirty="0"/>
               <a:t>: </a:t>
             </a:r>
             <a:r>
-              <a:rPr lang="ja-JP" altLang="en-US" sz="2800" dirty="0" smtClean="0"/>
+              <a:rPr lang="ja-JP" altLang="en-US" sz="2800" dirty="0"/>
               <a:t>定数</a:t>
             </a:r>
             <a:endParaRPr lang="ja-JP" altLang="en-US" sz="2800" b="0" dirty="0"/>
           </a:p>
           <a:p>
             <a:r>
-              <a:rPr lang="en-US" altLang="ja-JP" sz="2800" b="0" dirty="0" smtClean="0"/>
+              <a:rPr lang="en-US" altLang="ja-JP" sz="2800" b="0" dirty="0"/>
               <a:t> </a:t>
             </a:r>
             <a:r>
-              <a:rPr lang="en-US" altLang="ja-JP" sz="2800" b="0" i="1" dirty="0" smtClean="0"/>
+              <a:rPr lang="en-US" altLang="ja-JP" sz="2800" b="0" i="1" dirty="0"/>
               <a:t>x, y, z </a:t>
             </a:r>
             <a:r>
-              <a:rPr lang="en-US" altLang="ja-JP" sz="2800" dirty="0" smtClean="0"/>
+              <a:rPr lang="en-US" altLang="ja-JP" sz="2800" dirty="0"/>
               <a:t>: </a:t>
             </a:r>
             <a:r>
-              <a:rPr lang="ja-JP" altLang="en-US" sz="2800" b="0" dirty="0" smtClean="0"/>
-              <a:t>変数</a:t>
-            </a:r>
-            <a:r>
               <a:rPr lang="ja-JP" altLang="en-US" sz="2800" b="0" dirty="0"/>
-              <a:t>（</a:t>
+              <a:t>変数（</a:t>
             </a:r>
             <a:r>
               <a:rPr lang="en-US" altLang="ja-JP" sz="2800" b="0" dirty="0"/>
-              <a:t>x, y, z, </a:t>
-            </a:r>
-            <a:r>
-              <a:rPr lang="en-US" altLang="ja-JP" sz="2800" b="0" dirty="0" smtClean="0"/>
-              <a:t>w</a:t>
-            </a:r>
-            <a:r>
-              <a:rPr lang="ja-JP" altLang="en-US" sz="2800" b="0" dirty="0" smtClean="0"/>
+              <a:t>x, y, z, w</a:t>
+            </a:r>
+            <a:r>
+              <a:rPr lang="ja-JP" altLang="en-US" sz="2800" b="0" dirty="0"/>
               <a:t>等。このスライドでは、立体か</a:t>
             </a:r>
             <a:r>
-              <a:rPr lang="ja-JP" altLang="en-US" sz="2800" dirty="0" smtClean="0"/>
+              <a:rPr lang="ja-JP" altLang="en-US" sz="2800" dirty="0"/>
               <a:t>斜体かでメタ変数かどうかを区別している。</a:t>
             </a:r>
             <a:r>
-              <a:rPr lang="ja-JP" altLang="en-US" sz="2800" b="0" dirty="0" smtClean="0"/>
+              <a:rPr lang="ja-JP" altLang="en-US" sz="2800" b="0" dirty="0"/>
               <a:t>）</a:t>
             </a:r>
             <a:endParaRPr lang="en-US" altLang="ja-JP" sz="2800" b="0" dirty="0"/>
@@ -12353,13 +12016,6 @@
   <p:clrMapOvr>
     <a:masterClrMapping/>
   </p:clrMapOvr>
-  <p:timing>
-    <p:tnLst>
-      <p:par>
-        <p:cTn xmlns:p14="http://schemas.microsoft.com/office/powerpoint/2010/main" id="1" dur="indefinite" restart="never" nodeType="tmRoot"/>
-      </p:par>
-    </p:tnLst>
-  </p:timing>
 </p:sld>
 </file>
 
@@ -12396,7 +12052,7 @@
           <a:lstStyle/>
           <a:p>
             <a:r>
-              <a:rPr lang="ja-JP" altLang="en-US" smtClean="0">
+              <a:rPr lang="ja-JP" altLang="en-US">
                 <a:sym typeface="Symbol" pitchFamily="18" charset="2"/>
               </a:rPr>
               <a:t>変換</a:t>
@@ -12655,80 +12311,61 @@
             <a:pPr marL="457200" indent="-457200"/>
             <a:r>
               <a:rPr lang="ja-JP" altLang="en-US" sz="2800" dirty="0"/>
-              <a:t>         </a:t>
-            </a:r>
-            <a:r>
-              <a:rPr lang="ja-JP" altLang="en-US" sz="2800" dirty="0" smtClean="0"/>
+              <a:t>          </a:t>
+            </a:r>
+            <a:r>
+              <a:rPr lang="en-US" altLang="ja-JP" sz="2800" b="0" i="1" dirty="0"/>
+              <a:t>MP</a:t>
+            </a:r>
+            <a:r>
+              <a:rPr lang="en-US" altLang="ja-JP" sz="2800" dirty="0"/>
               <a:t> </a:t>
             </a:r>
             <a:r>
-              <a:rPr lang="en-US" altLang="ja-JP" sz="2800" b="0" i="1" dirty="0" smtClean="0"/>
-              <a:t>MP</a:t>
-            </a:r>
-            <a:r>
-              <a:rPr lang="en-US" altLang="ja-JP" sz="2800" dirty="0" smtClean="0"/>
+              <a:rPr lang="en-US" altLang="ja-JP" sz="2800" b="0" dirty="0">
+                <a:sym typeface="Symbol" pitchFamily="18" charset="2"/>
+              </a:rPr>
+              <a:t> </a:t>
+            </a:r>
+            <a:r>
+              <a:rPr lang="en-US" altLang="ja-JP" sz="2800" b="0" i="1" dirty="0">
+                <a:sym typeface="Symbol" pitchFamily="18" charset="2"/>
+              </a:rPr>
+              <a:t>NP</a:t>
+            </a:r>
+          </a:p>
+          <a:p>
+            <a:pPr marL="457200" indent="-457200"/>
+            <a:r>
+              <a:rPr lang="en-US" altLang="ja-JP" sz="2800" b="0" dirty="0">
+                <a:sym typeface="Symbol" pitchFamily="18" charset="2"/>
+              </a:rPr>
+              <a:t>          </a:t>
+            </a:r>
+            <a:r>
+              <a:rPr lang="en-US" altLang="ja-JP" sz="2800" b="0" i="1" dirty="0">
+                <a:sym typeface="Symbol" pitchFamily="18" charset="2"/>
+              </a:rPr>
+              <a:t>PM</a:t>
+            </a:r>
+            <a:r>
+              <a:rPr lang="en-US" altLang="ja-JP" sz="2800" b="0" dirty="0">
+                <a:sym typeface="Symbol" pitchFamily="18" charset="2"/>
+              </a:rPr>
+              <a:t> </a:t>
+            </a:r>
+            <a:r>
+              <a:rPr lang="en-US" altLang="ja-JP" sz="2800" dirty="0">
+                <a:sym typeface="Symbol" pitchFamily="18" charset="2"/>
+              </a:rPr>
               <a:t> </a:t>
             </a:r>
             <a:r>
-              <a:rPr lang="en-US" altLang="ja-JP" sz="2800" b="0" dirty="0">
-                <a:sym typeface="Symbol" pitchFamily="18" charset="2"/>
-              </a:rPr>
-              <a:t> </a:t>
-            </a:r>
-            <a:r>
               <a:rPr lang="en-US" altLang="ja-JP" sz="2800" b="0" i="1" dirty="0">
                 <a:sym typeface="Symbol" pitchFamily="18" charset="2"/>
               </a:rPr>
-              <a:t>NP</a:t>
-            </a:r>
-          </a:p>
-          <a:p>
-            <a:pPr marL="457200" indent="-457200"/>
-            <a:r>
-              <a:rPr lang="en-US" altLang="ja-JP" sz="2800" b="0" dirty="0">
-                <a:sym typeface="Symbol" pitchFamily="18" charset="2"/>
-              </a:rPr>
-              <a:t>         </a:t>
-            </a:r>
-            <a:r>
-              <a:rPr lang="en-US" altLang="ja-JP" sz="2800" b="0" dirty="0" smtClean="0">
-                <a:sym typeface="Symbol" pitchFamily="18" charset="2"/>
-              </a:rPr>
-              <a:t> </a:t>
-            </a:r>
-            <a:r>
-              <a:rPr lang="en-US" altLang="ja-JP" sz="2800" b="0" i="1" dirty="0" smtClean="0">
-                <a:sym typeface="Symbol" pitchFamily="18" charset="2"/>
-              </a:rPr>
-              <a:t>PM</a:t>
-            </a:r>
-            <a:r>
-              <a:rPr lang="en-US" altLang="ja-JP" sz="2800" b="0" dirty="0" smtClean="0">
-                <a:sym typeface="Symbol" pitchFamily="18" charset="2"/>
-              </a:rPr>
-              <a:t> </a:t>
-            </a:r>
-            <a:r>
-              <a:rPr lang="en-US" altLang="ja-JP" sz="2800" b="0" dirty="0">
-                <a:sym typeface="Symbol" pitchFamily="18" charset="2"/>
-              </a:rPr>
-              <a:t></a:t>
-            </a:r>
-            <a:r>
-              <a:rPr lang="en-US" altLang="ja-JP" sz="2800" dirty="0">
-                <a:sym typeface="Symbol" pitchFamily="18" charset="2"/>
-              </a:rPr>
-              <a:t> </a:t>
-            </a:r>
-            <a:r>
-              <a:rPr lang="en-US" altLang="ja-JP" sz="2800" b="0" i="1" dirty="0" smtClean="0">
-                <a:sym typeface="Symbol" pitchFamily="18" charset="2"/>
-              </a:rPr>
               <a:t>PN</a:t>
             </a:r>
-            <a:endParaRPr lang="en-US" altLang="ja-JP" sz="2800" b="0" i="1" dirty="0">
-              <a:sym typeface="Symbol" pitchFamily="18" charset="2"/>
-            </a:endParaRPr>
           </a:p>
         </p:txBody>
       </p:sp>
@@ -12754,58 +12391,57 @@
           <a:lstStyle/>
           <a:p>
             <a:r>
-              <a:rPr lang="en-US" altLang="ja-JP" sz="2800" i="1" dirty="0" smtClean="0"/>
+              <a:rPr lang="en-US" altLang="ja-JP" sz="2800" i="1" dirty="0"/>
               <a:t>M</a:t>
             </a:r>
             <a:r>
-              <a:rPr lang="en-US" altLang="ja-JP" sz="2800" dirty="0" smtClean="0"/>
+              <a:rPr lang="en-US" altLang="ja-JP" sz="2800" dirty="0"/>
               <a:t> [</a:t>
             </a:r>
             <a:r>
-              <a:rPr lang="en-US" altLang="ja-JP" sz="2800" i="1" dirty="0" smtClean="0"/>
+              <a:rPr lang="en-US" altLang="ja-JP" sz="2800" i="1" dirty="0"/>
               <a:t>N</a:t>
             </a:r>
             <a:r>
-              <a:rPr lang="en-US" altLang="ja-JP" sz="2800" dirty="0" smtClean="0"/>
+              <a:rPr lang="en-US" altLang="ja-JP" sz="2800" dirty="0"/>
               <a:t> / </a:t>
             </a:r>
             <a:r>
-              <a:rPr lang="en-US" altLang="ja-JP" sz="2800" i="1" dirty="0" smtClean="0"/>
+              <a:rPr lang="en-US" altLang="ja-JP" sz="2800" i="1" dirty="0"/>
               <a:t>x</a:t>
             </a:r>
             <a:r>
-              <a:rPr lang="en-US" altLang="ja-JP" sz="2800" dirty="0" smtClean="0"/>
+              <a:rPr lang="en-US" altLang="ja-JP" sz="2800" dirty="0"/>
               <a:t>]</a:t>
             </a:r>
             <a:r>
-              <a:rPr lang="ja-JP" altLang="en-US" sz="2800" dirty="0" smtClean="0"/>
+              <a:rPr lang="ja-JP" altLang="en-US" sz="2800" dirty="0"/>
               <a:t>はラムダ式</a:t>
             </a:r>
             <a:r>
-              <a:rPr lang="en-US" altLang="ja-JP" sz="2800" i="1" dirty="0" smtClean="0"/>
+              <a:rPr lang="en-US" altLang="ja-JP" sz="2800" i="1" dirty="0"/>
               <a:t>M</a:t>
             </a:r>
             <a:r>
-              <a:rPr lang="ja-JP" altLang="en-US" sz="2800" dirty="0" smtClean="0"/>
+              <a:rPr lang="ja-JP" altLang="en-US" sz="2800" dirty="0"/>
               <a:t>中の</a:t>
             </a:r>
             <a:r>
-              <a:rPr lang="en-US" altLang="ja-JP" sz="2800" i="1" dirty="0" smtClean="0"/>
+              <a:rPr lang="en-US" altLang="ja-JP" sz="2800" i="1" dirty="0"/>
               <a:t>x</a:t>
             </a:r>
             <a:r>
-              <a:rPr lang="ja-JP" altLang="en-US" sz="2800" dirty="0" smtClean="0"/>
+              <a:rPr lang="ja-JP" altLang="en-US" sz="2800" dirty="0"/>
               <a:t>を</a:t>
             </a:r>
             <a:r>
-              <a:rPr lang="en-US" altLang="ja-JP" sz="2800" i="1" dirty="0" smtClean="0"/>
+              <a:rPr lang="en-US" altLang="ja-JP" sz="2800" i="1" dirty="0"/>
               <a:t>N</a:t>
             </a:r>
             <a:r>
-              <a:rPr lang="ja-JP" altLang="en-US" sz="2800" dirty="0" smtClean="0"/>
+              <a:rPr lang="ja-JP" altLang="en-US" sz="2800" dirty="0"/>
               <a:t>で置き換えたラムダ式を表す。ただし、束縛変数が自由変数とかぶらないように、束縛変数の名前の付け替えを行う。</a:t>
             </a:r>
-            <a:endParaRPr lang="ja-JP" altLang="en-US" sz="2800" dirty="0"/>
           </a:p>
         </p:txBody>
       </p:sp>
@@ -12814,13 +12450,6 @@
   <p:clrMapOvr>
     <a:masterClrMapping/>
   </p:clrMapOvr>
-  <p:timing>
-    <p:tnLst>
-      <p:par>
-        <p:cTn xmlns:p14="http://schemas.microsoft.com/office/powerpoint/2010/main" id="1" dur="indefinite" restart="never" nodeType="tmRoot"/>
-      </p:par>
-    </p:tnLst>
-  </p:timing>
 </p:sld>
 </file>
 
